--- a/day2-deck/decks/Talking Points - Day 2.pptx
+++ b/day2-deck/decks/Talking Points - Day 2.pptx
@@ -2156,7 +2156,7 @@
         <p:spPr>
           <a:xfrm>
             <a:off x="457200" y="1207008"/>
-            <a:ext cx="6400800" cy="4645152"/>
+            <a:ext cx="6400800" cy="4782312"/>
           </a:xfrm>
           <a:prstGeom prst="rect">
             <a:avLst/>
@@ -2176,7 +2176,7 @@
         <p:spPr>
           <a:xfrm>
             <a:off x="7022592" y="1207008"/>
-            <a:ext cx="4709160" cy="4645152"/>
+            <a:ext cx="4709160" cy="4782312"/>
           </a:xfrm>
           <a:prstGeom prst="rect">
             <a:avLst/>
@@ -2314,7 +2314,7 @@
         <p:spPr>
           <a:xfrm>
             <a:off x="713232" y="1874520"/>
-            <a:ext cx="5897880" cy="3840480"/>
+            <a:ext cx="5897880" cy="3977640"/>
           </a:xfrm>
           <a:prstGeom prst="rect">
             <a:avLst/>
@@ -2441,7 +2441,7 @@
         <p:spPr>
           <a:xfrm>
             <a:off x="7269480" y="1920240"/>
-            <a:ext cx="54864" cy="1066800"/>
+            <a:ext cx="54864" cy="1112520"/>
           </a:xfrm>
           <a:prstGeom prst="rect">
             <a:avLst/>
@@ -2502,7 +2502,7 @@
         <p:spPr>
           <a:xfrm>
             <a:off x="7452360" y="2441448"/>
-            <a:ext cx="4023360" cy="563880"/>
+            <a:ext cx="4023360" cy="609600"/>
           </a:xfrm>
           <a:prstGeom prst="rect">
             <a:avLst/>
@@ -2540,8 +2540,8 @@
         </p:nvSpPr>
         <p:spPr>
           <a:xfrm>
-            <a:off x="7269480" y="3215640"/>
-            <a:ext cx="54864" cy="1066800"/>
+            <a:off x="7269480" y="3261360"/>
+            <a:ext cx="54864" cy="1112520"/>
           </a:xfrm>
           <a:prstGeom prst="rect">
             <a:avLst/>
@@ -2560,7 +2560,7 @@
         </p:nvSpPr>
         <p:spPr>
           <a:xfrm>
-            <a:off x="7452360" y="3169920"/>
+            <a:off x="7452360" y="3215640"/>
             <a:ext cx="4023360" cy="566928"/>
           </a:xfrm>
           <a:prstGeom prst="rect">
@@ -2601,8 +2601,8 @@
         </p:nvSpPr>
         <p:spPr>
           <a:xfrm>
-            <a:off x="7452360" y="3736848"/>
-            <a:ext cx="4023360" cy="563880"/>
+            <a:off x="7452360" y="3782568"/>
+            <a:ext cx="4023360" cy="609600"/>
           </a:xfrm>
           <a:prstGeom prst="rect">
             <a:avLst/>
@@ -2640,8 +2640,8 @@
         </p:nvSpPr>
         <p:spPr>
           <a:xfrm>
-            <a:off x="7269480" y="4511040"/>
-            <a:ext cx="54864" cy="1066800"/>
+            <a:off x="7269480" y="4602480"/>
+            <a:ext cx="54864" cy="1112520"/>
           </a:xfrm>
           <a:prstGeom prst="rect">
             <a:avLst/>
@@ -2660,7 +2660,7 @@
         </p:nvSpPr>
         <p:spPr>
           <a:xfrm>
-            <a:off x="7452360" y="4465320"/>
+            <a:off x="7452360" y="4556760"/>
             <a:ext cx="4023360" cy="566928"/>
           </a:xfrm>
           <a:prstGeom prst="rect">
@@ -2701,8 +2701,8 @@
         </p:nvSpPr>
         <p:spPr>
           <a:xfrm>
-            <a:off x="7452360" y="5032248"/>
-            <a:ext cx="4023360" cy="563880"/>
+            <a:off x="7452360" y="5123688"/>
+            <a:ext cx="4023360" cy="609600"/>
           </a:xfrm>
           <a:prstGeom prst="rect">
             <a:avLst/>
@@ -2740,8 +2740,8 @@
         </p:nvSpPr>
         <p:spPr>
           <a:xfrm>
-            <a:off x="457200" y="5961888"/>
-            <a:ext cx="11274552" cy="548640"/>
+            <a:off x="457200" y="6126480"/>
+            <a:ext cx="11274552" cy="615696"/>
           </a:xfrm>
           <a:prstGeom prst="rect">
             <a:avLst/>
@@ -2760,8 +2760,8 @@
         </p:nvSpPr>
         <p:spPr>
           <a:xfrm>
-            <a:off x="658368" y="5980176"/>
-            <a:ext cx="10927080" cy="512064"/>
+            <a:off x="658368" y="6144768"/>
+            <a:ext cx="10927080" cy="579120"/>
           </a:xfrm>
           <a:prstGeom prst="rect">
             <a:avLst/>
@@ -2930,7 +2930,7 @@
         <p:spPr>
           <a:xfrm>
             <a:off x="457200" y="1207008"/>
-            <a:ext cx="6400800" cy="4645152"/>
+            <a:ext cx="6400800" cy="4782312"/>
           </a:xfrm>
           <a:prstGeom prst="rect">
             <a:avLst/>
@@ -2950,7 +2950,7 @@
         <p:spPr>
           <a:xfrm>
             <a:off x="7022592" y="1207008"/>
-            <a:ext cx="4709160" cy="4645152"/>
+            <a:ext cx="4709160" cy="4782312"/>
           </a:xfrm>
           <a:prstGeom prst="rect">
             <a:avLst/>
@@ -3088,7 +3088,7 @@
         <p:spPr>
           <a:xfrm>
             <a:off x="713232" y="1874520"/>
-            <a:ext cx="5897880" cy="3840480"/>
+            <a:ext cx="5897880" cy="3977640"/>
           </a:xfrm>
           <a:prstGeom prst="rect">
             <a:avLst/>
@@ -3215,7 +3215,7 @@
         <p:spPr>
           <a:xfrm>
             <a:off x="7269480" y="1920240"/>
-            <a:ext cx="54864" cy="1714500"/>
+            <a:ext cx="54864" cy="1783080"/>
           </a:xfrm>
           <a:prstGeom prst="rect">
             <a:avLst/>
@@ -3276,7 +3276,7 @@
         <p:spPr>
           <a:xfrm>
             <a:off x="7452360" y="2441448"/>
-            <a:ext cx="4023360" cy="1211580"/>
+            <a:ext cx="4023360" cy="1280160"/>
           </a:xfrm>
           <a:prstGeom prst="rect">
             <a:avLst/>
@@ -3314,8 +3314,8 @@
         </p:nvSpPr>
         <p:spPr>
           <a:xfrm>
-            <a:off x="7269480" y="3863340"/>
-            <a:ext cx="54864" cy="1714500"/>
+            <a:off x="7269480" y="3931920"/>
+            <a:ext cx="54864" cy="1783080"/>
           </a:xfrm>
           <a:prstGeom prst="rect">
             <a:avLst/>
@@ -3334,7 +3334,7 @@
         </p:nvSpPr>
         <p:spPr>
           <a:xfrm>
-            <a:off x="7452360" y="3817620"/>
+            <a:off x="7452360" y="3886200"/>
             <a:ext cx="4023360" cy="566928"/>
           </a:xfrm>
           <a:prstGeom prst="rect">
@@ -3375,8 +3375,8 @@
         </p:nvSpPr>
         <p:spPr>
           <a:xfrm>
-            <a:off x="7452360" y="4384548"/>
-            <a:ext cx="4023360" cy="1211580"/>
+            <a:off x="7452360" y="4453128"/>
+            <a:ext cx="4023360" cy="1280160"/>
           </a:xfrm>
           <a:prstGeom prst="rect">
             <a:avLst/>
@@ -3414,8 +3414,8 @@
         </p:nvSpPr>
         <p:spPr>
           <a:xfrm>
-            <a:off x="457200" y="5961888"/>
-            <a:ext cx="11274552" cy="548640"/>
+            <a:off x="457200" y="6126480"/>
+            <a:ext cx="11274552" cy="371856"/>
           </a:xfrm>
           <a:prstGeom prst="rect">
             <a:avLst/>
@@ -3434,8 +3434,8 @@
         </p:nvSpPr>
         <p:spPr>
           <a:xfrm>
-            <a:off x="658368" y="5980176"/>
-            <a:ext cx="10927080" cy="512064"/>
+            <a:off x="658368" y="6144768"/>
+            <a:ext cx="10927080" cy="335280"/>
           </a:xfrm>
           <a:prstGeom prst="rect">
             <a:avLst/>
@@ -3604,7 +3604,7 @@
         <p:spPr>
           <a:xfrm>
             <a:off x="457200" y="1207008"/>
-            <a:ext cx="6400800" cy="4645152"/>
+            <a:ext cx="6400800" cy="4782312"/>
           </a:xfrm>
           <a:prstGeom prst="rect">
             <a:avLst/>
@@ -3624,7 +3624,7 @@
         <p:spPr>
           <a:xfrm>
             <a:off x="7022592" y="1207008"/>
-            <a:ext cx="4709160" cy="4645152"/>
+            <a:ext cx="4709160" cy="4782312"/>
           </a:xfrm>
           <a:prstGeom prst="rect">
             <a:avLst/>
@@ -3762,7 +3762,7 @@
         <p:spPr>
           <a:xfrm>
             <a:off x="713232" y="1874520"/>
-            <a:ext cx="5897880" cy="3840480"/>
+            <a:ext cx="5897880" cy="3977640"/>
           </a:xfrm>
           <a:prstGeom prst="rect">
             <a:avLst/>
@@ -3889,7 +3889,7 @@
         <p:spPr>
           <a:xfrm>
             <a:off x="7269480" y="1920240"/>
-            <a:ext cx="54864" cy="1066800"/>
+            <a:ext cx="54864" cy="1112520"/>
           </a:xfrm>
           <a:prstGeom prst="rect">
             <a:avLst/>
@@ -3950,7 +3950,7 @@
         <p:spPr>
           <a:xfrm>
             <a:off x="7452360" y="2441448"/>
-            <a:ext cx="4023360" cy="563880"/>
+            <a:ext cx="4023360" cy="609600"/>
           </a:xfrm>
           <a:prstGeom prst="rect">
             <a:avLst/>
@@ -3988,8 +3988,8 @@
         </p:nvSpPr>
         <p:spPr>
           <a:xfrm>
-            <a:off x="7269480" y="3215640"/>
-            <a:ext cx="54864" cy="1066800"/>
+            <a:off x="7269480" y="3261360"/>
+            <a:ext cx="54864" cy="1112520"/>
           </a:xfrm>
           <a:prstGeom prst="rect">
             <a:avLst/>
@@ -4008,7 +4008,7 @@
         </p:nvSpPr>
         <p:spPr>
           <a:xfrm>
-            <a:off x="7452360" y="3169920"/>
+            <a:off x="7452360" y="3215640"/>
             <a:ext cx="4023360" cy="566928"/>
           </a:xfrm>
           <a:prstGeom prst="rect">
@@ -4049,8 +4049,8 @@
         </p:nvSpPr>
         <p:spPr>
           <a:xfrm>
-            <a:off x="7452360" y="3736848"/>
-            <a:ext cx="4023360" cy="563880"/>
+            <a:off x="7452360" y="3782568"/>
+            <a:ext cx="4023360" cy="609600"/>
           </a:xfrm>
           <a:prstGeom prst="rect">
             <a:avLst/>
@@ -4088,8 +4088,8 @@
         </p:nvSpPr>
         <p:spPr>
           <a:xfrm>
-            <a:off x="7269480" y="4511040"/>
-            <a:ext cx="54864" cy="1066800"/>
+            <a:off x="7269480" y="4602480"/>
+            <a:ext cx="54864" cy="1112520"/>
           </a:xfrm>
           <a:prstGeom prst="rect">
             <a:avLst/>
@@ -4108,7 +4108,7 @@
         </p:nvSpPr>
         <p:spPr>
           <a:xfrm>
-            <a:off x="7452360" y="4465320"/>
+            <a:off x="7452360" y="4556760"/>
             <a:ext cx="4023360" cy="566928"/>
           </a:xfrm>
           <a:prstGeom prst="rect">
@@ -4149,8 +4149,8 @@
         </p:nvSpPr>
         <p:spPr>
           <a:xfrm>
-            <a:off x="7452360" y="5032248"/>
-            <a:ext cx="4023360" cy="563880"/>
+            <a:off x="7452360" y="5123688"/>
+            <a:ext cx="4023360" cy="609600"/>
           </a:xfrm>
           <a:prstGeom prst="rect">
             <a:avLst/>
@@ -4188,8 +4188,8 @@
         </p:nvSpPr>
         <p:spPr>
           <a:xfrm>
-            <a:off x="457200" y="5961888"/>
-            <a:ext cx="11274552" cy="548640"/>
+            <a:off x="457200" y="6126480"/>
+            <a:ext cx="11274552" cy="615696"/>
           </a:xfrm>
           <a:prstGeom prst="rect">
             <a:avLst/>
@@ -4208,8 +4208,8 @@
         </p:nvSpPr>
         <p:spPr>
           <a:xfrm>
-            <a:off x="658368" y="5980176"/>
-            <a:ext cx="10927080" cy="512064"/>
+            <a:off x="658368" y="6144768"/>
+            <a:ext cx="10927080" cy="579120"/>
           </a:xfrm>
           <a:prstGeom prst="rect">
             <a:avLst/>
@@ -4378,7 +4378,7 @@
         <p:spPr>
           <a:xfrm>
             <a:off x="457200" y="1207008"/>
-            <a:ext cx="6400800" cy="4645152"/>
+            <a:ext cx="6400800" cy="4782312"/>
           </a:xfrm>
           <a:prstGeom prst="rect">
             <a:avLst/>
@@ -4398,7 +4398,7 @@
         <p:spPr>
           <a:xfrm>
             <a:off x="7022592" y="1207008"/>
-            <a:ext cx="4709160" cy="4645152"/>
+            <a:ext cx="4709160" cy="4782312"/>
           </a:xfrm>
           <a:prstGeom prst="rect">
             <a:avLst/>
@@ -4536,7 +4536,7 @@
         <p:spPr>
           <a:xfrm>
             <a:off x="713232" y="1874520"/>
-            <a:ext cx="5897880" cy="3840480"/>
+            <a:ext cx="5897880" cy="3977640"/>
           </a:xfrm>
           <a:prstGeom prst="rect">
             <a:avLst/>
@@ -4663,7 +4663,7 @@
         <p:spPr>
           <a:xfrm>
             <a:off x="7269480" y="1920240"/>
-            <a:ext cx="54864" cy="1714500"/>
+            <a:ext cx="54864" cy="1783080"/>
           </a:xfrm>
           <a:prstGeom prst="rect">
             <a:avLst/>
@@ -4724,7 +4724,7 @@
         <p:spPr>
           <a:xfrm>
             <a:off x="7452360" y="2441448"/>
-            <a:ext cx="4023360" cy="1211580"/>
+            <a:ext cx="4023360" cy="1280160"/>
           </a:xfrm>
           <a:prstGeom prst="rect">
             <a:avLst/>
@@ -4762,8 +4762,8 @@
         </p:nvSpPr>
         <p:spPr>
           <a:xfrm>
-            <a:off x="7269480" y="3863340"/>
-            <a:ext cx="54864" cy="1714500"/>
+            <a:off x="7269480" y="3931920"/>
+            <a:ext cx="54864" cy="1783080"/>
           </a:xfrm>
           <a:prstGeom prst="rect">
             <a:avLst/>
@@ -4782,7 +4782,7 @@
         </p:nvSpPr>
         <p:spPr>
           <a:xfrm>
-            <a:off x="7452360" y="3817620"/>
+            <a:off x="7452360" y="3886200"/>
             <a:ext cx="4023360" cy="566928"/>
           </a:xfrm>
           <a:prstGeom prst="rect">
@@ -4823,8 +4823,8 @@
         </p:nvSpPr>
         <p:spPr>
           <a:xfrm>
-            <a:off x="7452360" y="4384548"/>
-            <a:ext cx="4023360" cy="1211580"/>
+            <a:off x="7452360" y="4453128"/>
+            <a:ext cx="4023360" cy="1280160"/>
           </a:xfrm>
           <a:prstGeom prst="rect">
             <a:avLst/>
@@ -4862,8 +4862,8 @@
         </p:nvSpPr>
         <p:spPr>
           <a:xfrm>
-            <a:off x="457200" y="5961888"/>
-            <a:ext cx="11274552" cy="548640"/>
+            <a:off x="457200" y="6126480"/>
+            <a:ext cx="11274552" cy="371856"/>
           </a:xfrm>
           <a:prstGeom prst="rect">
             <a:avLst/>
@@ -4882,8 +4882,8 @@
         </p:nvSpPr>
         <p:spPr>
           <a:xfrm>
-            <a:off x="658368" y="5980176"/>
-            <a:ext cx="10927080" cy="512064"/>
+            <a:off x="658368" y="6144768"/>
+            <a:ext cx="10927080" cy="335280"/>
           </a:xfrm>
           <a:prstGeom prst="rect">
             <a:avLst/>
@@ -5052,7 +5052,7 @@
         <p:spPr>
           <a:xfrm>
             <a:off x="457200" y="1207008"/>
-            <a:ext cx="6400800" cy="4645152"/>
+            <a:ext cx="6400800" cy="4782312"/>
           </a:xfrm>
           <a:prstGeom prst="rect">
             <a:avLst/>
@@ -5072,7 +5072,7 @@
         <p:spPr>
           <a:xfrm>
             <a:off x="7022592" y="1207008"/>
-            <a:ext cx="4709160" cy="4645152"/>
+            <a:ext cx="4709160" cy="4782312"/>
           </a:xfrm>
           <a:prstGeom prst="rect">
             <a:avLst/>
@@ -5210,7 +5210,7 @@
         <p:spPr>
           <a:xfrm>
             <a:off x="713232" y="1874520"/>
-            <a:ext cx="5897880" cy="3840480"/>
+            <a:ext cx="5897880" cy="3977640"/>
           </a:xfrm>
           <a:prstGeom prst="rect">
             <a:avLst/>
@@ -5337,7 +5337,7 @@
         <p:spPr>
           <a:xfrm>
             <a:off x="7269480" y="1920240"/>
-            <a:ext cx="54864" cy="1066800"/>
+            <a:ext cx="54864" cy="1112520"/>
           </a:xfrm>
           <a:prstGeom prst="rect">
             <a:avLst/>
@@ -5398,7 +5398,7 @@
         <p:spPr>
           <a:xfrm>
             <a:off x="7452360" y="2441448"/>
-            <a:ext cx="4023360" cy="563880"/>
+            <a:ext cx="4023360" cy="609600"/>
           </a:xfrm>
           <a:prstGeom prst="rect">
             <a:avLst/>
@@ -5436,8 +5436,8 @@
         </p:nvSpPr>
         <p:spPr>
           <a:xfrm>
-            <a:off x="7269480" y="3215640"/>
-            <a:ext cx="54864" cy="1066800"/>
+            <a:off x="7269480" y="3261360"/>
+            <a:ext cx="54864" cy="1112520"/>
           </a:xfrm>
           <a:prstGeom prst="rect">
             <a:avLst/>
@@ -5456,7 +5456,7 @@
         </p:nvSpPr>
         <p:spPr>
           <a:xfrm>
-            <a:off x="7452360" y="3169920"/>
+            <a:off x="7452360" y="3215640"/>
             <a:ext cx="4023360" cy="566928"/>
           </a:xfrm>
           <a:prstGeom prst="rect">
@@ -5497,8 +5497,8 @@
         </p:nvSpPr>
         <p:spPr>
           <a:xfrm>
-            <a:off x="7452360" y="3736848"/>
-            <a:ext cx="4023360" cy="563880"/>
+            <a:off x="7452360" y="3782568"/>
+            <a:ext cx="4023360" cy="609600"/>
           </a:xfrm>
           <a:prstGeom prst="rect">
             <a:avLst/>
@@ -5536,8 +5536,8 @@
         </p:nvSpPr>
         <p:spPr>
           <a:xfrm>
-            <a:off x="7269480" y="4511040"/>
-            <a:ext cx="54864" cy="1066800"/>
+            <a:off x="7269480" y="4602480"/>
+            <a:ext cx="54864" cy="1112520"/>
           </a:xfrm>
           <a:prstGeom prst="rect">
             <a:avLst/>
@@ -5556,7 +5556,7 @@
         </p:nvSpPr>
         <p:spPr>
           <a:xfrm>
-            <a:off x="7452360" y="4465320"/>
+            <a:off x="7452360" y="4556760"/>
             <a:ext cx="4023360" cy="566928"/>
           </a:xfrm>
           <a:prstGeom prst="rect">
@@ -5597,8 +5597,8 @@
         </p:nvSpPr>
         <p:spPr>
           <a:xfrm>
-            <a:off x="7452360" y="5032248"/>
-            <a:ext cx="4023360" cy="563880"/>
+            <a:off x="7452360" y="5123688"/>
+            <a:ext cx="4023360" cy="609600"/>
           </a:xfrm>
           <a:prstGeom prst="rect">
             <a:avLst/>
@@ -5636,8 +5636,8 @@
         </p:nvSpPr>
         <p:spPr>
           <a:xfrm>
-            <a:off x="457200" y="5961888"/>
-            <a:ext cx="11274552" cy="548640"/>
+            <a:off x="457200" y="6126480"/>
+            <a:ext cx="11274552" cy="615696"/>
           </a:xfrm>
           <a:prstGeom prst="rect">
             <a:avLst/>
@@ -5656,8 +5656,8 @@
         </p:nvSpPr>
         <p:spPr>
           <a:xfrm>
-            <a:off x="658368" y="5980176"/>
-            <a:ext cx="10927080" cy="512064"/>
+            <a:off x="658368" y="6144768"/>
+            <a:ext cx="10927080" cy="579120"/>
           </a:xfrm>
           <a:prstGeom prst="rect">
             <a:avLst/>
@@ -5826,7 +5826,7 @@
         <p:spPr>
           <a:xfrm>
             <a:off x="457200" y="1207008"/>
-            <a:ext cx="6400800" cy="4645152"/>
+            <a:ext cx="6400800" cy="4782312"/>
           </a:xfrm>
           <a:prstGeom prst="rect">
             <a:avLst/>
@@ -5846,7 +5846,7 @@
         <p:spPr>
           <a:xfrm>
             <a:off x="7022592" y="1207008"/>
-            <a:ext cx="4709160" cy="4645152"/>
+            <a:ext cx="4709160" cy="4782312"/>
           </a:xfrm>
           <a:prstGeom prst="rect">
             <a:avLst/>
@@ -5984,7 +5984,7 @@
         <p:spPr>
           <a:xfrm>
             <a:off x="713232" y="1874520"/>
-            <a:ext cx="5897880" cy="3840480"/>
+            <a:ext cx="5897880" cy="3977640"/>
           </a:xfrm>
           <a:prstGeom prst="rect">
             <a:avLst/>
@@ -6090,7 +6090,7 @@
         <p:spPr>
           <a:xfrm>
             <a:off x="7269480" y="1920240"/>
-            <a:ext cx="54864" cy="1066800"/>
+            <a:ext cx="54864" cy="1112520"/>
           </a:xfrm>
           <a:prstGeom prst="rect">
             <a:avLst/>
@@ -6151,7 +6151,7 @@
         <p:spPr>
           <a:xfrm>
             <a:off x="7452360" y="2441448"/>
-            <a:ext cx="4023360" cy="563880"/>
+            <a:ext cx="4023360" cy="609600"/>
           </a:xfrm>
           <a:prstGeom prst="rect">
             <a:avLst/>
@@ -6189,8 +6189,8 @@
         </p:nvSpPr>
         <p:spPr>
           <a:xfrm>
-            <a:off x="7269480" y="3215640"/>
-            <a:ext cx="54864" cy="1066800"/>
+            <a:off x="7269480" y="3261360"/>
+            <a:ext cx="54864" cy="1112520"/>
           </a:xfrm>
           <a:prstGeom prst="rect">
             <a:avLst/>
@@ -6209,7 +6209,7 @@
         </p:nvSpPr>
         <p:spPr>
           <a:xfrm>
-            <a:off x="7452360" y="3169920"/>
+            <a:off x="7452360" y="3215640"/>
             <a:ext cx="4023360" cy="566928"/>
           </a:xfrm>
           <a:prstGeom prst="rect">
@@ -6250,8 +6250,8 @@
         </p:nvSpPr>
         <p:spPr>
           <a:xfrm>
-            <a:off x="7452360" y="3736848"/>
-            <a:ext cx="4023360" cy="563880"/>
+            <a:off x="7452360" y="3782568"/>
+            <a:ext cx="4023360" cy="609600"/>
           </a:xfrm>
           <a:prstGeom prst="rect">
             <a:avLst/>
@@ -6289,8 +6289,8 @@
         </p:nvSpPr>
         <p:spPr>
           <a:xfrm>
-            <a:off x="7269480" y="4511040"/>
-            <a:ext cx="54864" cy="1066800"/>
+            <a:off x="7269480" y="4602480"/>
+            <a:ext cx="54864" cy="1112520"/>
           </a:xfrm>
           <a:prstGeom prst="rect">
             <a:avLst/>
@@ -6309,7 +6309,7 @@
         </p:nvSpPr>
         <p:spPr>
           <a:xfrm>
-            <a:off x="7452360" y="4465320"/>
+            <a:off x="7452360" y="4556760"/>
             <a:ext cx="4023360" cy="566928"/>
           </a:xfrm>
           <a:prstGeom prst="rect">
@@ -6350,8 +6350,8 @@
         </p:nvSpPr>
         <p:spPr>
           <a:xfrm>
-            <a:off x="7452360" y="5032248"/>
-            <a:ext cx="4023360" cy="563880"/>
+            <a:off x="7452360" y="5123688"/>
+            <a:ext cx="4023360" cy="609600"/>
           </a:xfrm>
           <a:prstGeom prst="rect">
             <a:avLst/>
@@ -6389,8 +6389,8 @@
         </p:nvSpPr>
         <p:spPr>
           <a:xfrm>
-            <a:off x="457200" y="5961888"/>
-            <a:ext cx="11274552" cy="548640"/>
+            <a:off x="457200" y="6126480"/>
+            <a:ext cx="11274552" cy="364236"/>
           </a:xfrm>
           <a:prstGeom prst="rect">
             <a:avLst/>
@@ -6409,8 +6409,8 @@
         </p:nvSpPr>
         <p:spPr>
           <a:xfrm>
-            <a:off x="658368" y="5980176"/>
-            <a:ext cx="10927080" cy="512064"/>
+            <a:off x="658368" y="6144768"/>
+            <a:ext cx="10927080" cy="327660"/>
           </a:xfrm>
           <a:prstGeom prst="rect">
             <a:avLst/>
@@ -6426,7 +6426,7 @@
               <a:buNone/>
             </a:pPr>
             <a:r>
-              <a:rPr lang="en-US" sz="1600" b="1" dirty="0">
+              <a:rPr lang="en-US" sz="1550" b="1" dirty="0">
                 <a:solidFill>
                   <a:srgbClr val="0B7A4A"/>
                 </a:solidFill>
@@ -6436,7 +6436,7 @@
               </a:rPr>
               <a:t>The ask: name your one or two commitments out loud, with a number attached, before you leave the room.</a:t>
             </a:r>
-            <a:endParaRPr lang="en-US" sz="1600" dirty="0"/>
+            <a:endParaRPr lang="en-US" sz="1550" dirty="0"/>
           </a:p>
         </p:txBody>
       </p:sp>
@@ -6579,7 +6579,7 @@
         <p:spPr>
           <a:xfrm>
             <a:off x="457200" y="1207008"/>
-            <a:ext cx="6400800" cy="4645152"/>
+            <a:ext cx="6400800" cy="4782312"/>
           </a:xfrm>
           <a:prstGeom prst="rect">
             <a:avLst/>
@@ -6599,7 +6599,7 @@
         <p:spPr>
           <a:xfrm>
             <a:off x="7022592" y="1207008"/>
-            <a:ext cx="4709160" cy="4645152"/>
+            <a:ext cx="4709160" cy="4782312"/>
           </a:xfrm>
           <a:prstGeom prst="rect">
             <a:avLst/>
@@ -6737,7 +6737,7 @@
         <p:spPr>
           <a:xfrm>
             <a:off x="713232" y="1874520"/>
-            <a:ext cx="5897880" cy="3840480"/>
+            <a:ext cx="5897880" cy="3977640"/>
           </a:xfrm>
           <a:prstGeom prst="rect">
             <a:avLst/>
@@ -6864,7 +6864,7 @@
         <p:spPr>
           <a:xfrm>
             <a:off x="7269480" y="1920240"/>
-            <a:ext cx="54864" cy="1066800"/>
+            <a:ext cx="54864" cy="1112520"/>
           </a:xfrm>
           <a:prstGeom prst="rect">
             <a:avLst/>
@@ -6925,7 +6925,7 @@
         <p:spPr>
           <a:xfrm>
             <a:off x="7452360" y="2441448"/>
-            <a:ext cx="4023360" cy="563880"/>
+            <a:ext cx="4023360" cy="609600"/>
           </a:xfrm>
           <a:prstGeom prst="rect">
             <a:avLst/>
@@ -6963,8 +6963,8 @@
         </p:nvSpPr>
         <p:spPr>
           <a:xfrm>
-            <a:off x="7269480" y="3215640"/>
-            <a:ext cx="54864" cy="1066800"/>
+            <a:off x="7269480" y="3261360"/>
+            <a:ext cx="54864" cy="1112520"/>
           </a:xfrm>
           <a:prstGeom prst="rect">
             <a:avLst/>
@@ -6983,7 +6983,7 @@
         </p:nvSpPr>
         <p:spPr>
           <a:xfrm>
-            <a:off x="7452360" y="3169920"/>
+            <a:off x="7452360" y="3215640"/>
             <a:ext cx="4023360" cy="566928"/>
           </a:xfrm>
           <a:prstGeom prst="rect">
@@ -7024,8 +7024,8 @@
         </p:nvSpPr>
         <p:spPr>
           <a:xfrm>
-            <a:off x="7452360" y="3736848"/>
-            <a:ext cx="4023360" cy="563880"/>
+            <a:off x="7452360" y="3782568"/>
+            <a:ext cx="4023360" cy="609600"/>
           </a:xfrm>
           <a:prstGeom prst="rect">
             <a:avLst/>
@@ -7063,8 +7063,8 @@
         </p:nvSpPr>
         <p:spPr>
           <a:xfrm>
-            <a:off x="7269480" y="4511040"/>
-            <a:ext cx="54864" cy="1066800"/>
+            <a:off x="7269480" y="4602480"/>
+            <a:ext cx="54864" cy="1112520"/>
           </a:xfrm>
           <a:prstGeom prst="rect">
             <a:avLst/>
@@ -7083,7 +7083,7 @@
         </p:nvSpPr>
         <p:spPr>
           <a:xfrm>
-            <a:off x="7452360" y="4465320"/>
+            <a:off x="7452360" y="4556760"/>
             <a:ext cx="4023360" cy="566928"/>
           </a:xfrm>
           <a:prstGeom prst="rect">
@@ -7124,8 +7124,8 @@
         </p:nvSpPr>
         <p:spPr>
           <a:xfrm>
-            <a:off x="7452360" y="5032248"/>
-            <a:ext cx="4023360" cy="563880"/>
+            <a:off x="7452360" y="5123688"/>
+            <a:ext cx="4023360" cy="609600"/>
           </a:xfrm>
           <a:prstGeom prst="rect">
             <a:avLst/>
@@ -7163,8 +7163,8 @@
         </p:nvSpPr>
         <p:spPr>
           <a:xfrm>
-            <a:off x="457200" y="5961888"/>
-            <a:ext cx="11274552" cy="548640"/>
+            <a:off x="457200" y="6126480"/>
+            <a:ext cx="11274552" cy="348996"/>
           </a:xfrm>
           <a:prstGeom prst="rect">
             <a:avLst/>
@@ -7183,8 +7183,8 @@
         </p:nvSpPr>
         <p:spPr>
           <a:xfrm>
-            <a:off x="658368" y="5980176"/>
-            <a:ext cx="10927080" cy="512064"/>
+            <a:off x="658368" y="6144768"/>
+            <a:ext cx="10927080" cy="312420"/>
           </a:xfrm>
           <a:prstGeom prst="rect">
             <a:avLst/>
@@ -7200,7 +7200,7 @@
               <a:buNone/>
             </a:pPr>
             <a:r>
-              <a:rPr lang="en-US" sz="1600" b="1" dirty="0">
+              <a:rPr lang="en-US" sz="1450" b="1" dirty="0">
                 <a:solidFill>
                   <a:srgbClr val="0B2C4A"/>
                 </a:solidFill>
@@ -7210,7 +7210,7 @@
               </a:rPr>
               <a:t>The ask: run service like a sales department: every visit is a chance to sell the next hour and the next car.</a:t>
             </a:r>
-            <a:endParaRPr lang="en-US" sz="1600" dirty="0"/>
+            <a:endParaRPr lang="en-US" sz="1450" dirty="0"/>
           </a:p>
         </p:txBody>
       </p:sp>
@@ -7353,7 +7353,7 @@
         <p:spPr>
           <a:xfrm>
             <a:off x="457200" y="1207008"/>
-            <a:ext cx="6400800" cy="4645152"/>
+            <a:ext cx="6400800" cy="4782312"/>
           </a:xfrm>
           <a:prstGeom prst="rect">
             <a:avLst/>
@@ -7373,7 +7373,7 @@
         <p:spPr>
           <a:xfrm>
             <a:off x="7022592" y="1207008"/>
-            <a:ext cx="4709160" cy="4645152"/>
+            <a:ext cx="4709160" cy="4782312"/>
           </a:xfrm>
           <a:prstGeom prst="rect">
             <a:avLst/>
@@ -7511,7 +7511,7 @@
         <p:spPr>
           <a:xfrm>
             <a:off x="713232" y="1874520"/>
-            <a:ext cx="5897880" cy="3840480"/>
+            <a:ext cx="5897880" cy="3977640"/>
           </a:xfrm>
           <a:prstGeom prst="rect">
             <a:avLst/>
@@ -7617,7 +7617,7 @@
         <p:spPr>
           <a:xfrm>
             <a:off x="7269480" y="1920240"/>
-            <a:ext cx="54864" cy="1066800"/>
+            <a:ext cx="54864" cy="1112520"/>
           </a:xfrm>
           <a:prstGeom prst="rect">
             <a:avLst/>
@@ -7678,7 +7678,7 @@
         <p:spPr>
           <a:xfrm>
             <a:off x="7452360" y="2441448"/>
-            <a:ext cx="4023360" cy="563880"/>
+            <a:ext cx="4023360" cy="609600"/>
           </a:xfrm>
           <a:prstGeom prst="rect">
             <a:avLst/>
@@ -7716,8 +7716,8 @@
         </p:nvSpPr>
         <p:spPr>
           <a:xfrm>
-            <a:off x="7269480" y="3215640"/>
-            <a:ext cx="54864" cy="1066800"/>
+            <a:off x="7269480" y="3261360"/>
+            <a:ext cx="54864" cy="1112520"/>
           </a:xfrm>
           <a:prstGeom prst="rect">
             <a:avLst/>
@@ -7736,7 +7736,7 @@
         </p:nvSpPr>
         <p:spPr>
           <a:xfrm>
-            <a:off x="7452360" y="3169920"/>
+            <a:off x="7452360" y="3215640"/>
             <a:ext cx="4023360" cy="566928"/>
           </a:xfrm>
           <a:prstGeom prst="rect">
@@ -7777,8 +7777,8 @@
         </p:nvSpPr>
         <p:spPr>
           <a:xfrm>
-            <a:off x="7452360" y="3736848"/>
-            <a:ext cx="4023360" cy="563880"/>
+            <a:off x="7452360" y="3782568"/>
+            <a:ext cx="4023360" cy="609600"/>
           </a:xfrm>
           <a:prstGeom prst="rect">
             <a:avLst/>
@@ -7816,8 +7816,8 @@
         </p:nvSpPr>
         <p:spPr>
           <a:xfrm>
-            <a:off x="7269480" y="4511040"/>
-            <a:ext cx="54864" cy="1066800"/>
+            <a:off x="7269480" y="4602480"/>
+            <a:ext cx="54864" cy="1112520"/>
           </a:xfrm>
           <a:prstGeom prst="rect">
             <a:avLst/>
@@ -7836,7 +7836,7 @@
         </p:nvSpPr>
         <p:spPr>
           <a:xfrm>
-            <a:off x="7452360" y="4465320"/>
+            <a:off x="7452360" y="4556760"/>
             <a:ext cx="4023360" cy="566928"/>
           </a:xfrm>
           <a:prstGeom prst="rect">
@@ -7877,8 +7877,8 @@
         </p:nvSpPr>
         <p:spPr>
           <a:xfrm>
-            <a:off x="7452360" y="5032248"/>
-            <a:ext cx="4023360" cy="563880"/>
+            <a:off x="7452360" y="5123688"/>
+            <a:ext cx="4023360" cy="609600"/>
           </a:xfrm>
           <a:prstGeom prst="rect">
             <a:avLst/>
@@ -7916,8 +7916,8 @@
         </p:nvSpPr>
         <p:spPr>
           <a:xfrm>
-            <a:off x="457200" y="5961888"/>
-            <a:ext cx="11274552" cy="548640"/>
+            <a:off x="457200" y="6126480"/>
+            <a:ext cx="11274552" cy="356616"/>
           </a:xfrm>
           <a:prstGeom prst="rect">
             <a:avLst/>
@@ -7936,8 +7936,8 @@
         </p:nvSpPr>
         <p:spPr>
           <a:xfrm>
-            <a:off x="658368" y="5980176"/>
-            <a:ext cx="10927080" cy="512064"/>
+            <a:off x="658368" y="6144768"/>
+            <a:ext cx="10927080" cy="320040"/>
           </a:xfrm>
           <a:prstGeom prst="rect">
             <a:avLst/>
@@ -7953,7 +7953,7 @@
               <a:buNone/>
             </a:pPr>
             <a:r>
-              <a:rPr lang="en-US" sz="1600" b="1" dirty="0">
+              <a:rPr lang="en-US" sz="1500" b="1" dirty="0">
                 <a:solidFill>
                   <a:srgbClr val="0B7A4A"/>
                 </a:solidFill>
@@ -7963,7 +7963,7 @@
               </a:rPr>
               <a:t>The ask: with car count flat, the growth is in hours per RO. Sell the next tenth of an hour on every RO.</a:t>
             </a:r>
-            <a:endParaRPr lang="en-US" sz="1600" dirty="0"/>
+            <a:endParaRPr lang="en-US" sz="1500" dirty="0"/>
           </a:p>
         </p:txBody>
       </p:sp>
@@ -8106,7 +8106,7 @@
         <p:spPr>
           <a:xfrm>
             <a:off x="457200" y="1207008"/>
-            <a:ext cx="6400800" cy="4645152"/>
+            <a:ext cx="6400800" cy="4782312"/>
           </a:xfrm>
           <a:prstGeom prst="rect">
             <a:avLst/>
@@ -8126,7 +8126,7 @@
         <p:spPr>
           <a:xfrm>
             <a:off x="7022592" y="1207008"/>
-            <a:ext cx="4709160" cy="4645152"/>
+            <a:ext cx="4709160" cy="4782312"/>
           </a:xfrm>
           <a:prstGeom prst="rect">
             <a:avLst/>
@@ -8264,7 +8264,7 @@
         <p:spPr>
           <a:xfrm>
             <a:off x="713232" y="1874520"/>
-            <a:ext cx="5897880" cy="3840480"/>
+            <a:ext cx="5897880" cy="3977640"/>
           </a:xfrm>
           <a:prstGeom prst="rect">
             <a:avLst/>
@@ -8412,7 +8412,7 @@
         <p:spPr>
           <a:xfrm>
             <a:off x="7269480" y="1920240"/>
-            <a:ext cx="54864" cy="1714500"/>
+            <a:ext cx="54864" cy="1783080"/>
           </a:xfrm>
           <a:prstGeom prst="rect">
             <a:avLst/>
@@ -8473,7 +8473,7 @@
         <p:spPr>
           <a:xfrm>
             <a:off x="7452360" y="2441448"/>
-            <a:ext cx="4023360" cy="1211580"/>
+            <a:ext cx="4023360" cy="1280160"/>
           </a:xfrm>
           <a:prstGeom prst="rect">
             <a:avLst/>
@@ -8511,8 +8511,8 @@
         </p:nvSpPr>
         <p:spPr>
           <a:xfrm>
-            <a:off x="7269480" y="3863340"/>
-            <a:ext cx="54864" cy="1714500"/>
+            <a:off x="7269480" y="3931920"/>
+            <a:ext cx="54864" cy="1783080"/>
           </a:xfrm>
           <a:prstGeom prst="rect">
             <a:avLst/>
@@ -8531,7 +8531,7 @@
         </p:nvSpPr>
         <p:spPr>
           <a:xfrm>
-            <a:off x="7452360" y="3817620"/>
+            <a:off x="7452360" y="3886200"/>
             <a:ext cx="4023360" cy="566928"/>
           </a:xfrm>
           <a:prstGeom prst="rect">
@@ -8572,8 +8572,8 @@
         </p:nvSpPr>
         <p:spPr>
           <a:xfrm>
-            <a:off x="7452360" y="4384548"/>
-            <a:ext cx="4023360" cy="1211580"/>
+            <a:off x="7452360" y="4453128"/>
+            <a:ext cx="4023360" cy="1280160"/>
           </a:xfrm>
           <a:prstGeom prst="rect">
             <a:avLst/>
@@ -8611,8 +8611,8 @@
         </p:nvSpPr>
         <p:spPr>
           <a:xfrm>
-            <a:off x="457200" y="5961888"/>
-            <a:ext cx="11274552" cy="548640"/>
+            <a:off x="457200" y="6126480"/>
+            <a:ext cx="11274552" cy="341376"/>
           </a:xfrm>
           <a:prstGeom prst="rect">
             <a:avLst/>
@@ -8631,8 +8631,8 @@
         </p:nvSpPr>
         <p:spPr>
           <a:xfrm>
-            <a:off x="658368" y="5980176"/>
-            <a:ext cx="10927080" cy="512064"/>
+            <a:off x="658368" y="6144768"/>
+            <a:ext cx="10927080" cy="304800"/>
           </a:xfrm>
           <a:prstGeom prst="rect">
             <a:avLst/>
@@ -8648,7 +8648,7 @@
               <a:buNone/>
             </a:pPr>
             <a:r>
-              <a:rPr lang="en-US" sz="1600" b="1" dirty="0">
+              <a:rPr lang="en-US" sz="1400" b="1" dirty="0">
                 <a:solidFill>
                   <a:srgbClr val="0B2C4A"/>
                 </a:solidFill>
@@ -8658,7 +8658,7 @@
               </a:rPr>
               <a:t>The ask: every customer leaves with the next appointment booked, and every call reaches someone who asks for it.</a:t>
             </a:r>
-            <a:endParaRPr lang="en-US" sz="1600" dirty="0"/>
+            <a:endParaRPr lang="en-US" sz="1400" dirty="0"/>
           </a:p>
         </p:txBody>
       </p:sp>
@@ -8801,7 +8801,7 @@
         <p:spPr>
           <a:xfrm>
             <a:off x="457200" y="1207008"/>
-            <a:ext cx="6400800" cy="4645152"/>
+            <a:ext cx="6400800" cy="4782312"/>
           </a:xfrm>
           <a:prstGeom prst="rect">
             <a:avLst/>
@@ -8821,7 +8821,7 @@
         <p:spPr>
           <a:xfrm>
             <a:off x="7022592" y="1207008"/>
-            <a:ext cx="4709160" cy="4645152"/>
+            <a:ext cx="4709160" cy="4782312"/>
           </a:xfrm>
           <a:prstGeom prst="rect">
             <a:avLst/>
@@ -8959,7 +8959,7 @@
         <p:spPr>
           <a:xfrm>
             <a:off x="713232" y="1874520"/>
-            <a:ext cx="5897880" cy="3840480"/>
+            <a:ext cx="5897880" cy="3977640"/>
           </a:xfrm>
           <a:prstGeom prst="rect">
             <a:avLst/>
@@ -9086,7 +9086,7 @@
         <p:spPr>
           <a:xfrm>
             <a:off x="7269480" y="1920240"/>
-            <a:ext cx="54864" cy="1066800"/>
+            <a:ext cx="54864" cy="1112520"/>
           </a:xfrm>
           <a:prstGeom prst="rect">
             <a:avLst/>
@@ -9147,7 +9147,7 @@
         <p:spPr>
           <a:xfrm>
             <a:off x="7452360" y="2441448"/>
-            <a:ext cx="4023360" cy="563880"/>
+            <a:ext cx="4023360" cy="609600"/>
           </a:xfrm>
           <a:prstGeom prst="rect">
             <a:avLst/>
@@ -9185,8 +9185,8 @@
         </p:nvSpPr>
         <p:spPr>
           <a:xfrm>
-            <a:off x="7269480" y="3215640"/>
-            <a:ext cx="54864" cy="1066800"/>
+            <a:off x="7269480" y="3261360"/>
+            <a:ext cx="54864" cy="1112520"/>
           </a:xfrm>
           <a:prstGeom prst="rect">
             <a:avLst/>
@@ -9205,7 +9205,7 @@
         </p:nvSpPr>
         <p:spPr>
           <a:xfrm>
-            <a:off x="7452360" y="3169920"/>
+            <a:off x="7452360" y="3215640"/>
             <a:ext cx="4023360" cy="566928"/>
           </a:xfrm>
           <a:prstGeom prst="rect">
@@ -9246,8 +9246,8 @@
         </p:nvSpPr>
         <p:spPr>
           <a:xfrm>
-            <a:off x="7452360" y="3736848"/>
-            <a:ext cx="4023360" cy="563880"/>
+            <a:off x="7452360" y="3782568"/>
+            <a:ext cx="4023360" cy="609600"/>
           </a:xfrm>
           <a:prstGeom prst="rect">
             <a:avLst/>
@@ -9285,8 +9285,8 @@
         </p:nvSpPr>
         <p:spPr>
           <a:xfrm>
-            <a:off x="7269480" y="4511040"/>
-            <a:ext cx="54864" cy="1066800"/>
+            <a:off x="7269480" y="4602480"/>
+            <a:ext cx="54864" cy="1112520"/>
           </a:xfrm>
           <a:prstGeom prst="rect">
             <a:avLst/>
@@ -9305,7 +9305,7 @@
         </p:nvSpPr>
         <p:spPr>
           <a:xfrm>
-            <a:off x="7452360" y="4465320"/>
+            <a:off x="7452360" y="4556760"/>
             <a:ext cx="4023360" cy="566928"/>
           </a:xfrm>
           <a:prstGeom prst="rect">
@@ -9346,8 +9346,8 @@
         </p:nvSpPr>
         <p:spPr>
           <a:xfrm>
-            <a:off x="7452360" y="5032248"/>
-            <a:ext cx="4023360" cy="563880"/>
+            <a:off x="7452360" y="5123688"/>
+            <a:ext cx="4023360" cy="609600"/>
           </a:xfrm>
           <a:prstGeom prst="rect">
             <a:avLst/>
@@ -9385,8 +9385,8 @@
         </p:nvSpPr>
         <p:spPr>
           <a:xfrm>
-            <a:off x="457200" y="5961888"/>
-            <a:ext cx="11274552" cy="548640"/>
+            <a:off x="457200" y="6126480"/>
+            <a:ext cx="11274552" cy="364236"/>
           </a:xfrm>
           <a:prstGeom prst="rect">
             <a:avLst/>
@@ -9405,8 +9405,8 @@
         </p:nvSpPr>
         <p:spPr>
           <a:xfrm>
-            <a:off x="658368" y="5980176"/>
-            <a:ext cx="10927080" cy="512064"/>
+            <a:off x="658368" y="6144768"/>
+            <a:ext cx="10927080" cy="327660"/>
           </a:xfrm>
           <a:prstGeom prst="rect">
             <a:avLst/>
@@ -9422,7 +9422,7 @@
               <a:buNone/>
             </a:pPr>
             <a:r>
-              <a:rPr lang="en-US" sz="1600" b="1" dirty="0">
+              <a:rPr lang="en-US" sz="1550" b="1" dirty="0">
                 <a:solidFill>
                   <a:srgbClr val="0B2C4A"/>
                 </a:solidFill>
@@ -9432,7 +9432,7 @@
               </a:rPr>
               <a:t>The ask: know what you collect on every op code, and run every discount through ADC so we can see it.</a:t>
             </a:r>
-            <a:endParaRPr lang="en-US" sz="1600" dirty="0"/>
+            <a:endParaRPr lang="en-US" sz="1550" dirty="0"/>
           </a:p>
         </p:txBody>
       </p:sp>
@@ -9575,7 +9575,7 @@
         <p:spPr>
           <a:xfrm>
             <a:off x="457200" y="1207008"/>
-            <a:ext cx="6400800" cy="4645152"/>
+            <a:ext cx="6400800" cy="4782312"/>
           </a:xfrm>
           <a:prstGeom prst="rect">
             <a:avLst/>
@@ -9595,7 +9595,7 @@
         <p:spPr>
           <a:xfrm>
             <a:off x="7022592" y="1207008"/>
-            <a:ext cx="4709160" cy="4645152"/>
+            <a:ext cx="4709160" cy="4782312"/>
           </a:xfrm>
           <a:prstGeom prst="rect">
             <a:avLst/>
@@ -9733,7 +9733,7 @@
         <p:spPr>
           <a:xfrm>
             <a:off x="713232" y="1874520"/>
-            <a:ext cx="5897880" cy="3840480"/>
+            <a:ext cx="5897880" cy="3977640"/>
           </a:xfrm>
           <a:prstGeom prst="rect">
             <a:avLst/>
@@ -9839,7 +9839,7 @@
         <p:spPr>
           <a:xfrm>
             <a:off x="7269480" y="1920240"/>
-            <a:ext cx="54864" cy="1714500"/>
+            <a:ext cx="54864" cy="1783080"/>
           </a:xfrm>
           <a:prstGeom prst="rect">
             <a:avLst/>
@@ -9900,7 +9900,7 @@
         <p:spPr>
           <a:xfrm>
             <a:off x="7452360" y="2441448"/>
-            <a:ext cx="4023360" cy="1211580"/>
+            <a:ext cx="4023360" cy="1280160"/>
           </a:xfrm>
           <a:prstGeom prst="rect">
             <a:avLst/>
@@ -9938,8 +9938,8 @@
         </p:nvSpPr>
         <p:spPr>
           <a:xfrm>
-            <a:off x="7269480" y="3863340"/>
-            <a:ext cx="54864" cy="1714500"/>
+            <a:off x="7269480" y="3931920"/>
+            <a:ext cx="54864" cy="1783080"/>
           </a:xfrm>
           <a:prstGeom prst="rect">
             <a:avLst/>
@@ -9958,7 +9958,7 @@
         </p:nvSpPr>
         <p:spPr>
           <a:xfrm>
-            <a:off x="7452360" y="3817620"/>
+            <a:off x="7452360" y="3886200"/>
             <a:ext cx="4023360" cy="566928"/>
           </a:xfrm>
           <a:prstGeom prst="rect">
@@ -9999,8 +9999,8 @@
         </p:nvSpPr>
         <p:spPr>
           <a:xfrm>
-            <a:off x="7452360" y="4384548"/>
-            <a:ext cx="4023360" cy="1211580"/>
+            <a:off x="7452360" y="4453128"/>
+            <a:ext cx="4023360" cy="1280160"/>
           </a:xfrm>
           <a:prstGeom prst="rect">
             <a:avLst/>
@@ -10038,8 +10038,8 @@
         </p:nvSpPr>
         <p:spPr>
           <a:xfrm>
-            <a:off x="457200" y="5961888"/>
-            <a:ext cx="11274552" cy="548640"/>
+            <a:off x="457200" y="6126480"/>
+            <a:ext cx="11274552" cy="356616"/>
           </a:xfrm>
           <a:prstGeom prst="rect">
             <a:avLst/>
@@ -10058,8 +10058,8 @@
         </p:nvSpPr>
         <p:spPr>
           <a:xfrm>
-            <a:off x="658368" y="5980176"/>
-            <a:ext cx="10927080" cy="512064"/>
+            <a:off x="658368" y="6144768"/>
+            <a:ext cx="10927080" cy="320040"/>
           </a:xfrm>
           <a:prstGeom prst="rect">
             <a:avLst/>
@@ -10075,7 +10075,7 @@
               <a:buNone/>
             </a:pPr>
             <a:r>
-              <a:rPr lang="en-US" sz="1600" b="1" dirty="0">
+              <a:rPr lang="en-US" sz="1500" b="1" dirty="0">
                 <a:solidFill>
                   <a:srgbClr val="0B2C4A"/>
                 </a:solidFill>
@@ -10085,7 +10085,7 @@
               </a:rPr>
               <a:t>The ask: hold labor margin in the 78-80% band by matching the tech to the job, not by squeezing tech pay.</a:t>
             </a:r>
-            <a:endParaRPr lang="en-US" sz="1600" dirty="0"/>
+            <a:endParaRPr lang="en-US" sz="1500" dirty="0"/>
           </a:p>
         </p:txBody>
       </p:sp>
@@ -10228,7 +10228,7 @@
         <p:spPr>
           <a:xfrm>
             <a:off x="457200" y="1207008"/>
-            <a:ext cx="6400800" cy="4645152"/>
+            <a:ext cx="6400800" cy="4782312"/>
           </a:xfrm>
           <a:prstGeom prst="rect">
             <a:avLst/>
@@ -10248,7 +10248,7 @@
         <p:spPr>
           <a:xfrm>
             <a:off x="7022592" y="1207008"/>
-            <a:ext cx="4709160" cy="4645152"/>
+            <a:ext cx="4709160" cy="4782312"/>
           </a:xfrm>
           <a:prstGeom prst="rect">
             <a:avLst/>
@@ -10386,7 +10386,7 @@
         <p:spPr>
           <a:xfrm>
             <a:off x="713232" y="1874520"/>
-            <a:ext cx="5897880" cy="3840480"/>
+            <a:ext cx="5897880" cy="3977640"/>
           </a:xfrm>
           <a:prstGeom prst="rect">
             <a:avLst/>
@@ -10513,7 +10513,7 @@
         <p:spPr>
           <a:xfrm>
             <a:off x="7269480" y="1920240"/>
-            <a:ext cx="54864" cy="1714500"/>
+            <a:ext cx="54864" cy="1783080"/>
           </a:xfrm>
           <a:prstGeom prst="rect">
             <a:avLst/>
@@ -10574,7 +10574,7 @@
         <p:spPr>
           <a:xfrm>
             <a:off x="7452360" y="2441448"/>
-            <a:ext cx="4023360" cy="1211580"/>
+            <a:ext cx="4023360" cy="1280160"/>
           </a:xfrm>
           <a:prstGeom prst="rect">
             <a:avLst/>
@@ -10612,8 +10612,8 @@
         </p:nvSpPr>
         <p:spPr>
           <a:xfrm>
-            <a:off x="7269480" y="3863340"/>
-            <a:ext cx="54864" cy="1714500"/>
+            <a:off x="7269480" y="3931920"/>
+            <a:ext cx="54864" cy="1783080"/>
           </a:xfrm>
           <a:prstGeom prst="rect">
             <a:avLst/>
@@ -10632,7 +10632,7 @@
         </p:nvSpPr>
         <p:spPr>
           <a:xfrm>
-            <a:off x="7452360" y="3817620"/>
+            <a:off x="7452360" y="3886200"/>
             <a:ext cx="4023360" cy="566928"/>
           </a:xfrm>
           <a:prstGeom prst="rect">
@@ -10673,8 +10673,8 @@
         </p:nvSpPr>
         <p:spPr>
           <a:xfrm>
-            <a:off x="7452360" y="4384548"/>
-            <a:ext cx="4023360" cy="1211580"/>
+            <a:off x="7452360" y="4453128"/>
+            <a:ext cx="4023360" cy="1280160"/>
           </a:xfrm>
           <a:prstGeom prst="rect">
             <a:avLst/>
@@ -10712,8 +10712,8 @@
         </p:nvSpPr>
         <p:spPr>
           <a:xfrm>
-            <a:off x="457200" y="5961888"/>
-            <a:ext cx="11274552" cy="548640"/>
+            <a:off x="457200" y="6126480"/>
+            <a:ext cx="11274552" cy="371856"/>
           </a:xfrm>
           <a:prstGeom prst="rect">
             <a:avLst/>
@@ -10732,8 +10732,8 @@
         </p:nvSpPr>
         <p:spPr>
           <a:xfrm>
-            <a:off x="658368" y="5980176"/>
-            <a:ext cx="10927080" cy="512064"/>
+            <a:off x="658368" y="6144768"/>
+            <a:ext cx="10927080" cy="335280"/>
           </a:xfrm>
           <a:prstGeom prst="rect">
             <a:avLst/>
@@ -10902,7 +10902,7 @@
         <p:spPr>
           <a:xfrm>
             <a:off x="457200" y="1207008"/>
-            <a:ext cx="6400800" cy="4645152"/>
+            <a:ext cx="6400800" cy="4782312"/>
           </a:xfrm>
           <a:prstGeom prst="rect">
             <a:avLst/>
@@ -10922,7 +10922,7 @@
         <p:spPr>
           <a:xfrm>
             <a:off x="7022592" y="1207008"/>
-            <a:ext cx="4709160" cy="4645152"/>
+            <a:ext cx="4709160" cy="4782312"/>
           </a:xfrm>
           <a:prstGeom prst="rect">
             <a:avLst/>
@@ -11060,7 +11060,7 @@
         <p:spPr>
           <a:xfrm>
             <a:off x="713232" y="1874520"/>
-            <a:ext cx="5897880" cy="3840480"/>
+            <a:ext cx="5897880" cy="3977640"/>
           </a:xfrm>
           <a:prstGeom prst="rect">
             <a:avLst/>
@@ -11166,7 +11166,7 @@
         <p:spPr>
           <a:xfrm>
             <a:off x="7269480" y="1920240"/>
-            <a:ext cx="54864" cy="1714500"/>
+            <a:ext cx="54864" cy="1783080"/>
           </a:xfrm>
           <a:prstGeom prst="rect">
             <a:avLst/>
@@ -11227,7 +11227,7 @@
         <p:spPr>
           <a:xfrm>
             <a:off x="7452360" y="2441448"/>
-            <a:ext cx="4023360" cy="1211580"/>
+            <a:ext cx="4023360" cy="1280160"/>
           </a:xfrm>
           <a:prstGeom prst="rect">
             <a:avLst/>
@@ -11265,8 +11265,8 @@
         </p:nvSpPr>
         <p:spPr>
           <a:xfrm>
-            <a:off x="7269480" y="3863340"/>
-            <a:ext cx="54864" cy="1714500"/>
+            <a:off x="7269480" y="3931920"/>
+            <a:ext cx="54864" cy="1783080"/>
           </a:xfrm>
           <a:prstGeom prst="rect">
             <a:avLst/>
@@ -11285,7 +11285,7 @@
         </p:nvSpPr>
         <p:spPr>
           <a:xfrm>
-            <a:off x="7452360" y="3817620"/>
+            <a:off x="7452360" y="3886200"/>
             <a:ext cx="4023360" cy="566928"/>
           </a:xfrm>
           <a:prstGeom prst="rect">
@@ -11326,8 +11326,8 @@
         </p:nvSpPr>
         <p:spPr>
           <a:xfrm>
-            <a:off x="7452360" y="4384548"/>
-            <a:ext cx="4023360" cy="1211580"/>
+            <a:off x="7452360" y="4453128"/>
+            <a:ext cx="4023360" cy="1280160"/>
           </a:xfrm>
           <a:prstGeom prst="rect">
             <a:avLst/>
@@ -11365,8 +11365,8 @@
         </p:nvSpPr>
         <p:spPr>
           <a:xfrm>
-            <a:off x="457200" y="5961888"/>
-            <a:ext cx="11274552" cy="548640"/>
+            <a:off x="457200" y="6126480"/>
+            <a:ext cx="11274552" cy="615696"/>
           </a:xfrm>
           <a:prstGeom prst="rect">
             <a:avLst/>
@@ -11385,8 +11385,8 @@
         </p:nvSpPr>
         <p:spPr>
           <a:xfrm>
-            <a:off x="658368" y="5980176"/>
-            <a:ext cx="10927080" cy="512064"/>
+            <a:off x="658368" y="6144768"/>
+            <a:ext cx="10927080" cy="579120"/>
           </a:xfrm>
           <a:prstGeom prst="rect">
             <a:avLst/>
@@ -11555,7 +11555,7 @@
         <p:spPr>
           <a:xfrm>
             <a:off x="457200" y="1207008"/>
-            <a:ext cx="6400800" cy="4645152"/>
+            <a:ext cx="6400800" cy="4782312"/>
           </a:xfrm>
           <a:prstGeom prst="rect">
             <a:avLst/>
@@ -11575,7 +11575,7 @@
         <p:spPr>
           <a:xfrm>
             <a:off x="7022592" y="1207008"/>
-            <a:ext cx="4709160" cy="4645152"/>
+            <a:ext cx="4709160" cy="4782312"/>
           </a:xfrm>
           <a:prstGeom prst="rect">
             <a:avLst/>
@@ -11713,7 +11713,7 @@
         <p:spPr>
           <a:xfrm>
             <a:off x="713232" y="1874520"/>
-            <a:ext cx="5897880" cy="3840480"/>
+            <a:ext cx="5897880" cy="3977640"/>
           </a:xfrm>
           <a:prstGeom prst="rect">
             <a:avLst/>
@@ -11861,7 +11861,7 @@
         <p:spPr>
           <a:xfrm>
             <a:off x="7269480" y="1920240"/>
-            <a:ext cx="54864" cy="1066800"/>
+            <a:ext cx="54864" cy="1112520"/>
           </a:xfrm>
           <a:prstGeom prst="rect">
             <a:avLst/>
@@ -11922,7 +11922,7 @@
         <p:spPr>
           <a:xfrm>
             <a:off x="7452360" y="2441448"/>
-            <a:ext cx="4023360" cy="563880"/>
+            <a:ext cx="4023360" cy="609600"/>
           </a:xfrm>
           <a:prstGeom prst="rect">
             <a:avLst/>
@@ -11960,8 +11960,8 @@
         </p:nvSpPr>
         <p:spPr>
           <a:xfrm>
-            <a:off x="7269480" y="3215640"/>
-            <a:ext cx="54864" cy="1066800"/>
+            <a:off x="7269480" y="3261360"/>
+            <a:ext cx="54864" cy="1112520"/>
           </a:xfrm>
           <a:prstGeom prst="rect">
             <a:avLst/>
@@ -11980,7 +11980,7 @@
         </p:nvSpPr>
         <p:spPr>
           <a:xfrm>
-            <a:off x="7452360" y="3169920"/>
+            <a:off x="7452360" y="3215640"/>
             <a:ext cx="4023360" cy="566928"/>
           </a:xfrm>
           <a:prstGeom prst="rect">
@@ -12021,8 +12021,8 @@
         </p:nvSpPr>
         <p:spPr>
           <a:xfrm>
-            <a:off x="7452360" y="3736848"/>
-            <a:ext cx="4023360" cy="563880"/>
+            <a:off x="7452360" y="3782568"/>
+            <a:ext cx="4023360" cy="609600"/>
           </a:xfrm>
           <a:prstGeom prst="rect">
             <a:avLst/>
@@ -12060,8 +12060,8 @@
         </p:nvSpPr>
         <p:spPr>
           <a:xfrm>
-            <a:off x="7269480" y="4511040"/>
-            <a:ext cx="54864" cy="1066800"/>
+            <a:off x="7269480" y="4602480"/>
+            <a:ext cx="54864" cy="1112520"/>
           </a:xfrm>
           <a:prstGeom prst="rect">
             <a:avLst/>
@@ -12080,7 +12080,7 @@
         </p:nvSpPr>
         <p:spPr>
           <a:xfrm>
-            <a:off x="7452360" y="4465320"/>
+            <a:off x="7452360" y="4556760"/>
             <a:ext cx="4023360" cy="566928"/>
           </a:xfrm>
           <a:prstGeom prst="rect">
@@ -12121,8 +12121,8 @@
         </p:nvSpPr>
         <p:spPr>
           <a:xfrm>
-            <a:off x="7452360" y="5032248"/>
-            <a:ext cx="4023360" cy="563880"/>
+            <a:off x="7452360" y="5123688"/>
+            <a:ext cx="4023360" cy="609600"/>
           </a:xfrm>
           <a:prstGeom prst="rect">
             <a:avLst/>
@@ -12160,8 +12160,8 @@
         </p:nvSpPr>
         <p:spPr>
           <a:xfrm>
-            <a:off x="457200" y="5961888"/>
-            <a:ext cx="11274552" cy="548640"/>
+            <a:off x="457200" y="6126480"/>
+            <a:ext cx="11274552" cy="371856"/>
           </a:xfrm>
           <a:prstGeom prst="rect">
             <a:avLst/>
@@ -12180,8 +12180,8 @@
         </p:nvSpPr>
         <p:spPr>
           <a:xfrm>
-            <a:off x="658368" y="5980176"/>
-            <a:ext cx="10927080" cy="512064"/>
+            <a:off x="658368" y="6144768"/>
+            <a:ext cx="10927080" cy="335280"/>
           </a:xfrm>
           <a:prstGeom prst="rect">
             <a:avLst/>

--- a/day2-deck/decks/Talking Points - Day 2.pptx
+++ b/day2-deck/decks/Talking Points - Day 2.pptx
@@ -2195,45 +2195,6 @@
         </p:nvSpPr>
         <p:spPr>
           <a:xfrm>
-            <a:off x="713232" y="1371600"/>
-            <a:ext cx="5943600" cy="310896"/>
-          </a:xfrm>
-          <a:prstGeom prst="rect">
-            <a:avLst/>
-          </a:prstGeom>
-          <a:noFill/>
-          <a:ln/>
-        </p:spPr>
-        <p:txBody>
-          <a:bodyPr wrap="square" lIns="0" tIns="0" rIns="0" bIns="0" rtlCol="0" anchor="ctr"/>
-          <a:lstStyle/>
-          <a:p>
-            <a:pPr indent="0" marL="0">
-              <a:buNone/>
-            </a:pPr>
-            <a:r>
-              <a:rPr lang="en-US" sz="1400" b="1" spc="100" kern="0" dirty="0">
-                <a:solidFill>
-                  <a:srgbClr val="0B2C4A"/>
-                </a:solidFill>
-                <a:latin typeface="Inter" pitchFamily="34" charset="0"/>
-                <a:ea typeface="Inter" pitchFamily="34" charset="-122"/>
-                <a:cs typeface="Inter" pitchFamily="34" charset="-120"/>
-              </a:rPr>
-              <a:t>WHAT WE SAID · ROUNDTABLE 2024</a:t>
-            </a:r>
-            <a:endParaRPr lang="en-US" sz="1400" dirty="0"/>
-          </a:p>
-        </p:txBody>
-      </p:sp>
-      <p:sp>
-        <p:nvSpPr>
-          <p:cNvPr id="8" name="Text 6"/>
-          <p:cNvSpPr txBox="1"/>
-          <p:nvPr/>
-        </p:nvSpPr>
-        <p:spPr>
-          <a:xfrm>
             <a:off x="7269480" y="1371600"/>
             <a:ext cx="4297680" cy="310896"/>
           </a:xfrm>
@@ -2267,27 +2228,7 @@
       </p:sp>
       <p:sp>
         <p:nvSpPr>
-          <p:cNvPr id="9" name="Shape 7"/>
-          <p:cNvSpPr/>
-          <p:nvPr/>
-        </p:nvSpPr>
-        <p:spPr>
-          <a:xfrm>
-            <a:off x="713232" y="1737360"/>
-            <a:ext cx="5897880" cy="10973"/>
-          </a:xfrm>
-          <a:prstGeom prst="rect">
-            <a:avLst/>
-          </a:prstGeom>
-          <a:solidFill>
-            <a:srgbClr val="D9D9D9"/>
-          </a:solidFill>
-          <a:ln/>
-        </p:spPr>
-      </p:sp>
-      <p:sp>
-        <p:nvSpPr>
-          <p:cNvPr id="10" name="Shape 8"/>
+          <p:cNvPr id="8" name="Shape 6"/>
           <p:cNvSpPr/>
           <p:nvPr/>
         </p:nvSpPr>
@@ -2307,14 +2248,14 @@
       </p:sp>
       <p:sp>
         <p:nvSpPr>
-          <p:cNvPr id="11" name="Text 9"/>
-          <p:cNvSpPr txBox="1"/>
-          <p:nvPr/>
-        </p:nvSpPr>
-        <p:spPr>
-          <a:xfrm>
-            <a:off x="713232" y="1874520"/>
-            <a:ext cx="5897880" cy="3977640"/>
+          <p:cNvPr id="9" name="Text 7"/>
+          <p:cNvSpPr txBox="1"/>
+          <p:nvPr/>
+        </p:nvSpPr>
+        <p:spPr>
+          <a:xfrm>
+            <a:off x="713232" y="1417320"/>
+            <a:ext cx="5897880" cy="4434840"/>
           </a:xfrm>
           <a:prstGeom prst="rect">
             <a:avLst/>
@@ -2434,7 +2375,7 @@
       </p:sp>
       <p:sp>
         <p:nvSpPr>
-          <p:cNvPr id="12" name="Shape 10"/>
+          <p:cNvPr id="10" name="Shape 8"/>
           <p:cNvSpPr/>
           <p:nvPr/>
         </p:nvSpPr>
@@ -2454,7 +2395,7 @@
       </p:sp>
       <p:sp>
         <p:nvSpPr>
-          <p:cNvPr id="13" name="Text 11"/>
+          <p:cNvPr id="11" name="Text 9"/>
           <p:cNvSpPr txBox="1"/>
           <p:nvPr/>
         </p:nvSpPr>
@@ -2495,7 +2436,7 @@
       </p:sp>
       <p:sp>
         <p:nvSpPr>
-          <p:cNvPr id="14" name="Text 12"/>
+          <p:cNvPr id="12" name="Text 10"/>
           <p:cNvSpPr txBox="1"/>
           <p:nvPr/>
         </p:nvSpPr>
@@ -2534,7 +2475,7 @@
       </p:sp>
       <p:sp>
         <p:nvSpPr>
-          <p:cNvPr id="15" name="Shape 13"/>
+          <p:cNvPr id="13" name="Shape 11"/>
           <p:cNvSpPr/>
           <p:nvPr/>
         </p:nvSpPr>
@@ -2554,7 +2495,7 @@
       </p:sp>
       <p:sp>
         <p:nvSpPr>
-          <p:cNvPr id="16" name="Text 14"/>
+          <p:cNvPr id="14" name="Text 12"/>
           <p:cNvSpPr txBox="1"/>
           <p:nvPr/>
         </p:nvSpPr>
@@ -2595,7 +2536,7 @@
       </p:sp>
       <p:sp>
         <p:nvSpPr>
-          <p:cNvPr id="17" name="Text 15"/>
+          <p:cNvPr id="15" name="Text 13"/>
           <p:cNvSpPr txBox="1"/>
           <p:nvPr/>
         </p:nvSpPr>
@@ -2634,7 +2575,7 @@
       </p:sp>
       <p:sp>
         <p:nvSpPr>
-          <p:cNvPr id="18" name="Shape 16"/>
+          <p:cNvPr id="16" name="Shape 14"/>
           <p:cNvSpPr/>
           <p:nvPr/>
         </p:nvSpPr>
@@ -2654,7 +2595,7 @@
       </p:sp>
       <p:sp>
         <p:nvSpPr>
-          <p:cNvPr id="19" name="Text 17"/>
+          <p:cNvPr id="17" name="Text 15"/>
           <p:cNvSpPr txBox="1"/>
           <p:nvPr/>
         </p:nvSpPr>
@@ -2695,7 +2636,7 @@
       </p:sp>
       <p:sp>
         <p:nvSpPr>
-          <p:cNvPr id="20" name="Text 18"/>
+          <p:cNvPr id="18" name="Text 16"/>
           <p:cNvSpPr txBox="1"/>
           <p:nvPr/>
         </p:nvSpPr>
@@ -2734,7 +2675,7 @@
       </p:sp>
       <p:sp>
         <p:nvSpPr>
-          <p:cNvPr id="21" name="Shape 19"/>
+          <p:cNvPr id="19" name="Shape 17"/>
           <p:cNvSpPr/>
           <p:nvPr/>
         </p:nvSpPr>
@@ -2754,7 +2695,7 @@
       </p:sp>
       <p:sp>
         <p:nvSpPr>
-          <p:cNvPr id="22" name="Text 20"/>
+          <p:cNvPr id="20" name="Text 18"/>
           <p:cNvSpPr txBox="1"/>
           <p:nvPr/>
         </p:nvSpPr>
@@ -2969,45 +2910,6 @@
         </p:nvSpPr>
         <p:spPr>
           <a:xfrm>
-            <a:off x="713232" y="1371600"/>
-            <a:ext cx="5943600" cy="310896"/>
-          </a:xfrm>
-          <a:prstGeom prst="rect">
-            <a:avLst/>
-          </a:prstGeom>
-          <a:noFill/>
-          <a:ln/>
-        </p:spPr>
-        <p:txBody>
-          <a:bodyPr wrap="square" lIns="0" tIns="0" rIns="0" bIns="0" rtlCol="0" anchor="ctr"/>
-          <a:lstStyle/>
-          <a:p>
-            <a:pPr indent="0" marL="0">
-              <a:buNone/>
-            </a:pPr>
-            <a:r>
-              <a:rPr lang="en-US" sz="1400" b="1" spc="100" kern="0" dirty="0">
-                <a:solidFill>
-                  <a:srgbClr val="0B2C4A"/>
-                </a:solidFill>
-                <a:latin typeface="Inter" pitchFamily="34" charset="0"/>
-                <a:ea typeface="Inter" pitchFamily="34" charset="-122"/>
-                <a:cs typeface="Inter" pitchFamily="34" charset="-120"/>
-              </a:rPr>
-              <a:t>WHAT WE SAID · GM MEETING JAN 2026</a:t>
-            </a:r>
-            <a:endParaRPr lang="en-US" sz="1400" dirty="0"/>
-          </a:p>
-        </p:txBody>
-      </p:sp>
-      <p:sp>
-        <p:nvSpPr>
-          <p:cNvPr id="8" name="Text 6"/>
-          <p:cNvSpPr txBox="1"/>
-          <p:nvPr/>
-        </p:nvSpPr>
-        <p:spPr>
-          <a:xfrm>
             <a:off x="7269480" y="1371600"/>
             <a:ext cx="4297680" cy="310896"/>
           </a:xfrm>
@@ -3041,27 +2943,7 @@
       </p:sp>
       <p:sp>
         <p:nvSpPr>
-          <p:cNvPr id="9" name="Shape 7"/>
-          <p:cNvSpPr/>
-          <p:nvPr/>
-        </p:nvSpPr>
-        <p:spPr>
-          <a:xfrm>
-            <a:off x="713232" y="1737360"/>
-            <a:ext cx="5897880" cy="10973"/>
-          </a:xfrm>
-          <a:prstGeom prst="rect">
-            <a:avLst/>
-          </a:prstGeom>
-          <a:solidFill>
-            <a:srgbClr val="D9D9D9"/>
-          </a:solidFill>
-          <a:ln/>
-        </p:spPr>
-      </p:sp>
-      <p:sp>
-        <p:nvSpPr>
-          <p:cNvPr id="10" name="Shape 8"/>
+          <p:cNvPr id="8" name="Shape 6"/>
           <p:cNvSpPr/>
           <p:nvPr/>
         </p:nvSpPr>
@@ -3081,14 +2963,14 @@
       </p:sp>
       <p:sp>
         <p:nvSpPr>
-          <p:cNvPr id="11" name="Text 9"/>
-          <p:cNvSpPr txBox="1"/>
-          <p:nvPr/>
-        </p:nvSpPr>
-        <p:spPr>
-          <a:xfrm>
-            <a:off x="713232" y="1874520"/>
-            <a:ext cx="5897880" cy="3977640"/>
+          <p:cNvPr id="9" name="Text 7"/>
+          <p:cNvSpPr txBox="1"/>
+          <p:nvPr/>
+        </p:nvSpPr>
+        <p:spPr>
+          <a:xfrm>
+            <a:off x="713232" y="1417320"/>
+            <a:ext cx="5897880" cy="4434840"/>
           </a:xfrm>
           <a:prstGeom prst="rect">
             <a:avLst/>
@@ -3208,7 +3090,7 @@
       </p:sp>
       <p:sp>
         <p:nvSpPr>
-          <p:cNvPr id="12" name="Shape 10"/>
+          <p:cNvPr id="10" name="Shape 8"/>
           <p:cNvSpPr/>
           <p:nvPr/>
         </p:nvSpPr>
@@ -3228,7 +3110,7 @@
       </p:sp>
       <p:sp>
         <p:nvSpPr>
-          <p:cNvPr id="13" name="Text 11"/>
+          <p:cNvPr id="11" name="Text 9"/>
           <p:cNvSpPr txBox="1"/>
           <p:nvPr/>
         </p:nvSpPr>
@@ -3269,7 +3151,7 @@
       </p:sp>
       <p:sp>
         <p:nvSpPr>
-          <p:cNvPr id="14" name="Text 12"/>
+          <p:cNvPr id="12" name="Text 10"/>
           <p:cNvSpPr txBox="1"/>
           <p:nvPr/>
         </p:nvSpPr>
@@ -3308,7 +3190,7 @@
       </p:sp>
       <p:sp>
         <p:nvSpPr>
-          <p:cNvPr id="15" name="Shape 13"/>
+          <p:cNvPr id="13" name="Shape 11"/>
           <p:cNvSpPr/>
           <p:nvPr/>
         </p:nvSpPr>
@@ -3328,7 +3210,7 @@
       </p:sp>
       <p:sp>
         <p:nvSpPr>
-          <p:cNvPr id="16" name="Text 14"/>
+          <p:cNvPr id="14" name="Text 12"/>
           <p:cNvSpPr txBox="1"/>
           <p:nvPr/>
         </p:nvSpPr>
@@ -3369,7 +3251,7 @@
       </p:sp>
       <p:sp>
         <p:nvSpPr>
-          <p:cNvPr id="17" name="Text 15"/>
+          <p:cNvPr id="15" name="Text 13"/>
           <p:cNvSpPr txBox="1"/>
           <p:nvPr/>
         </p:nvSpPr>
@@ -3408,7 +3290,7 @@
       </p:sp>
       <p:sp>
         <p:nvSpPr>
-          <p:cNvPr id="18" name="Shape 16"/>
+          <p:cNvPr id="16" name="Shape 14"/>
           <p:cNvSpPr/>
           <p:nvPr/>
         </p:nvSpPr>
@@ -3428,7 +3310,7 @@
       </p:sp>
       <p:sp>
         <p:nvSpPr>
-          <p:cNvPr id="19" name="Text 17"/>
+          <p:cNvPr id="17" name="Text 15"/>
           <p:cNvSpPr txBox="1"/>
           <p:nvPr/>
         </p:nvSpPr>
@@ -3643,45 +3525,6 @@
         </p:nvSpPr>
         <p:spPr>
           <a:xfrm>
-            <a:off x="713232" y="1371600"/>
-            <a:ext cx="5943600" cy="310896"/>
-          </a:xfrm>
-          <a:prstGeom prst="rect">
-            <a:avLst/>
-          </a:prstGeom>
-          <a:noFill/>
-          <a:ln/>
-        </p:spPr>
-        <p:txBody>
-          <a:bodyPr wrap="square" lIns="0" tIns="0" rIns="0" bIns="0" rtlCol="0" anchor="ctr"/>
-          <a:lstStyle/>
-          <a:p>
-            <a:pPr indent="0" marL="0">
-              <a:buNone/>
-            </a:pPr>
-            <a:r>
-              <a:rPr lang="en-US" sz="1400" b="1" spc="100" kern="0" dirty="0">
-                <a:solidFill>
-                  <a:srgbClr val="0B2C4A"/>
-                </a:solidFill>
-                <a:latin typeface="Inter" pitchFamily="34" charset="0"/>
-                <a:ea typeface="Inter" pitchFamily="34" charset="-122"/>
-                <a:cs typeface="Inter" pitchFamily="34" charset="-120"/>
-              </a:rPr>
-              <a:t>WHAT WE SAID · ROUNDTABLE &amp; GM MEETINGS</a:t>
-            </a:r>
-            <a:endParaRPr lang="en-US" sz="1400" dirty="0"/>
-          </a:p>
-        </p:txBody>
-      </p:sp>
-      <p:sp>
-        <p:nvSpPr>
-          <p:cNvPr id="8" name="Text 6"/>
-          <p:cNvSpPr txBox="1"/>
-          <p:nvPr/>
-        </p:nvSpPr>
-        <p:spPr>
-          <a:xfrm>
             <a:off x="7269480" y="1371600"/>
             <a:ext cx="4297680" cy="310896"/>
           </a:xfrm>
@@ -3715,27 +3558,7 @@
       </p:sp>
       <p:sp>
         <p:nvSpPr>
-          <p:cNvPr id="9" name="Shape 7"/>
-          <p:cNvSpPr/>
-          <p:nvPr/>
-        </p:nvSpPr>
-        <p:spPr>
-          <a:xfrm>
-            <a:off x="713232" y="1737360"/>
-            <a:ext cx="5897880" cy="10973"/>
-          </a:xfrm>
-          <a:prstGeom prst="rect">
-            <a:avLst/>
-          </a:prstGeom>
-          <a:solidFill>
-            <a:srgbClr val="D9D9D9"/>
-          </a:solidFill>
-          <a:ln/>
-        </p:spPr>
-      </p:sp>
-      <p:sp>
-        <p:nvSpPr>
-          <p:cNvPr id="10" name="Shape 8"/>
+          <p:cNvPr id="8" name="Shape 6"/>
           <p:cNvSpPr/>
           <p:nvPr/>
         </p:nvSpPr>
@@ -3755,14 +3578,14 @@
       </p:sp>
       <p:sp>
         <p:nvSpPr>
-          <p:cNvPr id="11" name="Text 9"/>
-          <p:cNvSpPr txBox="1"/>
-          <p:nvPr/>
-        </p:nvSpPr>
-        <p:spPr>
-          <a:xfrm>
-            <a:off x="713232" y="1874520"/>
-            <a:ext cx="5897880" cy="3977640"/>
+          <p:cNvPr id="9" name="Text 7"/>
+          <p:cNvSpPr txBox="1"/>
+          <p:nvPr/>
+        </p:nvSpPr>
+        <p:spPr>
+          <a:xfrm>
+            <a:off x="713232" y="1417320"/>
+            <a:ext cx="5897880" cy="4434840"/>
           </a:xfrm>
           <a:prstGeom prst="rect">
             <a:avLst/>
@@ -3882,7 +3705,7 @@
       </p:sp>
       <p:sp>
         <p:nvSpPr>
-          <p:cNvPr id="12" name="Shape 10"/>
+          <p:cNvPr id="10" name="Shape 8"/>
           <p:cNvSpPr/>
           <p:nvPr/>
         </p:nvSpPr>
@@ -3902,7 +3725,7 @@
       </p:sp>
       <p:sp>
         <p:nvSpPr>
-          <p:cNvPr id="13" name="Text 11"/>
+          <p:cNvPr id="11" name="Text 9"/>
           <p:cNvSpPr txBox="1"/>
           <p:nvPr/>
         </p:nvSpPr>
@@ -3943,7 +3766,7 @@
       </p:sp>
       <p:sp>
         <p:nvSpPr>
-          <p:cNvPr id="14" name="Text 12"/>
+          <p:cNvPr id="12" name="Text 10"/>
           <p:cNvSpPr txBox="1"/>
           <p:nvPr/>
         </p:nvSpPr>
@@ -3982,7 +3805,7 @@
       </p:sp>
       <p:sp>
         <p:nvSpPr>
-          <p:cNvPr id="15" name="Shape 13"/>
+          <p:cNvPr id="13" name="Shape 11"/>
           <p:cNvSpPr/>
           <p:nvPr/>
         </p:nvSpPr>
@@ -4002,7 +3825,7 @@
       </p:sp>
       <p:sp>
         <p:nvSpPr>
-          <p:cNvPr id="16" name="Text 14"/>
+          <p:cNvPr id="14" name="Text 12"/>
           <p:cNvSpPr txBox="1"/>
           <p:nvPr/>
         </p:nvSpPr>
@@ -4043,7 +3866,7 @@
       </p:sp>
       <p:sp>
         <p:nvSpPr>
-          <p:cNvPr id="17" name="Text 15"/>
+          <p:cNvPr id="15" name="Text 13"/>
           <p:cNvSpPr txBox="1"/>
           <p:nvPr/>
         </p:nvSpPr>
@@ -4082,7 +3905,7 @@
       </p:sp>
       <p:sp>
         <p:nvSpPr>
-          <p:cNvPr id="18" name="Shape 16"/>
+          <p:cNvPr id="16" name="Shape 14"/>
           <p:cNvSpPr/>
           <p:nvPr/>
         </p:nvSpPr>
@@ -4102,7 +3925,7 @@
       </p:sp>
       <p:sp>
         <p:nvSpPr>
-          <p:cNvPr id="19" name="Text 17"/>
+          <p:cNvPr id="17" name="Text 15"/>
           <p:cNvSpPr txBox="1"/>
           <p:nvPr/>
         </p:nvSpPr>
@@ -4143,7 +3966,7 @@
       </p:sp>
       <p:sp>
         <p:nvSpPr>
-          <p:cNvPr id="20" name="Text 18"/>
+          <p:cNvPr id="18" name="Text 16"/>
           <p:cNvSpPr txBox="1"/>
           <p:nvPr/>
         </p:nvSpPr>
@@ -4182,7 +4005,7 @@
       </p:sp>
       <p:sp>
         <p:nvSpPr>
-          <p:cNvPr id="21" name="Shape 19"/>
+          <p:cNvPr id="19" name="Shape 17"/>
           <p:cNvSpPr/>
           <p:nvPr/>
         </p:nvSpPr>
@@ -4202,7 +4025,7 @@
       </p:sp>
       <p:sp>
         <p:nvSpPr>
-          <p:cNvPr id="22" name="Text 20"/>
+          <p:cNvPr id="20" name="Text 18"/>
           <p:cNvSpPr txBox="1"/>
           <p:nvPr/>
         </p:nvSpPr>
@@ -4417,45 +4240,6 @@
         </p:nvSpPr>
         <p:spPr>
           <a:xfrm>
-            <a:off x="713232" y="1371600"/>
-            <a:ext cx="5943600" cy="310896"/>
-          </a:xfrm>
-          <a:prstGeom prst="rect">
-            <a:avLst/>
-          </a:prstGeom>
-          <a:noFill/>
-          <a:ln/>
-        </p:spPr>
-        <p:txBody>
-          <a:bodyPr wrap="square" lIns="0" tIns="0" rIns="0" bIns="0" rtlCol="0" anchor="ctr"/>
-          <a:lstStyle/>
-          <a:p>
-            <a:pPr indent="0" marL="0">
-              <a:buNone/>
-            </a:pPr>
-            <a:r>
-              <a:rPr lang="en-US" sz="1400" b="1" spc="100" kern="0" dirty="0">
-                <a:solidFill>
-                  <a:srgbClr val="0B2C4A"/>
-                </a:solidFill>
-                <a:latin typeface="Inter" pitchFamily="34" charset="0"/>
-                <a:ea typeface="Inter" pitchFamily="34" charset="-122"/>
-                <a:cs typeface="Inter" pitchFamily="34" charset="-120"/>
-              </a:rPr>
-              <a:t>WHAT WE SAID · GM MEETINGS JAN &amp; MAY 2026</a:t>
-            </a:r>
-            <a:endParaRPr lang="en-US" sz="1400" dirty="0"/>
-          </a:p>
-        </p:txBody>
-      </p:sp>
-      <p:sp>
-        <p:nvSpPr>
-          <p:cNvPr id="8" name="Text 6"/>
-          <p:cNvSpPr txBox="1"/>
-          <p:nvPr/>
-        </p:nvSpPr>
-        <p:spPr>
-          <a:xfrm>
             <a:off x="7269480" y="1371600"/>
             <a:ext cx="4297680" cy="310896"/>
           </a:xfrm>
@@ -4489,27 +4273,7 @@
       </p:sp>
       <p:sp>
         <p:nvSpPr>
-          <p:cNvPr id="9" name="Shape 7"/>
-          <p:cNvSpPr/>
-          <p:nvPr/>
-        </p:nvSpPr>
-        <p:spPr>
-          <a:xfrm>
-            <a:off x="713232" y="1737360"/>
-            <a:ext cx="5897880" cy="10973"/>
-          </a:xfrm>
-          <a:prstGeom prst="rect">
-            <a:avLst/>
-          </a:prstGeom>
-          <a:solidFill>
-            <a:srgbClr val="D9D9D9"/>
-          </a:solidFill>
-          <a:ln/>
-        </p:spPr>
-      </p:sp>
-      <p:sp>
-        <p:nvSpPr>
-          <p:cNvPr id="10" name="Shape 8"/>
+          <p:cNvPr id="8" name="Shape 6"/>
           <p:cNvSpPr/>
           <p:nvPr/>
         </p:nvSpPr>
@@ -4529,14 +4293,14 @@
       </p:sp>
       <p:sp>
         <p:nvSpPr>
-          <p:cNvPr id="11" name="Text 9"/>
-          <p:cNvSpPr txBox="1"/>
-          <p:nvPr/>
-        </p:nvSpPr>
-        <p:spPr>
-          <a:xfrm>
-            <a:off x="713232" y="1874520"/>
-            <a:ext cx="5897880" cy="3977640"/>
+          <p:cNvPr id="9" name="Text 7"/>
+          <p:cNvSpPr txBox="1"/>
+          <p:nvPr/>
+        </p:nvSpPr>
+        <p:spPr>
+          <a:xfrm>
+            <a:off x="713232" y="1417320"/>
+            <a:ext cx="5897880" cy="4434840"/>
           </a:xfrm>
           <a:prstGeom prst="rect">
             <a:avLst/>
@@ -4656,7 +4420,7 @@
       </p:sp>
       <p:sp>
         <p:nvSpPr>
-          <p:cNvPr id="12" name="Shape 10"/>
+          <p:cNvPr id="10" name="Shape 8"/>
           <p:cNvSpPr/>
           <p:nvPr/>
         </p:nvSpPr>
@@ -4676,7 +4440,7 @@
       </p:sp>
       <p:sp>
         <p:nvSpPr>
-          <p:cNvPr id="13" name="Text 11"/>
+          <p:cNvPr id="11" name="Text 9"/>
           <p:cNvSpPr txBox="1"/>
           <p:nvPr/>
         </p:nvSpPr>
@@ -4717,7 +4481,7 @@
       </p:sp>
       <p:sp>
         <p:nvSpPr>
-          <p:cNvPr id="14" name="Text 12"/>
+          <p:cNvPr id="12" name="Text 10"/>
           <p:cNvSpPr txBox="1"/>
           <p:nvPr/>
         </p:nvSpPr>
@@ -4756,7 +4520,7 @@
       </p:sp>
       <p:sp>
         <p:nvSpPr>
-          <p:cNvPr id="15" name="Shape 13"/>
+          <p:cNvPr id="13" name="Shape 11"/>
           <p:cNvSpPr/>
           <p:nvPr/>
         </p:nvSpPr>
@@ -4776,7 +4540,7 @@
       </p:sp>
       <p:sp>
         <p:nvSpPr>
-          <p:cNvPr id="16" name="Text 14"/>
+          <p:cNvPr id="14" name="Text 12"/>
           <p:cNvSpPr txBox="1"/>
           <p:nvPr/>
         </p:nvSpPr>
@@ -4817,7 +4581,7 @@
       </p:sp>
       <p:sp>
         <p:nvSpPr>
-          <p:cNvPr id="17" name="Text 15"/>
+          <p:cNvPr id="15" name="Text 13"/>
           <p:cNvSpPr txBox="1"/>
           <p:nvPr/>
         </p:nvSpPr>
@@ -4856,7 +4620,7 @@
       </p:sp>
       <p:sp>
         <p:nvSpPr>
-          <p:cNvPr id="18" name="Shape 16"/>
+          <p:cNvPr id="16" name="Shape 14"/>
           <p:cNvSpPr/>
           <p:nvPr/>
         </p:nvSpPr>
@@ -4876,7 +4640,7 @@
       </p:sp>
       <p:sp>
         <p:nvSpPr>
-          <p:cNvPr id="19" name="Text 17"/>
+          <p:cNvPr id="17" name="Text 15"/>
           <p:cNvSpPr txBox="1"/>
           <p:nvPr/>
         </p:nvSpPr>
@@ -5091,45 +4855,6 @@
         </p:nvSpPr>
         <p:spPr>
           <a:xfrm>
-            <a:off x="713232" y="1371600"/>
-            <a:ext cx="5943600" cy="310896"/>
-          </a:xfrm>
-          <a:prstGeom prst="rect">
-            <a:avLst/>
-          </a:prstGeom>
-          <a:noFill/>
-          <a:ln/>
-        </p:spPr>
-        <p:txBody>
-          <a:bodyPr wrap="square" lIns="0" tIns="0" rIns="0" bIns="0" rtlCol="0" anchor="ctr"/>
-          <a:lstStyle/>
-          <a:p>
-            <a:pPr indent="0" marL="0">
-              <a:buNone/>
-            </a:pPr>
-            <a:r>
-              <a:rPr lang="en-US" sz="1400" b="1" spc="100" kern="0" dirty="0">
-                <a:solidFill>
-                  <a:srgbClr val="0B2C4A"/>
-                </a:solidFill>
-                <a:latin typeface="Inter" pitchFamily="34" charset="0"/>
-                <a:ea typeface="Inter" pitchFamily="34" charset="-122"/>
-                <a:cs typeface="Inter" pitchFamily="34" charset="-120"/>
-              </a:rPr>
-              <a:t>WHAT WE SAID · ROUNDTABLE &amp; GM MEETINGS</a:t>
-            </a:r>
-            <a:endParaRPr lang="en-US" sz="1400" dirty="0"/>
-          </a:p>
-        </p:txBody>
-      </p:sp>
-      <p:sp>
-        <p:nvSpPr>
-          <p:cNvPr id="8" name="Text 6"/>
-          <p:cNvSpPr txBox="1"/>
-          <p:nvPr/>
-        </p:nvSpPr>
-        <p:spPr>
-          <a:xfrm>
             <a:off x="7269480" y="1371600"/>
             <a:ext cx="4297680" cy="310896"/>
           </a:xfrm>
@@ -5163,27 +4888,7 @@
       </p:sp>
       <p:sp>
         <p:nvSpPr>
-          <p:cNvPr id="9" name="Shape 7"/>
-          <p:cNvSpPr/>
-          <p:nvPr/>
-        </p:nvSpPr>
-        <p:spPr>
-          <a:xfrm>
-            <a:off x="713232" y="1737360"/>
-            <a:ext cx="5897880" cy="10973"/>
-          </a:xfrm>
-          <a:prstGeom prst="rect">
-            <a:avLst/>
-          </a:prstGeom>
-          <a:solidFill>
-            <a:srgbClr val="D9D9D9"/>
-          </a:solidFill>
-          <a:ln/>
-        </p:spPr>
-      </p:sp>
-      <p:sp>
-        <p:nvSpPr>
-          <p:cNvPr id="10" name="Shape 8"/>
+          <p:cNvPr id="8" name="Shape 6"/>
           <p:cNvSpPr/>
           <p:nvPr/>
         </p:nvSpPr>
@@ -5203,14 +4908,14 @@
       </p:sp>
       <p:sp>
         <p:nvSpPr>
-          <p:cNvPr id="11" name="Text 9"/>
-          <p:cNvSpPr txBox="1"/>
-          <p:nvPr/>
-        </p:nvSpPr>
-        <p:spPr>
-          <a:xfrm>
-            <a:off x="713232" y="1874520"/>
-            <a:ext cx="5897880" cy="3977640"/>
+          <p:cNvPr id="9" name="Text 7"/>
+          <p:cNvSpPr txBox="1"/>
+          <p:nvPr/>
+        </p:nvSpPr>
+        <p:spPr>
+          <a:xfrm>
+            <a:off x="713232" y="1417320"/>
+            <a:ext cx="5897880" cy="4434840"/>
           </a:xfrm>
           <a:prstGeom prst="rect">
             <a:avLst/>
@@ -5330,7 +5035,7 @@
       </p:sp>
       <p:sp>
         <p:nvSpPr>
-          <p:cNvPr id="12" name="Shape 10"/>
+          <p:cNvPr id="10" name="Shape 8"/>
           <p:cNvSpPr/>
           <p:nvPr/>
         </p:nvSpPr>
@@ -5350,7 +5055,7 @@
       </p:sp>
       <p:sp>
         <p:nvSpPr>
-          <p:cNvPr id="13" name="Text 11"/>
+          <p:cNvPr id="11" name="Text 9"/>
           <p:cNvSpPr txBox="1"/>
           <p:nvPr/>
         </p:nvSpPr>
@@ -5391,7 +5096,7 @@
       </p:sp>
       <p:sp>
         <p:nvSpPr>
-          <p:cNvPr id="14" name="Text 12"/>
+          <p:cNvPr id="12" name="Text 10"/>
           <p:cNvSpPr txBox="1"/>
           <p:nvPr/>
         </p:nvSpPr>
@@ -5430,7 +5135,7 @@
       </p:sp>
       <p:sp>
         <p:nvSpPr>
-          <p:cNvPr id="15" name="Shape 13"/>
+          <p:cNvPr id="13" name="Shape 11"/>
           <p:cNvSpPr/>
           <p:nvPr/>
         </p:nvSpPr>
@@ -5450,7 +5155,7 @@
       </p:sp>
       <p:sp>
         <p:nvSpPr>
-          <p:cNvPr id="16" name="Text 14"/>
+          <p:cNvPr id="14" name="Text 12"/>
           <p:cNvSpPr txBox="1"/>
           <p:nvPr/>
         </p:nvSpPr>
@@ -5491,7 +5196,7 @@
       </p:sp>
       <p:sp>
         <p:nvSpPr>
-          <p:cNvPr id="17" name="Text 15"/>
+          <p:cNvPr id="15" name="Text 13"/>
           <p:cNvSpPr txBox="1"/>
           <p:nvPr/>
         </p:nvSpPr>
@@ -5530,7 +5235,7 @@
       </p:sp>
       <p:sp>
         <p:nvSpPr>
-          <p:cNvPr id="18" name="Shape 16"/>
+          <p:cNvPr id="16" name="Shape 14"/>
           <p:cNvSpPr/>
           <p:nvPr/>
         </p:nvSpPr>
@@ -5550,7 +5255,7 @@
       </p:sp>
       <p:sp>
         <p:nvSpPr>
-          <p:cNvPr id="19" name="Text 17"/>
+          <p:cNvPr id="17" name="Text 15"/>
           <p:cNvSpPr txBox="1"/>
           <p:nvPr/>
         </p:nvSpPr>
@@ -5591,7 +5296,7 @@
       </p:sp>
       <p:sp>
         <p:nvSpPr>
-          <p:cNvPr id="20" name="Text 18"/>
+          <p:cNvPr id="18" name="Text 16"/>
           <p:cNvSpPr txBox="1"/>
           <p:nvPr/>
         </p:nvSpPr>
@@ -5630,7 +5335,7 @@
       </p:sp>
       <p:sp>
         <p:nvSpPr>
-          <p:cNvPr id="21" name="Shape 19"/>
+          <p:cNvPr id="19" name="Shape 17"/>
           <p:cNvSpPr/>
           <p:nvPr/>
         </p:nvSpPr>
@@ -5650,7 +5355,7 @@
       </p:sp>
       <p:sp>
         <p:nvSpPr>
-          <p:cNvPr id="22" name="Text 20"/>
+          <p:cNvPr id="20" name="Text 18"/>
           <p:cNvSpPr txBox="1"/>
           <p:nvPr/>
         </p:nvSpPr>
@@ -5865,45 +5570,6 @@
         </p:nvSpPr>
         <p:spPr>
           <a:xfrm>
-            <a:off x="713232" y="1371600"/>
-            <a:ext cx="5943600" cy="310896"/>
-          </a:xfrm>
-          <a:prstGeom prst="rect">
-            <a:avLst/>
-          </a:prstGeom>
-          <a:noFill/>
-          <a:ln/>
-        </p:spPr>
-        <p:txBody>
-          <a:bodyPr wrap="square" lIns="0" tIns="0" rIns="0" bIns="0" rtlCol="0" anchor="ctr"/>
-          <a:lstStyle/>
-          <a:p>
-            <a:pPr indent="0" marL="0">
-              <a:buNone/>
-            </a:pPr>
-            <a:r>
-              <a:rPr lang="en-US" sz="1400" b="1" spc="100" kern="0" dirty="0">
-                <a:solidFill>
-                  <a:srgbClr val="0B2C4A"/>
-                </a:solidFill>
-                <a:latin typeface="Inter" pitchFamily="34" charset="0"/>
-                <a:ea typeface="Inter" pitchFamily="34" charset="-122"/>
-                <a:cs typeface="Inter" pitchFamily="34" charset="-120"/>
-              </a:rPr>
-              <a:t>WHAT WE SAID · ROUNDTABLE 2024</a:t>
-            </a:r>
-            <a:endParaRPr lang="en-US" sz="1400" dirty="0"/>
-          </a:p>
-        </p:txBody>
-      </p:sp>
-      <p:sp>
-        <p:nvSpPr>
-          <p:cNvPr id="8" name="Text 6"/>
-          <p:cNvSpPr txBox="1"/>
-          <p:nvPr/>
-        </p:nvSpPr>
-        <p:spPr>
-          <a:xfrm>
             <a:off x="7269480" y="1371600"/>
             <a:ext cx="4297680" cy="310896"/>
           </a:xfrm>
@@ -5937,27 +5603,7 @@
       </p:sp>
       <p:sp>
         <p:nvSpPr>
-          <p:cNvPr id="9" name="Shape 7"/>
-          <p:cNvSpPr/>
-          <p:nvPr/>
-        </p:nvSpPr>
-        <p:spPr>
-          <a:xfrm>
-            <a:off x="713232" y="1737360"/>
-            <a:ext cx="5897880" cy="10973"/>
-          </a:xfrm>
-          <a:prstGeom prst="rect">
-            <a:avLst/>
-          </a:prstGeom>
-          <a:solidFill>
-            <a:srgbClr val="D9D9D9"/>
-          </a:solidFill>
-          <a:ln/>
-        </p:spPr>
-      </p:sp>
-      <p:sp>
-        <p:nvSpPr>
-          <p:cNvPr id="10" name="Shape 8"/>
+          <p:cNvPr id="8" name="Shape 6"/>
           <p:cNvSpPr/>
           <p:nvPr/>
         </p:nvSpPr>
@@ -5977,14 +5623,14 @@
       </p:sp>
       <p:sp>
         <p:nvSpPr>
-          <p:cNvPr id="11" name="Text 9"/>
-          <p:cNvSpPr txBox="1"/>
-          <p:nvPr/>
-        </p:nvSpPr>
-        <p:spPr>
-          <a:xfrm>
-            <a:off x="713232" y="1874520"/>
-            <a:ext cx="5897880" cy="3977640"/>
+          <p:cNvPr id="9" name="Text 7"/>
+          <p:cNvSpPr txBox="1"/>
+          <p:nvPr/>
+        </p:nvSpPr>
+        <p:spPr>
+          <a:xfrm>
+            <a:off x="713232" y="1417320"/>
+            <a:ext cx="5897880" cy="4434840"/>
           </a:xfrm>
           <a:prstGeom prst="rect">
             <a:avLst/>
@@ -6083,7 +5729,7 @@
       </p:sp>
       <p:sp>
         <p:nvSpPr>
-          <p:cNvPr id="12" name="Shape 10"/>
+          <p:cNvPr id="10" name="Shape 8"/>
           <p:cNvSpPr/>
           <p:nvPr/>
         </p:nvSpPr>
@@ -6103,7 +5749,7 @@
       </p:sp>
       <p:sp>
         <p:nvSpPr>
-          <p:cNvPr id="13" name="Text 11"/>
+          <p:cNvPr id="11" name="Text 9"/>
           <p:cNvSpPr txBox="1"/>
           <p:nvPr/>
         </p:nvSpPr>
@@ -6144,7 +5790,7 @@
       </p:sp>
       <p:sp>
         <p:nvSpPr>
-          <p:cNvPr id="14" name="Text 12"/>
+          <p:cNvPr id="12" name="Text 10"/>
           <p:cNvSpPr txBox="1"/>
           <p:nvPr/>
         </p:nvSpPr>
@@ -6183,7 +5829,7 @@
       </p:sp>
       <p:sp>
         <p:nvSpPr>
-          <p:cNvPr id="15" name="Shape 13"/>
+          <p:cNvPr id="13" name="Shape 11"/>
           <p:cNvSpPr/>
           <p:nvPr/>
         </p:nvSpPr>
@@ -6203,7 +5849,7 @@
       </p:sp>
       <p:sp>
         <p:nvSpPr>
-          <p:cNvPr id="16" name="Text 14"/>
+          <p:cNvPr id="14" name="Text 12"/>
           <p:cNvSpPr txBox="1"/>
           <p:nvPr/>
         </p:nvSpPr>
@@ -6244,7 +5890,7 @@
       </p:sp>
       <p:sp>
         <p:nvSpPr>
-          <p:cNvPr id="17" name="Text 15"/>
+          <p:cNvPr id="15" name="Text 13"/>
           <p:cNvSpPr txBox="1"/>
           <p:nvPr/>
         </p:nvSpPr>
@@ -6283,7 +5929,7 @@
       </p:sp>
       <p:sp>
         <p:nvSpPr>
-          <p:cNvPr id="18" name="Shape 16"/>
+          <p:cNvPr id="16" name="Shape 14"/>
           <p:cNvSpPr/>
           <p:nvPr/>
         </p:nvSpPr>
@@ -6303,7 +5949,7 @@
       </p:sp>
       <p:sp>
         <p:nvSpPr>
-          <p:cNvPr id="19" name="Text 17"/>
+          <p:cNvPr id="17" name="Text 15"/>
           <p:cNvSpPr txBox="1"/>
           <p:nvPr/>
         </p:nvSpPr>
@@ -6344,7 +5990,7 @@
       </p:sp>
       <p:sp>
         <p:nvSpPr>
-          <p:cNvPr id="20" name="Text 18"/>
+          <p:cNvPr id="18" name="Text 16"/>
           <p:cNvSpPr txBox="1"/>
           <p:nvPr/>
         </p:nvSpPr>
@@ -6383,7 +6029,7 @@
       </p:sp>
       <p:sp>
         <p:nvSpPr>
-          <p:cNvPr id="21" name="Shape 19"/>
+          <p:cNvPr id="19" name="Shape 17"/>
           <p:cNvSpPr/>
           <p:nvPr/>
         </p:nvSpPr>
@@ -6403,7 +6049,7 @@
       </p:sp>
       <p:sp>
         <p:nvSpPr>
-          <p:cNvPr id="22" name="Text 20"/>
+          <p:cNvPr id="20" name="Text 18"/>
           <p:cNvSpPr txBox="1"/>
           <p:nvPr/>
         </p:nvSpPr>
@@ -6618,45 +6264,6 @@
         </p:nvSpPr>
         <p:spPr>
           <a:xfrm>
-            <a:off x="713232" y="1371600"/>
-            <a:ext cx="5943600" cy="310896"/>
-          </a:xfrm>
-          <a:prstGeom prst="rect">
-            <a:avLst/>
-          </a:prstGeom>
-          <a:noFill/>
-          <a:ln/>
-        </p:spPr>
-        <p:txBody>
-          <a:bodyPr wrap="square" lIns="0" tIns="0" rIns="0" bIns="0" rtlCol="0" anchor="ctr"/>
-          <a:lstStyle/>
-          <a:p>
-            <a:pPr indent="0" marL="0">
-              <a:buNone/>
-            </a:pPr>
-            <a:r>
-              <a:rPr lang="en-US" sz="1400" b="1" spc="100" kern="0" dirty="0">
-                <a:solidFill>
-                  <a:srgbClr val="0B2C4A"/>
-                </a:solidFill>
-                <a:latin typeface="Inter" pitchFamily="34" charset="0"/>
-                <a:ea typeface="Inter" pitchFamily="34" charset="-122"/>
-                <a:cs typeface="Inter" pitchFamily="34" charset="-120"/>
-              </a:rPr>
-              <a:t>WHAT WE SAID · ROUNDTABLE &amp; GM MEETINGS</a:t>
-            </a:r>
-            <a:endParaRPr lang="en-US" sz="1400" dirty="0"/>
-          </a:p>
-        </p:txBody>
-      </p:sp>
-      <p:sp>
-        <p:nvSpPr>
-          <p:cNvPr id="8" name="Text 6"/>
-          <p:cNvSpPr txBox="1"/>
-          <p:nvPr/>
-        </p:nvSpPr>
-        <p:spPr>
-          <a:xfrm>
             <a:off x="7269480" y="1371600"/>
             <a:ext cx="4297680" cy="310896"/>
           </a:xfrm>
@@ -6690,27 +6297,7 @@
       </p:sp>
       <p:sp>
         <p:nvSpPr>
-          <p:cNvPr id="9" name="Shape 7"/>
-          <p:cNvSpPr/>
-          <p:nvPr/>
-        </p:nvSpPr>
-        <p:spPr>
-          <a:xfrm>
-            <a:off x="713232" y="1737360"/>
-            <a:ext cx="5897880" cy="10973"/>
-          </a:xfrm>
-          <a:prstGeom prst="rect">
-            <a:avLst/>
-          </a:prstGeom>
-          <a:solidFill>
-            <a:srgbClr val="D9D9D9"/>
-          </a:solidFill>
-          <a:ln/>
-        </p:spPr>
-      </p:sp>
-      <p:sp>
-        <p:nvSpPr>
-          <p:cNvPr id="10" name="Shape 8"/>
+          <p:cNvPr id="8" name="Shape 6"/>
           <p:cNvSpPr/>
           <p:nvPr/>
         </p:nvSpPr>
@@ -6730,14 +6317,14 @@
       </p:sp>
       <p:sp>
         <p:nvSpPr>
-          <p:cNvPr id="11" name="Text 9"/>
-          <p:cNvSpPr txBox="1"/>
-          <p:nvPr/>
-        </p:nvSpPr>
-        <p:spPr>
-          <a:xfrm>
-            <a:off x="713232" y="1874520"/>
-            <a:ext cx="5897880" cy="3977640"/>
+          <p:cNvPr id="9" name="Text 7"/>
+          <p:cNvSpPr txBox="1"/>
+          <p:nvPr/>
+        </p:nvSpPr>
+        <p:spPr>
+          <a:xfrm>
+            <a:off x="713232" y="1417320"/>
+            <a:ext cx="5897880" cy="4434840"/>
           </a:xfrm>
           <a:prstGeom prst="rect">
             <a:avLst/>
@@ -6857,7 +6444,7 @@
       </p:sp>
       <p:sp>
         <p:nvSpPr>
-          <p:cNvPr id="12" name="Shape 10"/>
+          <p:cNvPr id="10" name="Shape 8"/>
           <p:cNvSpPr/>
           <p:nvPr/>
         </p:nvSpPr>
@@ -6877,7 +6464,7 @@
       </p:sp>
       <p:sp>
         <p:nvSpPr>
-          <p:cNvPr id="13" name="Text 11"/>
+          <p:cNvPr id="11" name="Text 9"/>
           <p:cNvSpPr txBox="1"/>
           <p:nvPr/>
         </p:nvSpPr>
@@ -6918,7 +6505,7 @@
       </p:sp>
       <p:sp>
         <p:nvSpPr>
-          <p:cNvPr id="14" name="Text 12"/>
+          <p:cNvPr id="12" name="Text 10"/>
           <p:cNvSpPr txBox="1"/>
           <p:nvPr/>
         </p:nvSpPr>
@@ -6957,7 +6544,7 @@
       </p:sp>
       <p:sp>
         <p:nvSpPr>
-          <p:cNvPr id="15" name="Shape 13"/>
+          <p:cNvPr id="13" name="Shape 11"/>
           <p:cNvSpPr/>
           <p:nvPr/>
         </p:nvSpPr>
@@ -6977,7 +6564,7 @@
       </p:sp>
       <p:sp>
         <p:nvSpPr>
-          <p:cNvPr id="16" name="Text 14"/>
+          <p:cNvPr id="14" name="Text 12"/>
           <p:cNvSpPr txBox="1"/>
           <p:nvPr/>
         </p:nvSpPr>
@@ -7018,7 +6605,7 @@
       </p:sp>
       <p:sp>
         <p:nvSpPr>
-          <p:cNvPr id="17" name="Text 15"/>
+          <p:cNvPr id="15" name="Text 13"/>
           <p:cNvSpPr txBox="1"/>
           <p:nvPr/>
         </p:nvSpPr>
@@ -7057,7 +6644,7 @@
       </p:sp>
       <p:sp>
         <p:nvSpPr>
-          <p:cNvPr id="18" name="Shape 16"/>
+          <p:cNvPr id="16" name="Shape 14"/>
           <p:cNvSpPr/>
           <p:nvPr/>
         </p:nvSpPr>
@@ -7077,7 +6664,7 @@
       </p:sp>
       <p:sp>
         <p:nvSpPr>
-          <p:cNvPr id="19" name="Text 17"/>
+          <p:cNvPr id="17" name="Text 15"/>
           <p:cNvSpPr txBox="1"/>
           <p:nvPr/>
         </p:nvSpPr>
@@ -7118,7 +6705,7 @@
       </p:sp>
       <p:sp>
         <p:nvSpPr>
-          <p:cNvPr id="20" name="Text 18"/>
+          <p:cNvPr id="18" name="Text 16"/>
           <p:cNvSpPr txBox="1"/>
           <p:nvPr/>
         </p:nvSpPr>
@@ -7157,7 +6744,7 @@
       </p:sp>
       <p:sp>
         <p:nvSpPr>
-          <p:cNvPr id="21" name="Shape 19"/>
+          <p:cNvPr id="19" name="Shape 17"/>
           <p:cNvSpPr/>
           <p:nvPr/>
         </p:nvSpPr>
@@ -7177,7 +6764,7 @@
       </p:sp>
       <p:sp>
         <p:nvSpPr>
-          <p:cNvPr id="22" name="Text 20"/>
+          <p:cNvPr id="20" name="Text 18"/>
           <p:cNvSpPr txBox="1"/>
           <p:nvPr/>
         </p:nvSpPr>
@@ -7392,45 +6979,6 @@
         </p:nvSpPr>
         <p:spPr>
           <a:xfrm>
-            <a:off x="713232" y="1371600"/>
-            <a:ext cx="5943600" cy="310896"/>
-          </a:xfrm>
-          <a:prstGeom prst="rect">
-            <a:avLst/>
-          </a:prstGeom>
-          <a:noFill/>
-          <a:ln/>
-        </p:spPr>
-        <p:txBody>
-          <a:bodyPr wrap="square" lIns="0" tIns="0" rIns="0" bIns="0" rtlCol="0" anchor="ctr"/>
-          <a:lstStyle/>
-          <a:p>
-            <a:pPr indent="0" marL="0">
-              <a:buNone/>
-            </a:pPr>
-            <a:r>
-              <a:rPr lang="en-US" sz="1400" b="1" spc="100" kern="0" dirty="0">
-                <a:solidFill>
-                  <a:srgbClr val="0B2C4A"/>
-                </a:solidFill>
-                <a:latin typeface="Inter" pitchFamily="34" charset="0"/>
-                <a:ea typeface="Inter" pitchFamily="34" charset="-122"/>
-                <a:cs typeface="Inter" pitchFamily="34" charset="-120"/>
-              </a:rPr>
-              <a:t>WHAT WE SAID · ROUNDTABLE 2024</a:t>
-            </a:r>
-            <a:endParaRPr lang="en-US" sz="1400" dirty="0"/>
-          </a:p>
-        </p:txBody>
-      </p:sp>
-      <p:sp>
-        <p:nvSpPr>
-          <p:cNvPr id="8" name="Text 6"/>
-          <p:cNvSpPr txBox="1"/>
-          <p:nvPr/>
-        </p:nvSpPr>
-        <p:spPr>
-          <a:xfrm>
             <a:off x="7269480" y="1371600"/>
             <a:ext cx="4297680" cy="310896"/>
           </a:xfrm>
@@ -7464,27 +7012,7 @@
       </p:sp>
       <p:sp>
         <p:nvSpPr>
-          <p:cNvPr id="9" name="Shape 7"/>
-          <p:cNvSpPr/>
-          <p:nvPr/>
-        </p:nvSpPr>
-        <p:spPr>
-          <a:xfrm>
-            <a:off x="713232" y="1737360"/>
-            <a:ext cx="5897880" cy="10973"/>
-          </a:xfrm>
-          <a:prstGeom prst="rect">
-            <a:avLst/>
-          </a:prstGeom>
-          <a:solidFill>
-            <a:srgbClr val="D9D9D9"/>
-          </a:solidFill>
-          <a:ln/>
-        </p:spPr>
-      </p:sp>
-      <p:sp>
-        <p:nvSpPr>
-          <p:cNvPr id="10" name="Shape 8"/>
+          <p:cNvPr id="8" name="Shape 6"/>
           <p:cNvSpPr/>
           <p:nvPr/>
         </p:nvSpPr>
@@ -7504,14 +7032,14 @@
       </p:sp>
       <p:sp>
         <p:nvSpPr>
-          <p:cNvPr id="11" name="Text 9"/>
-          <p:cNvSpPr txBox="1"/>
-          <p:nvPr/>
-        </p:nvSpPr>
-        <p:spPr>
-          <a:xfrm>
-            <a:off x="713232" y="1874520"/>
-            <a:ext cx="5897880" cy="3977640"/>
+          <p:cNvPr id="9" name="Text 7"/>
+          <p:cNvSpPr txBox="1"/>
+          <p:nvPr/>
+        </p:nvSpPr>
+        <p:spPr>
+          <a:xfrm>
+            <a:off x="713232" y="1417320"/>
+            <a:ext cx="5897880" cy="4434840"/>
           </a:xfrm>
           <a:prstGeom prst="rect">
             <a:avLst/>
@@ -7610,7 +7138,7 @@
       </p:sp>
       <p:sp>
         <p:nvSpPr>
-          <p:cNvPr id="12" name="Shape 10"/>
+          <p:cNvPr id="10" name="Shape 8"/>
           <p:cNvSpPr/>
           <p:nvPr/>
         </p:nvSpPr>
@@ -7630,7 +7158,7 @@
       </p:sp>
       <p:sp>
         <p:nvSpPr>
-          <p:cNvPr id="13" name="Text 11"/>
+          <p:cNvPr id="11" name="Text 9"/>
           <p:cNvSpPr txBox="1"/>
           <p:nvPr/>
         </p:nvSpPr>
@@ -7671,7 +7199,7 @@
       </p:sp>
       <p:sp>
         <p:nvSpPr>
-          <p:cNvPr id="14" name="Text 12"/>
+          <p:cNvPr id="12" name="Text 10"/>
           <p:cNvSpPr txBox="1"/>
           <p:nvPr/>
         </p:nvSpPr>
@@ -7710,7 +7238,7 @@
       </p:sp>
       <p:sp>
         <p:nvSpPr>
-          <p:cNvPr id="15" name="Shape 13"/>
+          <p:cNvPr id="13" name="Shape 11"/>
           <p:cNvSpPr/>
           <p:nvPr/>
         </p:nvSpPr>
@@ -7730,7 +7258,7 @@
       </p:sp>
       <p:sp>
         <p:nvSpPr>
-          <p:cNvPr id="16" name="Text 14"/>
+          <p:cNvPr id="14" name="Text 12"/>
           <p:cNvSpPr txBox="1"/>
           <p:nvPr/>
         </p:nvSpPr>
@@ -7771,7 +7299,7 @@
       </p:sp>
       <p:sp>
         <p:nvSpPr>
-          <p:cNvPr id="17" name="Text 15"/>
+          <p:cNvPr id="15" name="Text 13"/>
           <p:cNvSpPr txBox="1"/>
           <p:nvPr/>
         </p:nvSpPr>
@@ -7810,7 +7338,7 @@
       </p:sp>
       <p:sp>
         <p:nvSpPr>
-          <p:cNvPr id="18" name="Shape 16"/>
+          <p:cNvPr id="16" name="Shape 14"/>
           <p:cNvSpPr/>
           <p:nvPr/>
         </p:nvSpPr>
@@ -7830,7 +7358,7 @@
       </p:sp>
       <p:sp>
         <p:nvSpPr>
-          <p:cNvPr id="19" name="Text 17"/>
+          <p:cNvPr id="17" name="Text 15"/>
           <p:cNvSpPr txBox="1"/>
           <p:nvPr/>
         </p:nvSpPr>
@@ -7871,7 +7399,7 @@
       </p:sp>
       <p:sp>
         <p:nvSpPr>
-          <p:cNvPr id="20" name="Text 18"/>
+          <p:cNvPr id="18" name="Text 16"/>
           <p:cNvSpPr txBox="1"/>
           <p:nvPr/>
         </p:nvSpPr>
@@ -7910,7 +7438,7 @@
       </p:sp>
       <p:sp>
         <p:nvSpPr>
-          <p:cNvPr id="21" name="Shape 19"/>
+          <p:cNvPr id="19" name="Shape 17"/>
           <p:cNvSpPr/>
           <p:nvPr/>
         </p:nvSpPr>
@@ -7930,7 +7458,7 @@
       </p:sp>
       <p:sp>
         <p:nvSpPr>
-          <p:cNvPr id="22" name="Text 20"/>
+          <p:cNvPr id="20" name="Text 18"/>
           <p:cNvSpPr txBox="1"/>
           <p:nvPr/>
         </p:nvSpPr>
@@ -8145,45 +7673,6 @@
         </p:nvSpPr>
         <p:spPr>
           <a:xfrm>
-            <a:off x="713232" y="1371600"/>
-            <a:ext cx="5943600" cy="310896"/>
-          </a:xfrm>
-          <a:prstGeom prst="rect">
-            <a:avLst/>
-          </a:prstGeom>
-          <a:noFill/>
-          <a:ln/>
-        </p:spPr>
-        <p:txBody>
-          <a:bodyPr wrap="square" lIns="0" tIns="0" rIns="0" bIns="0" rtlCol="0" anchor="ctr"/>
-          <a:lstStyle/>
-          <a:p>
-            <a:pPr indent="0" marL="0">
-              <a:buNone/>
-            </a:pPr>
-            <a:r>
-              <a:rPr lang="en-US" sz="1400" b="1" spc="100" kern="0" dirty="0">
-                <a:solidFill>
-                  <a:srgbClr val="0B2C4A"/>
-                </a:solidFill>
-                <a:latin typeface="Inter" pitchFamily="34" charset="0"/>
-                <a:ea typeface="Inter" pitchFamily="34" charset="-122"/>
-                <a:cs typeface="Inter" pitchFamily="34" charset="-120"/>
-              </a:rPr>
-              <a:t>WHAT WE SAID · GM MEETINGS JAN &amp; MAY 2026</a:t>
-            </a:r>
-            <a:endParaRPr lang="en-US" sz="1400" dirty="0"/>
-          </a:p>
-        </p:txBody>
-      </p:sp>
-      <p:sp>
-        <p:nvSpPr>
-          <p:cNvPr id="8" name="Text 6"/>
-          <p:cNvSpPr txBox="1"/>
-          <p:nvPr/>
-        </p:nvSpPr>
-        <p:spPr>
-          <a:xfrm>
             <a:off x="7269480" y="1371600"/>
             <a:ext cx="4297680" cy="310896"/>
           </a:xfrm>
@@ -8217,27 +7706,7 @@
       </p:sp>
       <p:sp>
         <p:nvSpPr>
-          <p:cNvPr id="9" name="Shape 7"/>
-          <p:cNvSpPr/>
-          <p:nvPr/>
-        </p:nvSpPr>
-        <p:spPr>
-          <a:xfrm>
-            <a:off x="713232" y="1737360"/>
-            <a:ext cx="5897880" cy="10973"/>
-          </a:xfrm>
-          <a:prstGeom prst="rect">
-            <a:avLst/>
-          </a:prstGeom>
-          <a:solidFill>
-            <a:srgbClr val="D9D9D9"/>
-          </a:solidFill>
-          <a:ln/>
-        </p:spPr>
-      </p:sp>
-      <p:sp>
-        <p:nvSpPr>
-          <p:cNvPr id="10" name="Shape 8"/>
+          <p:cNvPr id="8" name="Shape 6"/>
           <p:cNvSpPr/>
           <p:nvPr/>
         </p:nvSpPr>
@@ -8257,14 +7726,14 @@
       </p:sp>
       <p:sp>
         <p:nvSpPr>
-          <p:cNvPr id="11" name="Text 9"/>
-          <p:cNvSpPr txBox="1"/>
-          <p:nvPr/>
-        </p:nvSpPr>
-        <p:spPr>
-          <a:xfrm>
-            <a:off x="713232" y="1874520"/>
-            <a:ext cx="5897880" cy="3977640"/>
+          <p:cNvPr id="9" name="Text 7"/>
+          <p:cNvSpPr txBox="1"/>
+          <p:nvPr/>
+        </p:nvSpPr>
+        <p:spPr>
+          <a:xfrm>
+            <a:off x="713232" y="1417320"/>
+            <a:ext cx="5897880" cy="4434840"/>
           </a:xfrm>
           <a:prstGeom prst="rect">
             <a:avLst/>
@@ -8405,7 +7874,7 @@
       </p:sp>
       <p:sp>
         <p:nvSpPr>
-          <p:cNvPr id="12" name="Shape 10"/>
+          <p:cNvPr id="10" name="Shape 8"/>
           <p:cNvSpPr/>
           <p:nvPr/>
         </p:nvSpPr>
@@ -8425,7 +7894,7 @@
       </p:sp>
       <p:sp>
         <p:nvSpPr>
-          <p:cNvPr id="13" name="Text 11"/>
+          <p:cNvPr id="11" name="Text 9"/>
           <p:cNvSpPr txBox="1"/>
           <p:nvPr/>
         </p:nvSpPr>
@@ -8466,7 +7935,7 @@
       </p:sp>
       <p:sp>
         <p:nvSpPr>
-          <p:cNvPr id="14" name="Text 12"/>
+          <p:cNvPr id="12" name="Text 10"/>
           <p:cNvSpPr txBox="1"/>
           <p:nvPr/>
         </p:nvSpPr>
@@ -8505,7 +7974,7 @@
       </p:sp>
       <p:sp>
         <p:nvSpPr>
-          <p:cNvPr id="15" name="Shape 13"/>
+          <p:cNvPr id="13" name="Shape 11"/>
           <p:cNvSpPr/>
           <p:nvPr/>
         </p:nvSpPr>
@@ -8525,7 +7994,7 @@
       </p:sp>
       <p:sp>
         <p:nvSpPr>
-          <p:cNvPr id="16" name="Text 14"/>
+          <p:cNvPr id="14" name="Text 12"/>
           <p:cNvSpPr txBox="1"/>
           <p:nvPr/>
         </p:nvSpPr>
@@ -8566,7 +8035,7 @@
       </p:sp>
       <p:sp>
         <p:nvSpPr>
-          <p:cNvPr id="17" name="Text 15"/>
+          <p:cNvPr id="15" name="Text 13"/>
           <p:cNvSpPr txBox="1"/>
           <p:nvPr/>
         </p:nvSpPr>
@@ -8605,7 +8074,7 @@
       </p:sp>
       <p:sp>
         <p:nvSpPr>
-          <p:cNvPr id="18" name="Shape 16"/>
+          <p:cNvPr id="16" name="Shape 14"/>
           <p:cNvSpPr/>
           <p:nvPr/>
         </p:nvSpPr>
@@ -8625,7 +8094,7 @@
       </p:sp>
       <p:sp>
         <p:nvSpPr>
-          <p:cNvPr id="19" name="Text 17"/>
+          <p:cNvPr id="17" name="Text 15"/>
           <p:cNvSpPr txBox="1"/>
           <p:nvPr/>
         </p:nvSpPr>
@@ -8840,45 +8309,6 @@
         </p:nvSpPr>
         <p:spPr>
           <a:xfrm>
-            <a:off x="713232" y="1371600"/>
-            <a:ext cx="5943600" cy="310896"/>
-          </a:xfrm>
-          <a:prstGeom prst="rect">
-            <a:avLst/>
-          </a:prstGeom>
-          <a:noFill/>
-          <a:ln/>
-        </p:spPr>
-        <p:txBody>
-          <a:bodyPr wrap="square" lIns="0" tIns="0" rIns="0" bIns="0" rtlCol="0" anchor="ctr"/>
-          <a:lstStyle/>
-          <a:p>
-            <a:pPr indent="0" marL="0">
-              <a:buNone/>
-            </a:pPr>
-            <a:r>
-              <a:rPr lang="en-US" sz="1400" b="1" spc="100" kern="0" dirty="0">
-                <a:solidFill>
-                  <a:srgbClr val="0B2C4A"/>
-                </a:solidFill>
-                <a:latin typeface="Inter" pitchFamily="34" charset="0"/>
-                <a:ea typeface="Inter" pitchFamily="34" charset="-122"/>
-                <a:cs typeface="Inter" pitchFamily="34" charset="-120"/>
-              </a:rPr>
-              <a:t>WHAT WE SAID · ROUNDTABLE &amp; GM MEETINGS</a:t>
-            </a:r>
-            <a:endParaRPr lang="en-US" sz="1400" dirty="0"/>
-          </a:p>
-        </p:txBody>
-      </p:sp>
-      <p:sp>
-        <p:nvSpPr>
-          <p:cNvPr id="8" name="Text 6"/>
-          <p:cNvSpPr txBox="1"/>
-          <p:nvPr/>
-        </p:nvSpPr>
-        <p:spPr>
-          <a:xfrm>
             <a:off x="7269480" y="1371600"/>
             <a:ext cx="4297680" cy="310896"/>
           </a:xfrm>
@@ -8912,27 +8342,7 @@
       </p:sp>
       <p:sp>
         <p:nvSpPr>
-          <p:cNvPr id="9" name="Shape 7"/>
-          <p:cNvSpPr/>
-          <p:nvPr/>
-        </p:nvSpPr>
-        <p:spPr>
-          <a:xfrm>
-            <a:off x="713232" y="1737360"/>
-            <a:ext cx="5897880" cy="10973"/>
-          </a:xfrm>
-          <a:prstGeom prst="rect">
-            <a:avLst/>
-          </a:prstGeom>
-          <a:solidFill>
-            <a:srgbClr val="D9D9D9"/>
-          </a:solidFill>
-          <a:ln/>
-        </p:spPr>
-      </p:sp>
-      <p:sp>
-        <p:nvSpPr>
-          <p:cNvPr id="10" name="Shape 8"/>
+          <p:cNvPr id="8" name="Shape 6"/>
           <p:cNvSpPr/>
           <p:nvPr/>
         </p:nvSpPr>
@@ -8952,14 +8362,14 @@
       </p:sp>
       <p:sp>
         <p:nvSpPr>
-          <p:cNvPr id="11" name="Text 9"/>
-          <p:cNvSpPr txBox="1"/>
-          <p:nvPr/>
-        </p:nvSpPr>
-        <p:spPr>
-          <a:xfrm>
-            <a:off x="713232" y="1874520"/>
-            <a:ext cx="5897880" cy="3977640"/>
+          <p:cNvPr id="9" name="Text 7"/>
+          <p:cNvSpPr txBox="1"/>
+          <p:nvPr/>
+        </p:nvSpPr>
+        <p:spPr>
+          <a:xfrm>
+            <a:off x="713232" y="1417320"/>
+            <a:ext cx="5897880" cy="4434840"/>
           </a:xfrm>
           <a:prstGeom prst="rect">
             <a:avLst/>
@@ -9079,7 +8489,7 @@
       </p:sp>
       <p:sp>
         <p:nvSpPr>
-          <p:cNvPr id="12" name="Shape 10"/>
+          <p:cNvPr id="10" name="Shape 8"/>
           <p:cNvSpPr/>
           <p:nvPr/>
         </p:nvSpPr>
@@ -9099,7 +8509,7 @@
       </p:sp>
       <p:sp>
         <p:nvSpPr>
-          <p:cNvPr id="13" name="Text 11"/>
+          <p:cNvPr id="11" name="Text 9"/>
           <p:cNvSpPr txBox="1"/>
           <p:nvPr/>
         </p:nvSpPr>
@@ -9140,7 +8550,7 @@
       </p:sp>
       <p:sp>
         <p:nvSpPr>
-          <p:cNvPr id="14" name="Text 12"/>
+          <p:cNvPr id="12" name="Text 10"/>
           <p:cNvSpPr txBox="1"/>
           <p:nvPr/>
         </p:nvSpPr>
@@ -9179,7 +8589,7 @@
       </p:sp>
       <p:sp>
         <p:nvSpPr>
-          <p:cNvPr id="15" name="Shape 13"/>
+          <p:cNvPr id="13" name="Shape 11"/>
           <p:cNvSpPr/>
           <p:nvPr/>
         </p:nvSpPr>
@@ -9199,7 +8609,7 @@
       </p:sp>
       <p:sp>
         <p:nvSpPr>
-          <p:cNvPr id="16" name="Text 14"/>
+          <p:cNvPr id="14" name="Text 12"/>
           <p:cNvSpPr txBox="1"/>
           <p:nvPr/>
         </p:nvSpPr>
@@ -9240,7 +8650,7 @@
       </p:sp>
       <p:sp>
         <p:nvSpPr>
-          <p:cNvPr id="17" name="Text 15"/>
+          <p:cNvPr id="15" name="Text 13"/>
           <p:cNvSpPr txBox="1"/>
           <p:nvPr/>
         </p:nvSpPr>
@@ -9279,7 +8689,7 @@
       </p:sp>
       <p:sp>
         <p:nvSpPr>
-          <p:cNvPr id="18" name="Shape 16"/>
+          <p:cNvPr id="16" name="Shape 14"/>
           <p:cNvSpPr/>
           <p:nvPr/>
         </p:nvSpPr>
@@ -9299,7 +8709,7 @@
       </p:sp>
       <p:sp>
         <p:nvSpPr>
-          <p:cNvPr id="19" name="Text 17"/>
+          <p:cNvPr id="17" name="Text 15"/>
           <p:cNvSpPr txBox="1"/>
           <p:nvPr/>
         </p:nvSpPr>
@@ -9340,7 +8750,7 @@
       </p:sp>
       <p:sp>
         <p:nvSpPr>
-          <p:cNvPr id="20" name="Text 18"/>
+          <p:cNvPr id="18" name="Text 16"/>
           <p:cNvSpPr txBox="1"/>
           <p:nvPr/>
         </p:nvSpPr>
@@ -9379,7 +8789,7 @@
       </p:sp>
       <p:sp>
         <p:nvSpPr>
-          <p:cNvPr id="21" name="Shape 19"/>
+          <p:cNvPr id="19" name="Shape 17"/>
           <p:cNvSpPr/>
           <p:nvPr/>
         </p:nvSpPr>
@@ -9399,7 +8809,7 @@
       </p:sp>
       <p:sp>
         <p:nvSpPr>
-          <p:cNvPr id="22" name="Text 20"/>
+          <p:cNvPr id="20" name="Text 18"/>
           <p:cNvSpPr txBox="1"/>
           <p:nvPr/>
         </p:nvSpPr>
@@ -9614,45 +9024,6 @@
         </p:nvSpPr>
         <p:spPr>
           <a:xfrm>
-            <a:off x="713232" y="1371600"/>
-            <a:ext cx="5943600" cy="310896"/>
-          </a:xfrm>
-          <a:prstGeom prst="rect">
-            <a:avLst/>
-          </a:prstGeom>
-          <a:noFill/>
-          <a:ln/>
-        </p:spPr>
-        <p:txBody>
-          <a:bodyPr wrap="square" lIns="0" tIns="0" rIns="0" bIns="0" rtlCol="0" anchor="ctr"/>
-          <a:lstStyle/>
-          <a:p>
-            <a:pPr indent="0" marL="0">
-              <a:buNone/>
-            </a:pPr>
-            <a:r>
-              <a:rPr lang="en-US" sz="1400" b="1" spc="100" kern="0" dirty="0">
-                <a:solidFill>
-                  <a:srgbClr val="0B2C4A"/>
-                </a:solidFill>
-                <a:latin typeface="Inter" pitchFamily="34" charset="0"/>
-                <a:ea typeface="Inter" pitchFamily="34" charset="-122"/>
-                <a:cs typeface="Inter" pitchFamily="34" charset="-120"/>
-              </a:rPr>
-              <a:t>WHAT WE SAID · ROUNDTABLE 2024</a:t>
-            </a:r>
-            <a:endParaRPr lang="en-US" sz="1400" dirty="0"/>
-          </a:p>
-        </p:txBody>
-      </p:sp>
-      <p:sp>
-        <p:nvSpPr>
-          <p:cNvPr id="8" name="Text 6"/>
-          <p:cNvSpPr txBox="1"/>
-          <p:nvPr/>
-        </p:nvSpPr>
-        <p:spPr>
-          <a:xfrm>
             <a:off x="7269480" y="1371600"/>
             <a:ext cx="4297680" cy="310896"/>
           </a:xfrm>
@@ -9686,27 +9057,7 @@
       </p:sp>
       <p:sp>
         <p:nvSpPr>
-          <p:cNvPr id="9" name="Shape 7"/>
-          <p:cNvSpPr/>
-          <p:nvPr/>
-        </p:nvSpPr>
-        <p:spPr>
-          <a:xfrm>
-            <a:off x="713232" y="1737360"/>
-            <a:ext cx="5897880" cy="10973"/>
-          </a:xfrm>
-          <a:prstGeom prst="rect">
-            <a:avLst/>
-          </a:prstGeom>
-          <a:solidFill>
-            <a:srgbClr val="D9D9D9"/>
-          </a:solidFill>
-          <a:ln/>
-        </p:spPr>
-      </p:sp>
-      <p:sp>
-        <p:nvSpPr>
-          <p:cNvPr id="10" name="Shape 8"/>
+          <p:cNvPr id="8" name="Shape 6"/>
           <p:cNvSpPr/>
           <p:nvPr/>
         </p:nvSpPr>
@@ -9726,14 +9077,14 @@
       </p:sp>
       <p:sp>
         <p:nvSpPr>
-          <p:cNvPr id="11" name="Text 9"/>
-          <p:cNvSpPr txBox="1"/>
-          <p:nvPr/>
-        </p:nvSpPr>
-        <p:spPr>
-          <a:xfrm>
-            <a:off x="713232" y="1874520"/>
-            <a:ext cx="5897880" cy="3977640"/>
+          <p:cNvPr id="9" name="Text 7"/>
+          <p:cNvSpPr txBox="1"/>
+          <p:nvPr/>
+        </p:nvSpPr>
+        <p:spPr>
+          <a:xfrm>
+            <a:off x="713232" y="1417320"/>
+            <a:ext cx="5897880" cy="4434840"/>
           </a:xfrm>
           <a:prstGeom prst="rect">
             <a:avLst/>
@@ -9832,7 +9183,7 @@
       </p:sp>
       <p:sp>
         <p:nvSpPr>
-          <p:cNvPr id="12" name="Shape 10"/>
+          <p:cNvPr id="10" name="Shape 8"/>
           <p:cNvSpPr/>
           <p:nvPr/>
         </p:nvSpPr>
@@ -9852,7 +9203,7 @@
       </p:sp>
       <p:sp>
         <p:nvSpPr>
-          <p:cNvPr id="13" name="Text 11"/>
+          <p:cNvPr id="11" name="Text 9"/>
           <p:cNvSpPr txBox="1"/>
           <p:nvPr/>
         </p:nvSpPr>
@@ -9893,7 +9244,7 @@
       </p:sp>
       <p:sp>
         <p:nvSpPr>
-          <p:cNvPr id="14" name="Text 12"/>
+          <p:cNvPr id="12" name="Text 10"/>
           <p:cNvSpPr txBox="1"/>
           <p:nvPr/>
         </p:nvSpPr>
@@ -9932,7 +9283,7 @@
       </p:sp>
       <p:sp>
         <p:nvSpPr>
-          <p:cNvPr id="15" name="Shape 13"/>
+          <p:cNvPr id="13" name="Shape 11"/>
           <p:cNvSpPr/>
           <p:nvPr/>
         </p:nvSpPr>
@@ -9952,7 +9303,7 @@
       </p:sp>
       <p:sp>
         <p:nvSpPr>
-          <p:cNvPr id="16" name="Text 14"/>
+          <p:cNvPr id="14" name="Text 12"/>
           <p:cNvSpPr txBox="1"/>
           <p:nvPr/>
         </p:nvSpPr>
@@ -9993,7 +9344,7 @@
       </p:sp>
       <p:sp>
         <p:nvSpPr>
-          <p:cNvPr id="17" name="Text 15"/>
+          <p:cNvPr id="15" name="Text 13"/>
           <p:cNvSpPr txBox="1"/>
           <p:nvPr/>
         </p:nvSpPr>
@@ -10032,7 +9383,7 @@
       </p:sp>
       <p:sp>
         <p:nvSpPr>
-          <p:cNvPr id="18" name="Shape 16"/>
+          <p:cNvPr id="16" name="Shape 14"/>
           <p:cNvSpPr/>
           <p:nvPr/>
         </p:nvSpPr>
@@ -10052,7 +9403,7 @@
       </p:sp>
       <p:sp>
         <p:nvSpPr>
-          <p:cNvPr id="19" name="Text 17"/>
+          <p:cNvPr id="17" name="Text 15"/>
           <p:cNvSpPr txBox="1"/>
           <p:nvPr/>
         </p:nvSpPr>
@@ -10267,45 +9618,6 @@
         </p:nvSpPr>
         <p:spPr>
           <a:xfrm>
-            <a:off x="713232" y="1371600"/>
-            <a:ext cx="5943600" cy="310896"/>
-          </a:xfrm>
-          <a:prstGeom prst="rect">
-            <a:avLst/>
-          </a:prstGeom>
-          <a:noFill/>
-          <a:ln/>
-        </p:spPr>
-        <p:txBody>
-          <a:bodyPr wrap="square" lIns="0" tIns="0" rIns="0" bIns="0" rtlCol="0" anchor="ctr"/>
-          <a:lstStyle/>
-          <a:p>
-            <a:pPr indent="0" marL="0">
-              <a:buNone/>
-            </a:pPr>
-            <a:r>
-              <a:rPr lang="en-US" sz="1400" b="1" spc="100" kern="0" dirty="0">
-                <a:solidFill>
-                  <a:srgbClr val="0B2C4A"/>
-                </a:solidFill>
-                <a:latin typeface="Inter" pitchFamily="34" charset="0"/>
-                <a:ea typeface="Inter" pitchFamily="34" charset="-122"/>
-                <a:cs typeface="Inter" pitchFamily="34" charset="-120"/>
-              </a:rPr>
-              <a:t>WHAT WE SAID · GM MEETINGS JAN &amp; MAY 2026</a:t>
-            </a:r>
-            <a:endParaRPr lang="en-US" sz="1400" dirty="0"/>
-          </a:p>
-        </p:txBody>
-      </p:sp>
-      <p:sp>
-        <p:nvSpPr>
-          <p:cNvPr id="8" name="Text 6"/>
-          <p:cNvSpPr txBox="1"/>
-          <p:nvPr/>
-        </p:nvSpPr>
-        <p:spPr>
-          <a:xfrm>
             <a:off x="7269480" y="1371600"/>
             <a:ext cx="4297680" cy="310896"/>
           </a:xfrm>
@@ -10339,27 +9651,7 @@
       </p:sp>
       <p:sp>
         <p:nvSpPr>
-          <p:cNvPr id="9" name="Shape 7"/>
-          <p:cNvSpPr/>
-          <p:nvPr/>
-        </p:nvSpPr>
-        <p:spPr>
-          <a:xfrm>
-            <a:off x="713232" y="1737360"/>
-            <a:ext cx="5897880" cy="10973"/>
-          </a:xfrm>
-          <a:prstGeom prst="rect">
-            <a:avLst/>
-          </a:prstGeom>
-          <a:solidFill>
-            <a:srgbClr val="D9D9D9"/>
-          </a:solidFill>
-          <a:ln/>
-        </p:spPr>
-      </p:sp>
-      <p:sp>
-        <p:nvSpPr>
-          <p:cNvPr id="10" name="Shape 8"/>
+          <p:cNvPr id="8" name="Shape 6"/>
           <p:cNvSpPr/>
           <p:nvPr/>
         </p:nvSpPr>
@@ -10379,14 +9671,14 @@
       </p:sp>
       <p:sp>
         <p:nvSpPr>
-          <p:cNvPr id="11" name="Text 9"/>
-          <p:cNvSpPr txBox="1"/>
-          <p:nvPr/>
-        </p:nvSpPr>
-        <p:spPr>
-          <a:xfrm>
-            <a:off x="713232" y="1874520"/>
-            <a:ext cx="5897880" cy="3977640"/>
+          <p:cNvPr id="9" name="Text 7"/>
+          <p:cNvSpPr txBox="1"/>
+          <p:nvPr/>
+        </p:nvSpPr>
+        <p:spPr>
+          <a:xfrm>
+            <a:off x="713232" y="1417320"/>
+            <a:ext cx="5897880" cy="4434840"/>
           </a:xfrm>
           <a:prstGeom prst="rect">
             <a:avLst/>
@@ -10506,7 +9798,7 @@
       </p:sp>
       <p:sp>
         <p:nvSpPr>
-          <p:cNvPr id="12" name="Shape 10"/>
+          <p:cNvPr id="10" name="Shape 8"/>
           <p:cNvSpPr/>
           <p:nvPr/>
         </p:nvSpPr>
@@ -10526,7 +9818,7 @@
       </p:sp>
       <p:sp>
         <p:nvSpPr>
-          <p:cNvPr id="13" name="Text 11"/>
+          <p:cNvPr id="11" name="Text 9"/>
           <p:cNvSpPr txBox="1"/>
           <p:nvPr/>
         </p:nvSpPr>
@@ -10567,7 +9859,7 @@
       </p:sp>
       <p:sp>
         <p:nvSpPr>
-          <p:cNvPr id="14" name="Text 12"/>
+          <p:cNvPr id="12" name="Text 10"/>
           <p:cNvSpPr txBox="1"/>
           <p:nvPr/>
         </p:nvSpPr>
@@ -10606,7 +9898,7 @@
       </p:sp>
       <p:sp>
         <p:nvSpPr>
-          <p:cNvPr id="15" name="Shape 13"/>
+          <p:cNvPr id="13" name="Shape 11"/>
           <p:cNvSpPr/>
           <p:nvPr/>
         </p:nvSpPr>
@@ -10626,7 +9918,7 @@
       </p:sp>
       <p:sp>
         <p:nvSpPr>
-          <p:cNvPr id="16" name="Text 14"/>
+          <p:cNvPr id="14" name="Text 12"/>
           <p:cNvSpPr txBox="1"/>
           <p:nvPr/>
         </p:nvSpPr>
@@ -10667,7 +9959,7 @@
       </p:sp>
       <p:sp>
         <p:nvSpPr>
-          <p:cNvPr id="17" name="Text 15"/>
+          <p:cNvPr id="15" name="Text 13"/>
           <p:cNvSpPr txBox="1"/>
           <p:nvPr/>
         </p:nvSpPr>
@@ -10706,7 +9998,7 @@
       </p:sp>
       <p:sp>
         <p:nvSpPr>
-          <p:cNvPr id="18" name="Shape 16"/>
+          <p:cNvPr id="16" name="Shape 14"/>
           <p:cNvSpPr/>
           <p:nvPr/>
         </p:nvSpPr>
@@ -10726,7 +10018,7 @@
       </p:sp>
       <p:sp>
         <p:nvSpPr>
-          <p:cNvPr id="19" name="Text 17"/>
+          <p:cNvPr id="17" name="Text 15"/>
           <p:cNvSpPr txBox="1"/>
           <p:nvPr/>
         </p:nvSpPr>
@@ -10941,45 +10233,6 @@
         </p:nvSpPr>
         <p:spPr>
           <a:xfrm>
-            <a:off x="713232" y="1371600"/>
-            <a:ext cx="5943600" cy="310896"/>
-          </a:xfrm>
-          <a:prstGeom prst="rect">
-            <a:avLst/>
-          </a:prstGeom>
-          <a:noFill/>
-          <a:ln/>
-        </p:spPr>
-        <p:txBody>
-          <a:bodyPr wrap="square" lIns="0" tIns="0" rIns="0" bIns="0" rtlCol="0" anchor="ctr"/>
-          <a:lstStyle/>
-          <a:p>
-            <a:pPr indent="0" marL="0">
-              <a:buNone/>
-            </a:pPr>
-            <a:r>
-              <a:rPr lang="en-US" sz="1400" b="1" spc="100" kern="0" dirty="0">
-                <a:solidFill>
-                  <a:srgbClr val="0B2C4A"/>
-                </a:solidFill>
-                <a:latin typeface="Inter" pitchFamily="34" charset="0"/>
-                <a:ea typeface="Inter" pitchFamily="34" charset="-122"/>
-                <a:cs typeface="Inter" pitchFamily="34" charset="-120"/>
-              </a:rPr>
-              <a:t>WHAT WE SAID · ROUNDTABLE &amp; GM MEETINGS</a:t>
-            </a:r>
-            <a:endParaRPr lang="en-US" sz="1400" dirty="0"/>
-          </a:p>
-        </p:txBody>
-      </p:sp>
-      <p:sp>
-        <p:nvSpPr>
-          <p:cNvPr id="8" name="Text 6"/>
-          <p:cNvSpPr txBox="1"/>
-          <p:nvPr/>
-        </p:nvSpPr>
-        <p:spPr>
-          <a:xfrm>
             <a:off x="7269480" y="1371600"/>
             <a:ext cx="4297680" cy="310896"/>
           </a:xfrm>
@@ -11013,27 +10266,7 @@
       </p:sp>
       <p:sp>
         <p:nvSpPr>
-          <p:cNvPr id="9" name="Shape 7"/>
-          <p:cNvSpPr/>
-          <p:nvPr/>
-        </p:nvSpPr>
-        <p:spPr>
-          <a:xfrm>
-            <a:off x="713232" y="1737360"/>
-            <a:ext cx="5897880" cy="10973"/>
-          </a:xfrm>
-          <a:prstGeom prst="rect">
-            <a:avLst/>
-          </a:prstGeom>
-          <a:solidFill>
-            <a:srgbClr val="D9D9D9"/>
-          </a:solidFill>
-          <a:ln/>
-        </p:spPr>
-      </p:sp>
-      <p:sp>
-        <p:nvSpPr>
-          <p:cNvPr id="10" name="Shape 8"/>
+          <p:cNvPr id="8" name="Shape 6"/>
           <p:cNvSpPr/>
           <p:nvPr/>
         </p:nvSpPr>
@@ -11053,14 +10286,14 @@
       </p:sp>
       <p:sp>
         <p:nvSpPr>
-          <p:cNvPr id="11" name="Text 9"/>
-          <p:cNvSpPr txBox="1"/>
-          <p:nvPr/>
-        </p:nvSpPr>
-        <p:spPr>
-          <a:xfrm>
-            <a:off x="713232" y="1874520"/>
-            <a:ext cx="5897880" cy="3977640"/>
+          <p:cNvPr id="9" name="Text 7"/>
+          <p:cNvSpPr txBox="1"/>
+          <p:nvPr/>
+        </p:nvSpPr>
+        <p:spPr>
+          <a:xfrm>
+            <a:off x="713232" y="1417320"/>
+            <a:ext cx="5897880" cy="4434840"/>
           </a:xfrm>
           <a:prstGeom prst="rect">
             <a:avLst/>
@@ -11159,7 +10392,7 @@
       </p:sp>
       <p:sp>
         <p:nvSpPr>
-          <p:cNvPr id="12" name="Shape 10"/>
+          <p:cNvPr id="10" name="Shape 8"/>
           <p:cNvSpPr/>
           <p:nvPr/>
         </p:nvSpPr>
@@ -11179,7 +10412,7 @@
       </p:sp>
       <p:sp>
         <p:nvSpPr>
-          <p:cNvPr id="13" name="Text 11"/>
+          <p:cNvPr id="11" name="Text 9"/>
           <p:cNvSpPr txBox="1"/>
           <p:nvPr/>
         </p:nvSpPr>
@@ -11220,7 +10453,7 @@
       </p:sp>
       <p:sp>
         <p:nvSpPr>
-          <p:cNvPr id="14" name="Text 12"/>
+          <p:cNvPr id="12" name="Text 10"/>
           <p:cNvSpPr txBox="1"/>
           <p:nvPr/>
         </p:nvSpPr>
@@ -11259,7 +10492,7 @@
       </p:sp>
       <p:sp>
         <p:nvSpPr>
-          <p:cNvPr id="15" name="Shape 13"/>
+          <p:cNvPr id="13" name="Shape 11"/>
           <p:cNvSpPr/>
           <p:nvPr/>
         </p:nvSpPr>
@@ -11279,7 +10512,7 @@
       </p:sp>
       <p:sp>
         <p:nvSpPr>
-          <p:cNvPr id="16" name="Text 14"/>
+          <p:cNvPr id="14" name="Text 12"/>
           <p:cNvSpPr txBox="1"/>
           <p:nvPr/>
         </p:nvSpPr>
@@ -11320,7 +10553,7 @@
       </p:sp>
       <p:sp>
         <p:nvSpPr>
-          <p:cNvPr id="17" name="Text 15"/>
+          <p:cNvPr id="15" name="Text 13"/>
           <p:cNvSpPr txBox="1"/>
           <p:nvPr/>
         </p:nvSpPr>
@@ -11359,7 +10592,7 @@
       </p:sp>
       <p:sp>
         <p:nvSpPr>
-          <p:cNvPr id="18" name="Shape 16"/>
+          <p:cNvPr id="16" name="Shape 14"/>
           <p:cNvSpPr/>
           <p:nvPr/>
         </p:nvSpPr>
@@ -11379,7 +10612,7 @@
       </p:sp>
       <p:sp>
         <p:nvSpPr>
-          <p:cNvPr id="19" name="Text 17"/>
+          <p:cNvPr id="17" name="Text 15"/>
           <p:cNvSpPr txBox="1"/>
           <p:nvPr/>
         </p:nvSpPr>
@@ -11594,45 +10827,6 @@
         </p:nvSpPr>
         <p:spPr>
           <a:xfrm>
-            <a:off x="713232" y="1371600"/>
-            <a:ext cx="5943600" cy="310896"/>
-          </a:xfrm>
-          <a:prstGeom prst="rect">
-            <a:avLst/>
-          </a:prstGeom>
-          <a:noFill/>
-          <a:ln/>
-        </p:spPr>
-        <p:txBody>
-          <a:bodyPr wrap="square" lIns="0" tIns="0" rIns="0" bIns="0" rtlCol="0" anchor="ctr"/>
-          <a:lstStyle/>
-          <a:p>
-            <a:pPr indent="0" marL="0">
-              <a:buNone/>
-            </a:pPr>
-            <a:r>
-              <a:rPr lang="en-US" sz="1400" b="1" spc="100" kern="0" dirty="0">
-                <a:solidFill>
-                  <a:srgbClr val="0B2C4A"/>
-                </a:solidFill>
-                <a:latin typeface="Inter" pitchFamily="34" charset="0"/>
-                <a:ea typeface="Inter" pitchFamily="34" charset="-122"/>
-                <a:cs typeface="Inter" pitchFamily="34" charset="-120"/>
-              </a:rPr>
-              <a:t>WHAT WE SAID · ROUNDTABLE &amp; GM MEETINGS</a:t>
-            </a:r>
-            <a:endParaRPr lang="en-US" sz="1400" dirty="0"/>
-          </a:p>
-        </p:txBody>
-      </p:sp>
-      <p:sp>
-        <p:nvSpPr>
-          <p:cNvPr id="8" name="Text 6"/>
-          <p:cNvSpPr txBox="1"/>
-          <p:nvPr/>
-        </p:nvSpPr>
-        <p:spPr>
-          <a:xfrm>
             <a:off x="7269480" y="1371600"/>
             <a:ext cx="4297680" cy="310896"/>
           </a:xfrm>
@@ -11666,27 +10860,7 @@
       </p:sp>
       <p:sp>
         <p:nvSpPr>
-          <p:cNvPr id="9" name="Shape 7"/>
-          <p:cNvSpPr/>
-          <p:nvPr/>
-        </p:nvSpPr>
-        <p:spPr>
-          <a:xfrm>
-            <a:off x="713232" y="1737360"/>
-            <a:ext cx="5897880" cy="10973"/>
-          </a:xfrm>
-          <a:prstGeom prst="rect">
-            <a:avLst/>
-          </a:prstGeom>
-          <a:solidFill>
-            <a:srgbClr val="D9D9D9"/>
-          </a:solidFill>
-          <a:ln/>
-        </p:spPr>
-      </p:sp>
-      <p:sp>
-        <p:nvSpPr>
-          <p:cNvPr id="10" name="Shape 8"/>
+          <p:cNvPr id="8" name="Shape 6"/>
           <p:cNvSpPr/>
           <p:nvPr/>
         </p:nvSpPr>
@@ -11706,14 +10880,14 @@
       </p:sp>
       <p:sp>
         <p:nvSpPr>
-          <p:cNvPr id="11" name="Text 9"/>
-          <p:cNvSpPr txBox="1"/>
-          <p:nvPr/>
-        </p:nvSpPr>
-        <p:spPr>
-          <a:xfrm>
-            <a:off x="713232" y="1874520"/>
-            <a:ext cx="5897880" cy="3977640"/>
+          <p:cNvPr id="9" name="Text 7"/>
+          <p:cNvSpPr txBox="1"/>
+          <p:nvPr/>
+        </p:nvSpPr>
+        <p:spPr>
+          <a:xfrm>
+            <a:off x="713232" y="1417320"/>
+            <a:ext cx="5897880" cy="4434840"/>
           </a:xfrm>
           <a:prstGeom prst="rect">
             <a:avLst/>
@@ -11854,7 +11028,7 @@
       </p:sp>
       <p:sp>
         <p:nvSpPr>
-          <p:cNvPr id="12" name="Shape 10"/>
+          <p:cNvPr id="10" name="Shape 8"/>
           <p:cNvSpPr/>
           <p:nvPr/>
         </p:nvSpPr>
@@ -11874,7 +11048,7 @@
       </p:sp>
       <p:sp>
         <p:nvSpPr>
-          <p:cNvPr id="13" name="Text 11"/>
+          <p:cNvPr id="11" name="Text 9"/>
           <p:cNvSpPr txBox="1"/>
           <p:nvPr/>
         </p:nvSpPr>
@@ -11915,7 +11089,7 @@
       </p:sp>
       <p:sp>
         <p:nvSpPr>
-          <p:cNvPr id="14" name="Text 12"/>
+          <p:cNvPr id="12" name="Text 10"/>
           <p:cNvSpPr txBox="1"/>
           <p:nvPr/>
         </p:nvSpPr>
@@ -11954,7 +11128,7 @@
       </p:sp>
       <p:sp>
         <p:nvSpPr>
-          <p:cNvPr id="15" name="Shape 13"/>
+          <p:cNvPr id="13" name="Shape 11"/>
           <p:cNvSpPr/>
           <p:nvPr/>
         </p:nvSpPr>
@@ -11974,7 +11148,7 @@
       </p:sp>
       <p:sp>
         <p:nvSpPr>
-          <p:cNvPr id="16" name="Text 14"/>
+          <p:cNvPr id="14" name="Text 12"/>
           <p:cNvSpPr txBox="1"/>
           <p:nvPr/>
         </p:nvSpPr>
@@ -12015,7 +11189,7 @@
       </p:sp>
       <p:sp>
         <p:nvSpPr>
-          <p:cNvPr id="17" name="Text 15"/>
+          <p:cNvPr id="15" name="Text 13"/>
           <p:cNvSpPr txBox="1"/>
           <p:nvPr/>
         </p:nvSpPr>
@@ -12054,7 +11228,7 @@
       </p:sp>
       <p:sp>
         <p:nvSpPr>
-          <p:cNvPr id="18" name="Shape 16"/>
+          <p:cNvPr id="16" name="Shape 14"/>
           <p:cNvSpPr/>
           <p:nvPr/>
         </p:nvSpPr>
@@ -12074,7 +11248,7 @@
       </p:sp>
       <p:sp>
         <p:nvSpPr>
-          <p:cNvPr id="19" name="Text 17"/>
+          <p:cNvPr id="17" name="Text 15"/>
           <p:cNvSpPr txBox="1"/>
           <p:nvPr/>
         </p:nvSpPr>
@@ -12115,7 +11289,7 @@
       </p:sp>
       <p:sp>
         <p:nvSpPr>
-          <p:cNvPr id="20" name="Text 18"/>
+          <p:cNvPr id="18" name="Text 16"/>
           <p:cNvSpPr txBox="1"/>
           <p:nvPr/>
         </p:nvSpPr>
@@ -12154,7 +11328,7 @@
       </p:sp>
       <p:sp>
         <p:nvSpPr>
-          <p:cNvPr id="21" name="Shape 19"/>
+          <p:cNvPr id="19" name="Shape 17"/>
           <p:cNvSpPr/>
           <p:nvPr/>
         </p:nvSpPr>
@@ -12174,7 +11348,7 @@
       </p:sp>
       <p:sp>
         <p:nvSpPr>
-          <p:cNvPr id="22" name="Text 20"/>
+          <p:cNvPr id="20" name="Text 18"/>
           <p:cNvSpPr txBox="1"/>
           <p:nvPr/>
         </p:nvSpPr>

--- a/day2-deck/decks/Talking Points - Day 2.pptx
+++ b/day2-deck/decks/Talking Points - Day 2.pptx
@@ -7130,7 +7130,7 @@
                 <a:ea typeface="Inter" pitchFamily="34" charset="-122"/>
                 <a:cs typeface="Inter" pitchFamily="34" charset="-120"/>
               </a:rPr>
-              <a:t>Total money in beats ELR, gross %, hours, anything else. It's what we sell.</a:t>
+              <a:t>Total dollars per RO matters more than any single measure. It's what we sell.</a:t>
             </a:r>
             <a:endParaRPr lang="en-US" sz="1800" dirty="0"/>
           </a:p>

--- a/day2-deck/decks/Talking Points - Day 2.pptx
+++ b/day2-deck/decks/Talking Points - Day 2.pptx
@@ -874,7 +874,7 @@
               <a:rPr lang="en-US" dirty="0"/>
               <a:t>Source: Talking points: Service Manager Roundtable (Nov 15, 2024) and GM meeting decks (Jan and May 2026). Data: Qlik (Profit &amp; Loss, Closed Repair Orders, Productivity), Jan-Sep 2026 vs 2025, same-store, 33 stores, INEOS excluded.PLACE: Technician Proficiency section, after the section break and before the store proficiency ranker.
 Said: Roundtable slide 22 (Technicians &amp; Stalls); Jan GM slide 52 / May GM slide 16 (MPI Completion and Tech Efficiency).
-Now: proficiency slides (ADP paid hours + Qlik sold hours, Dec 25-Oct 9, with the foreman 30%, tech 10%, role-change and keying-error rules).</a:t>
+Now: proficiency slides (ADP worked hours + Qlik sold hours, Dec 25-Oct 9, with the foreman 30%, tech 10%, role-change and keying-error rules).</a:t>
             </a:r>
             <a:endParaRPr lang="en-US" dirty="0"/>
           </a:p>
@@ -5127,7 +5127,7 @@
                 <a:ea typeface="Inter" pitchFamily="34" charset="-122"/>
                 <a:cs typeface="Inter" pitchFamily="34" charset="-120"/>
               </a:rPr>
-              <a:t>Group technician proficiency (sold hours / paid hours). 20 of 33 stores at or above 85%.</a:t>
+              <a:t>Group technician proficiency (sold hours / worked hours). 20 of 33 stores at or above 85%.</a:t>
             </a:r>
             <a:endParaRPr lang="en-US" sz="1400" dirty="0"/>
           </a:p>

--- a/day2-deck/decks/Talking Points - Day 2.pptx
+++ b/day2-deck/decks/Talking Points - Day 2.pptx
@@ -516,7 +516,8 @@
             <a:r>
               <a:rPr lang="en-US" dirty="0"/>
               <a:t>Source: Talking points: Service Manager Roundtable (Nov 15, 2024) and GM meeting decks (Jan and May 2026). Data: Qlik (Profit &amp; Loss, Closed Repair Orders, Productivity), Jan-Sep 2026 vs 2025, same-store, 33 stores, INEOS excluded.PLACE: right after the cover, before the Gross section.
-Said: Roundtable slides 2, 5, 7, 6 (objective; philosophy &amp; culture; 'you get what you tolerate'; collaboration). Ask adapted from Roundtable slide 24 closing questions.</a:t>
+Said: Roundtable slides 2, 5, 7, 6 (objective; philosophy &amp; culture; 'you get what you tolerate'; collaboration). Ask adapted from Roundtable slide 24 closing questions.
+Added Oct 22 (Noah): profit-generating activities and incremental dollars; working on the business versus in it.</a:t>
             </a:r>
             <a:endParaRPr lang="en-US" dirty="0"/>
           </a:p>
@@ -2275,7 +2276,7 @@
               <a:buChar char="•"/>
             </a:pPr>
             <a:r>
-              <a:rPr lang="en-US" sz="1800" dirty="0">
+              <a:rPr lang="en-US" sz="1600" dirty="0">
                 <a:solidFill>
                   <a:srgbClr val="1A1A1A"/>
                 </a:solidFill>
@@ -2285,7 +2286,7 @@
               </a:rPr>
               <a:t>Foster collaboration, introduce ideas that drive operational excellence, and set a clear path to exceptional service performance</a:t>
             </a:r>
-            <a:endParaRPr lang="en-US" sz="1800" dirty="0"/>
+            <a:endParaRPr lang="en-US" sz="1600" dirty="0"/>
           </a:p>
           <a:p>
             <a:pPr marL="228600" indent="-228600">
@@ -2296,17 +2297,17 @@
               <a:buChar char="•"/>
             </a:pPr>
             <a:r>
-              <a:rPr lang="en-US" sz="1800" dirty="0">
-                <a:solidFill>
-                  <a:srgbClr val="1A1A1A"/>
-                </a:solidFill>
-                <a:latin typeface="Inter" pitchFamily="34" charset="0"/>
-                <a:ea typeface="Inter" pitchFamily="34" charset="-122"/>
-                <a:cs typeface="Inter" pitchFamily="34" charset="-120"/>
-              </a:rPr>
-              <a:t>No risk of judgement: your success is our success</a:t>
-            </a:r>
-            <a:endParaRPr lang="en-US" sz="1800" dirty="0"/>
+              <a:rPr lang="en-US" sz="1600" dirty="0">
+                <a:solidFill>
+                  <a:srgbClr val="1A1A1A"/>
+                </a:solidFill>
+                <a:latin typeface="Inter" pitchFamily="34" charset="0"/>
+                <a:ea typeface="Inter" pitchFamily="34" charset="-122"/>
+                <a:cs typeface="Inter" pitchFamily="34" charset="-120"/>
+              </a:rPr>
+              <a:t>Focus on profit-generating activities: the work that brings in incremental dollars, not just the work that fills the day</a:t>
+            </a:r>
+            <a:endParaRPr lang="en-US" sz="1600" dirty="0"/>
           </a:p>
           <a:p>
             <a:pPr marL="228600" indent="-228600">
@@ -2317,17 +2318,17 @@
               <a:buChar char="•"/>
             </a:pPr>
             <a:r>
-              <a:rPr lang="en-US" sz="1800" dirty="0">
-                <a:solidFill>
-                  <a:srgbClr val="1A1A1A"/>
-                </a:solidFill>
-                <a:latin typeface="Inter" pitchFamily="34" charset="0"/>
-                <a:ea typeface="Inter" pitchFamily="34" charset="-122"/>
-                <a:cs typeface="Inter" pitchFamily="34" charset="-120"/>
-              </a:rPr>
-              <a:t>Customer first, company second, team third</a:t>
-            </a:r>
-            <a:endParaRPr lang="en-US" sz="1800" dirty="0"/>
+              <a:rPr lang="en-US" sz="1600" dirty="0">
+                <a:solidFill>
+                  <a:srgbClr val="1A1A1A"/>
+                </a:solidFill>
+                <a:latin typeface="Inter" pitchFamily="34" charset="0"/>
+                <a:ea typeface="Inter" pitchFamily="34" charset="-122"/>
+                <a:cs typeface="Inter" pitchFamily="34" charset="-120"/>
+              </a:rPr>
+              <a:t>Work on the business, not just in it: step out of the daily fires long enough to fix the process behind them</a:t>
+            </a:r>
+            <a:endParaRPr lang="en-US" sz="1600" dirty="0"/>
           </a:p>
           <a:p>
             <a:pPr marL="228600" indent="-228600">
@@ -2338,17 +2339,17 @@
               <a:buChar char="•"/>
             </a:pPr>
             <a:r>
-              <a:rPr lang="en-US" sz="1800" dirty="0">
-                <a:solidFill>
-                  <a:srgbClr val="1A1A1A"/>
-                </a:solidFill>
-                <a:latin typeface="Inter" pitchFamily="34" charset="0"/>
-                <a:ea typeface="Inter" pitchFamily="34" charset="-122"/>
-                <a:cs typeface="Inter" pitchFamily="34" charset="-120"/>
-              </a:rPr>
-              <a:t>You get what you tolerate</a:t>
-            </a:r>
-            <a:endParaRPr lang="en-US" sz="1800" dirty="0"/>
+              <a:rPr lang="en-US" sz="1600" dirty="0">
+                <a:solidFill>
+                  <a:srgbClr val="1A1A1A"/>
+                </a:solidFill>
+                <a:latin typeface="Inter" pitchFamily="34" charset="0"/>
+                <a:ea typeface="Inter" pitchFamily="34" charset="-122"/>
+                <a:cs typeface="Inter" pitchFamily="34" charset="-120"/>
+              </a:rPr>
+              <a:t>No risk of judgement: your success is our success</a:t>
+            </a:r>
+            <a:endParaRPr lang="en-US" sz="1600" dirty="0"/>
           </a:p>
           <a:p>
             <a:pPr marL="228600" indent="-228600">
@@ -2359,7 +2360,49 @@
               <a:buChar char="•"/>
             </a:pPr>
             <a:r>
-              <a:rPr lang="en-US" sz="1800" dirty="0">
+              <a:rPr lang="en-US" sz="1600" dirty="0">
+                <a:solidFill>
+                  <a:srgbClr val="1A1A1A"/>
+                </a:solidFill>
+                <a:latin typeface="Inter" pitchFamily="34" charset="0"/>
+                <a:ea typeface="Inter" pitchFamily="34" charset="-122"/>
+                <a:cs typeface="Inter" pitchFamily="34" charset="-120"/>
+              </a:rPr>
+              <a:t>Customer first, company second, team third</a:t>
+            </a:r>
+            <a:endParaRPr lang="en-US" sz="1600" dirty="0"/>
+          </a:p>
+          <a:p>
+            <a:pPr marL="228600" indent="-228600">
+              <a:spcAft>
+                <a:spcPts val="800"/>
+              </a:spcAft>
+              <a:buSzPct val="100000"/>
+              <a:buChar char="•"/>
+            </a:pPr>
+            <a:r>
+              <a:rPr lang="en-US" sz="1600" dirty="0">
+                <a:solidFill>
+                  <a:srgbClr val="1A1A1A"/>
+                </a:solidFill>
+                <a:latin typeface="Inter" pitchFamily="34" charset="0"/>
+                <a:ea typeface="Inter" pitchFamily="34" charset="-122"/>
+                <a:cs typeface="Inter" pitchFamily="34" charset="-120"/>
+              </a:rPr>
+              <a:t>You get what you tolerate</a:t>
+            </a:r>
+            <a:endParaRPr lang="en-US" sz="1600" dirty="0"/>
+          </a:p>
+          <a:p>
+            <a:pPr marL="228600" indent="-228600">
+              <a:spcAft>
+                <a:spcPts val="800"/>
+              </a:spcAft>
+              <a:buSzPct val="100000"/>
+              <a:buChar char="•"/>
+            </a:pPr>
+            <a:r>
+              <a:rPr lang="en-US" sz="1600" dirty="0">
                 <a:solidFill>
                   <a:srgbClr val="1A1A1A"/>
                 </a:solidFill>
@@ -2369,7 +2412,7 @@
               </a:rPr>
               <a:t>Leverage the power in this room: collaboration</a:t>
             </a:r>
-            <a:endParaRPr lang="en-US" sz="1800" dirty="0"/>
+            <a:endParaRPr lang="en-US" sz="1600" dirty="0"/>
           </a:p>
         </p:txBody>
       </p:sp>

--- a/day2-deck/decks/Talking Points - Day 2.pptx
+++ b/day2-deck/decks/Talking Points - Day 2.pptx
@@ -3062,7 +3062,7 @@
                 <a:ea typeface="Inter" pitchFamily="34" charset="-122"/>
                 <a:cs typeface="Inter" pitchFamily="34" charset="-120"/>
               </a:rPr>
-              <a:t>Six audits cost $400,000</a:t>
+              <a:t>Six audits cost over $400,000</a:t>
             </a:r>
             <a:endParaRPr lang="en-US" sz="1800" dirty="0"/>
           </a:p>

--- a/day2-deck/decks/Talking Points - Day 2.pptx
+++ b/day2-deck/decks/Talking Points - Day 2.pptx
@@ -605,7 +605,7 @@
           <a:p>
             <a:r>
               <a:rPr lang="en-US" dirty="0"/>
-              <a:t>Source: Talking points: Service Manager Roundtable (Nov 15, 2024) and GM meeting decks (Jan and May 2026). Data: Qlik (Profit &amp; Loss, Closed Repair Orders, Productivity), Jan-Sep 2026 vs 2025, same-store, 33 stores, INEOS excluded.PLACE: Warranty &amp; Internal section, after the section break and before Warranty RO Count.
+              <a:t>Source: Talking points: Service Manager Roundtable (Nov 15, 2024) and GM meeting decks (Jan and May 2026). Data: Qlik (Profit &amp; Loss, Closed Repair Orders, Productivity), Jan-Sep 2026 vs 2025, same-store, 33 stores, INEOS excluded.PLACE: Warranty &amp; Internal section, after the section break, ahead of Warranty Rate Increases (Oct 22: $3,788,100 from the YTD RWR Financials vendor report replaced the warranty RO count here).
 Said: Jan GM slides 13-14 (audit chargebacks; Warranty Compliance). The Jan slide named six stores' chargebacks; kept to the $400,000 total here, in line with no store call-outs from the podium.</a:t>
             </a:r>
             <a:endParaRPr lang="en-US" dirty="0"/>
@@ -3186,7 +3186,7 @@
                 <a:ea typeface="Inter" pitchFamily="34" charset="-122"/>
                 <a:cs typeface="Inter" pitchFamily="34" charset="-120"/>
               </a:rPr>
-              <a:t>$197.17</a:t>
+              <a:t>$3,788,100</a:t>
             </a:r>
             <a:endParaRPr lang="en-US" sz="3000" dirty="0"/>
           </a:p>
@@ -3225,7 +3225,7 @@
                 <a:ea typeface="Inter" pitchFamily="34" charset="-122"/>
                 <a:cs typeface="Inter" pitchFamily="34" charset="-120"/>
               </a:rPr>
-              <a:t>Warranty ELR, up $16.93; 30 of 33 stores raised it.</a:t>
+              <a:t>Secured so far this year from approved warranty labor and parts rate increases, 19 stores (vendor YTD report).</a:t>
             </a:r>
             <a:endParaRPr lang="en-US" sz="1400" dirty="0"/>
           </a:p>
@@ -3246,7 +3246,7 @@
             <a:avLst/>
           </a:prstGeom>
           <a:solidFill>
-            <a:srgbClr val="2587C5"/>
+            <a:srgbClr val="12A566"/>
           </a:solidFill>
           <a:ln/>
         </p:spPr>
@@ -3280,13 +3280,13 @@
             <a:r>
               <a:rPr lang="en-US" sz="3000" b="1" dirty="0">
                 <a:solidFill>
-                  <a:srgbClr val="0B2C4A"/>
-                </a:solidFill>
-                <a:latin typeface="Inter" pitchFamily="34" charset="0"/>
-                <a:ea typeface="Inter" pitchFamily="34" charset="-122"/>
-                <a:cs typeface="Inter" pitchFamily="34" charset="-120"/>
-              </a:rPr>
-              <a:t>−8,873</a:t>
+                  <a:srgbClr val="0B7A4A"/>
+                </a:solidFill>
+                <a:latin typeface="Inter" pitchFamily="34" charset="0"/>
+                <a:ea typeface="Inter" pitchFamily="34" charset="-122"/>
+                <a:cs typeface="Inter" pitchFamily="34" charset="-120"/>
+              </a:rPr>
+              <a:t>$197.17</a:t>
             </a:r>
             <a:endParaRPr lang="en-US" sz="3000" dirty="0"/>
           </a:p>
@@ -3325,7 +3325,7 @@
                 <a:ea typeface="Inter" pitchFamily="34" charset="-122"/>
                 <a:cs typeface="Inter" pitchFamily="34" charset="-120"/>
               </a:rPr>
-              <a:t>Warranty ROs, down to 126,891. Volume follows OEM campaigns and recalls.</a:t>
+              <a:t>Warranty ELR, up $16.93; 30 of 33 stores raised it.</a:t>
             </a:r>
             <a:endParaRPr lang="en-US" sz="1400" dirty="0"/>
           </a:p>

--- a/day2-deck/decks/Talking Points - Day 2.pptx
+++ b/day2-deck/decks/Talking Points - Day 2.pptx
@@ -605,7 +605,7 @@
           <a:p>
             <a:r>
               <a:rPr lang="en-US" dirty="0"/>
-              <a:t>Source: Talking points: Service Manager Roundtable (Nov 15, 2024) and GM meeting decks (Jan and May 2026). Data: Qlik (Profit &amp; Loss, Closed Repair Orders, Productivity), Jan-Sep 2026 vs 2025, same-store, 33 stores, INEOS excluded.PLACE: Warranty &amp; Internal section, after the section break, ahead of Warranty Rate Increases (Oct 22: $3,788,100 from the YTD RWR Financials vendor report replaced the warranty RO count here).
+              <a:t>Source: Talking points: Service Manager Roundtable (Nov 15, 2024) and GM meeting decks (Jan and May 2026). Data: Qlik (Profit &amp; Loss, Closed Repair Orders, Productivity), Jan-Sep 2026 vs 2025, same-store, 33 stores, INEOS excluded.PLACE: Warranty &amp; Internal section, after the section break, ahead of Warranty Rate Increases (Oct 22: $3,788,200 added gross profit from the YTD RWR Financials vendor report replaced the warranty RO count here).
 Said: Jan GM slides 13-14 (audit chargebacks; Warranty Compliance). The Jan slide named six stores' chargebacks; kept to the $400,000 total here, in line with no store call-outs from the podium.</a:t>
             </a:r>
             <a:endParaRPr lang="en-US" dirty="0"/>
@@ -3186,7 +3186,7 @@
                 <a:ea typeface="Inter" pitchFamily="34" charset="-122"/>
                 <a:cs typeface="Inter" pitchFamily="34" charset="-120"/>
               </a:rPr>
-              <a:t>$3,788,100</a:t>
+              <a:t>$3,788,200</a:t>
             </a:r>
             <a:endParaRPr lang="en-US" sz="3000" dirty="0"/>
           </a:p>
@@ -3225,7 +3225,7 @@
                 <a:ea typeface="Inter" pitchFamily="34" charset="-122"/>
                 <a:cs typeface="Inter" pitchFamily="34" charset="-120"/>
               </a:rPr>
-              <a:t>Secured so far this year from approved warranty labor and parts rate increases, 19 stores (vendor YTD report).</a:t>
+              <a:t>Added gross profit from warranty labor and parts rate increases approved this year, 19 stores.</a:t>
             </a:r>
             <a:endParaRPr lang="en-US" sz="1400" dirty="0"/>
           </a:p>

--- a/day2-deck/decks/Talking Points - Day 2.pptx
+++ b/day2-deck/decks/Talking Points - Day 2.pptx
@@ -605,7 +605,7 @@
           <a:p>
             <a:r>
               <a:rPr lang="en-US" dirty="0"/>
-              <a:t>Source: Talking points: Service Manager Roundtable (Nov 15, 2024) and GM meeting decks (Jan and May 2026). Data: Qlik (Profit &amp; Loss, Closed Repair Orders, Productivity), Jan-Sep 2026 vs 2025, same-store, 33 stores, INEOS excluded.PLACE: Warranty &amp; Internal section, after the section break, ahead of Warranty Rate Increases (Oct 22: $3,788,200 added gross profit from the YTD RWR Financials vendor report replaced the warranty RO count here).
+              <a:t>Source: Talking points: Service Manager Roundtable (Nov 15, 2024) and GM meeting decks (Jan and May 2026). Data: Qlik (Profit &amp; Loss, Closed Repair Orders, Productivity), Jan-Sep 2026 vs 2025, same-store, 33 stores, INEOS excluded.PLACE: Warranty section, after the section break, ahead of Warranty Rate Increases (Oct 22: $3,788,200 added gross profit from the YTD RWR Financials vendor report replaced the warranty RO count here).
 Said: Jan GM slides 13-14 (audit chargebacks; Warranty Compliance). The Jan slide named six stores' chargebacks; kept to the $400,000 total here, in line with no store call-outs from the podium.</a:t>
             </a:r>
             <a:endParaRPr lang="en-US" dirty="0"/>
@@ -2860,7 +2860,7 @@
                 <a:ea typeface="Inter" pitchFamily="34" charset="-122"/>
                 <a:cs typeface="Inter" pitchFamily="34" charset="-120"/>
               </a:rPr>
-              <a:t>WARRANTY &amp; INTERNAL</a:t>
+              <a:t>WARRANTY</a:t>
             </a:r>
             <a:endParaRPr lang="en-US" sz="1400" dirty="0"/>
           </a:p>

--- a/day2-deck/decks/Talking Points - Day 2.pptx
+++ b/day2-deck/decks/Talking Points - Day 2.pptx
@@ -6929,7 +6929,7 @@
                 <a:ea typeface="Inter" pitchFamily="34" charset="-122"/>
                 <a:cs typeface="Inter" pitchFamily="34" charset="-120"/>
               </a:rPr>
-              <a:t>THE CP ENGINE</a:t>
+              <a:t>CUSTOMER PAY</a:t>
             </a:r>
             <a:endParaRPr lang="en-US" sz="1400" dirty="0"/>
           </a:p>
@@ -7110,7 +7110,7 @@
                 <a:ea typeface="Inter" pitchFamily="34" charset="-122"/>
                 <a:cs typeface="Inter" pitchFamily="34" charset="-120"/>
               </a:rPr>
-              <a:t>ROs &gt; Hours per RO &gt; ELR &gt; Mix &gt; GP%</a:t>
+              <a:t>Work it in order: ROs first, then hours per RO, the rate (ELR), the mix and the margin (GP%)</a:t>
             </a:r>
             <a:endParaRPr lang="en-US" sz="1800" dirty="0"/>
           </a:p>
@@ -7623,7 +7623,7 @@
                 <a:ea typeface="Inter" pitchFamily="34" charset="-122"/>
                 <a:cs typeface="Inter" pitchFamily="34" charset="-120"/>
               </a:rPr>
-              <a:t>THE CP ENGINE</a:t>
+              <a:t>CUSTOMER PAY</a:t>
             </a:r>
             <a:endParaRPr lang="en-US" sz="1400" dirty="0"/>
           </a:p>
@@ -8259,7 +8259,7 @@
                 <a:ea typeface="Inter" pitchFamily="34" charset="-122"/>
                 <a:cs typeface="Inter" pitchFamily="34" charset="-120"/>
               </a:rPr>
-              <a:t>THE CP ENGINE</a:t>
+              <a:t>CUSTOMER PAY</a:t>
             </a:r>
             <a:endParaRPr lang="en-US" sz="1400" dirty="0"/>
           </a:p>
@@ -8974,7 +8974,7 @@
                 <a:ea typeface="Inter" pitchFamily="34" charset="-122"/>
                 <a:cs typeface="Inter" pitchFamily="34" charset="-120"/>
               </a:rPr>
-              <a:t>THE CP ENGINE</a:t>
+              <a:t>CUSTOMER PAY</a:t>
             </a:r>
             <a:endParaRPr lang="en-US" sz="1400" dirty="0"/>
           </a:p>

--- a/day2-deck/decks/Talking Points - Day 2.pptx
+++ b/day2-deck/decks/Talking Points - Day 2.pptx
@@ -3041,7 +3041,7 @@
                 <a:ea typeface="Inter" pitchFamily="34" charset="-122"/>
                 <a:cs typeface="Inter" pitchFamily="34" charset="-120"/>
               </a:rPr>
-              <a:t>Higher labor rates and tariffs are driving up OEM scrutiny</a:t>
+              <a:t>Higher labor rates, higher parts reimbursement and tariffs are driving up OEM scrutiny</a:t>
             </a:r>
             <a:endParaRPr lang="en-US" sz="1800" dirty="0"/>
           </a:p>
@@ -3140,7 +3140,7 @@
         <p:spPr>
           <a:xfrm>
             <a:off x="7269480" y="1920240"/>
-            <a:ext cx="54864" cy="1783080"/>
+            <a:ext cx="54864" cy="1112520"/>
           </a:xfrm>
           <a:prstGeom prst="rect">
             <a:avLst/>
@@ -3201,7 +3201,7 @@
         <p:spPr>
           <a:xfrm>
             <a:off x="7452360" y="2441448"/>
-            <a:ext cx="4023360" cy="1280160"/>
+            <a:ext cx="4023360" cy="609600"/>
           </a:xfrm>
           <a:prstGeom prst="rect">
             <a:avLst/>
@@ -3239,8 +3239,8 @@
         </p:nvSpPr>
         <p:spPr>
           <a:xfrm>
-            <a:off x="7269480" y="3931920"/>
-            <a:ext cx="54864" cy="1783080"/>
+            <a:off x="7269480" y="3261360"/>
+            <a:ext cx="54864" cy="1112520"/>
           </a:xfrm>
           <a:prstGeom prst="rect">
             <a:avLst/>
@@ -3259,7 +3259,7 @@
         </p:nvSpPr>
         <p:spPr>
           <a:xfrm>
-            <a:off x="7452360" y="3886200"/>
+            <a:off x="7452360" y="3215640"/>
             <a:ext cx="4023360" cy="566928"/>
           </a:xfrm>
           <a:prstGeom prst="rect">
@@ -3300,8 +3300,8 @@
         </p:nvSpPr>
         <p:spPr>
           <a:xfrm>
-            <a:off x="7452360" y="4453128"/>
-            <a:ext cx="4023360" cy="1280160"/>
+            <a:off x="7452360" y="3782568"/>
+            <a:ext cx="4023360" cy="609600"/>
           </a:xfrm>
           <a:prstGeom prst="rect">
             <a:avLst/>
@@ -3339,6 +3339,106 @@
         </p:nvSpPr>
         <p:spPr>
           <a:xfrm>
+            <a:off x="7269480" y="4602480"/>
+            <a:ext cx="54864" cy="1112520"/>
+          </a:xfrm>
+          <a:prstGeom prst="rect">
+            <a:avLst/>
+          </a:prstGeom>
+          <a:solidFill>
+            <a:srgbClr val="12A566"/>
+          </a:solidFill>
+          <a:ln/>
+        </p:spPr>
+      </p:sp>
+      <p:sp>
+        <p:nvSpPr>
+          <p:cNvPr id="17" name="Text 15"/>
+          <p:cNvSpPr txBox="1"/>
+          <p:nvPr/>
+        </p:nvSpPr>
+        <p:spPr>
+          <a:xfrm>
+            <a:off x="7452360" y="4556760"/>
+            <a:ext cx="4023360" cy="566928"/>
+          </a:xfrm>
+          <a:prstGeom prst="rect">
+            <a:avLst/>
+          </a:prstGeom>
+          <a:noFill/>
+          <a:ln/>
+        </p:spPr>
+        <p:txBody>
+          <a:bodyPr wrap="square" lIns="0" tIns="0" rIns="0" bIns="0" rtlCol="0" anchor="ctr">
+            <a:normAutofit/>
+          </a:bodyPr>
+          <a:lstStyle/>
+          <a:p>
+            <a:pPr indent="0" marL="0">
+              <a:buNone/>
+            </a:pPr>
+            <a:r>
+              <a:rPr lang="en-US" sz="3000" b="1" dirty="0">
+                <a:solidFill>
+                  <a:srgbClr val="0B7A4A"/>
+                </a:solidFill>
+                <a:latin typeface="Inter" pitchFamily="34" charset="0"/>
+                <a:ea typeface="Inter" pitchFamily="34" charset="-122"/>
+                <a:cs typeface="Inter" pitchFamily="34" charset="-120"/>
+              </a:rPr>
+              <a:t>44.7%</a:t>
+            </a:r>
+            <a:endParaRPr lang="en-US" sz="3000" dirty="0"/>
+          </a:p>
+        </p:txBody>
+      </p:sp>
+      <p:sp>
+        <p:nvSpPr>
+          <p:cNvPr id="18" name="Text 16"/>
+          <p:cNvSpPr txBox="1"/>
+          <p:nvPr/>
+        </p:nvSpPr>
+        <p:spPr>
+          <a:xfrm>
+            <a:off x="7452360" y="5123688"/>
+            <a:ext cx="4023360" cy="609600"/>
+          </a:xfrm>
+          <a:prstGeom prst="rect">
+            <a:avLst/>
+          </a:prstGeom>
+          <a:noFill/>
+          <a:ln/>
+        </p:spPr>
+        <p:txBody>
+          <a:bodyPr wrap="square" lIns="0" tIns="0" rIns="0" bIns="0" rtlCol="0" anchor="t"/>
+          <a:lstStyle/>
+          <a:p>
+            <a:pPr indent="0" marL="0">
+              <a:buNone/>
+            </a:pPr>
+            <a:r>
+              <a:rPr lang="en-US" sz="1400" dirty="0">
+                <a:solidFill>
+                  <a:srgbClr val="1A1A1A"/>
+                </a:solidFill>
+                <a:latin typeface="Inter" pitchFamily="34" charset="0"/>
+                <a:ea typeface="Inter" pitchFamily="34" charset="-122"/>
+                <a:cs typeface="Inter" pitchFamily="34" charset="-120"/>
+              </a:rPr>
+              <a:t>Warranty parts gross profit, up 2.1 pts and ahead of 2025 in all nine months.</a:t>
+            </a:r>
+            <a:endParaRPr lang="en-US" sz="1400" dirty="0"/>
+          </a:p>
+        </p:txBody>
+      </p:sp>
+      <p:sp>
+        <p:nvSpPr>
+          <p:cNvPr id="19" name="Shape 17"/>
+          <p:cNvSpPr/>
+          <p:nvPr/>
+        </p:nvSpPr>
+        <p:spPr>
+          <a:xfrm>
             <a:off x="457200" y="6126480"/>
             <a:ext cx="11274552" cy="371856"/>
           </a:xfrm>
@@ -3353,7 +3453,7 @@
       </p:sp>
       <p:sp>
         <p:nvSpPr>
-          <p:cNvPr id="17" name="Text 15"/>
+          <p:cNvPr id="20" name="Text 18"/>
           <p:cNvSpPr txBox="1"/>
           <p:nvPr/>
         </p:nvSpPr>
@@ -10442,13 +10542,13 @@
         <p:spPr>
           <a:xfrm>
             <a:off x="7269480" y="1920240"/>
-            <a:ext cx="54864" cy="1783080"/>
-          </a:xfrm>
-          <a:prstGeom prst="rect">
-            <a:avLst/>
-          </a:prstGeom>
-          <a:solidFill>
-            <a:srgbClr val="12A566"/>
+            <a:ext cx="54864" cy="3794760"/>
+          </a:xfrm>
+          <a:prstGeom prst="rect">
+            <a:avLst/>
+          </a:prstGeom>
+          <a:solidFill>
+            <a:srgbClr val="C2352F"/>
           </a:solidFill>
           <a:ln/>
         </p:spPr>
@@ -10482,13 +10582,13 @@
             <a:r>
               <a:rPr lang="en-US" sz="3000" b="1" dirty="0">
                 <a:solidFill>
-                  <a:srgbClr val="0B7A4A"/>
-                </a:solidFill>
-                <a:latin typeface="Inter" pitchFamily="34" charset="0"/>
-                <a:ea typeface="Inter" pitchFamily="34" charset="-122"/>
-                <a:cs typeface="Inter" pitchFamily="34" charset="-120"/>
-              </a:rPr>
-              <a:t>15.2%</a:t>
+                  <a:srgbClr val="A82B26"/>
+                </a:solidFill>
+                <a:latin typeface="Inter" pitchFamily="34" charset="0"/>
+                <a:ea typeface="Inter" pitchFamily="34" charset="-122"/>
+                <a:cs typeface="Inter" pitchFamily="34" charset="-120"/>
+              </a:rPr>
+              <a:t>4.2% to 63.5%</a:t>
             </a:r>
             <a:endParaRPr lang="en-US" sz="3000" dirty="0"/>
           </a:p>
@@ -10503,7 +10603,7 @@
         <p:spPr>
           <a:xfrm>
             <a:off x="7452360" y="2441448"/>
-            <a:ext cx="4023360" cy="1280160"/>
+            <a:ext cx="4023360" cy="3291840"/>
           </a:xfrm>
           <a:prstGeom prst="rect">
             <a:avLst/>
@@ -10527,7 +10627,7 @@
                 <a:ea typeface="Inter" pitchFamily="34" charset="-122"/>
                 <a:cs typeface="Inter" pitchFamily="34" charset="-120"/>
               </a:rPr>
-              <a:t>Customer-pay labor whose op code description can't be classified, down from 19.0%.</a:t>
+              <a:t>Share of each store's customer-pay labor whose op code description doesn't say what was sold. Vague descriptions hide what the shop sells.</a:t>
             </a:r>
             <a:endParaRPr lang="en-US" sz="1400" dirty="0"/>
           </a:p>
@@ -10541,106 +10641,6 @@
         </p:nvSpPr>
         <p:spPr>
           <a:xfrm>
-            <a:off x="7269480" y="3931920"/>
-            <a:ext cx="54864" cy="1783080"/>
-          </a:xfrm>
-          <a:prstGeom prst="rect">
-            <a:avLst/>
-          </a:prstGeom>
-          <a:solidFill>
-            <a:srgbClr val="C2352F"/>
-          </a:solidFill>
-          <a:ln/>
-        </p:spPr>
-      </p:sp>
-      <p:sp>
-        <p:nvSpPr>
-          <p:cNvPr id="14" name="Text 12"/>
-          <p:cNvSpPr txBox="1"/>
-          <p:nvPr/>
-        </p:nvSpPr>
-        <p:spPr>
-          <a:xfrm>
-            <a:off x="7452360" y="3886200"/>
-            <a:ext cx="4023360" cy="566928"/>
-          </a:xfrm>
-          <a:prstGeom prst="rect">
-            <a:avLst/>
-          </a:prstGeom>
-          <a:noFill/>
-          <a:ln/>
-        </p:spPr>
-        <p:txBody>
-          <a:bodyPr wrap="square" lIns="0" tIns="0" rIns="0" bIns="0" rtlCol="0" anchor="ctr">
-            <a:normAutofit/>
-          </a:bodyPr>
-          <a:lstStyle/>
-          <a:p>
-            <a:pPr indent="0" marL="0">
-              <a:buNone/>
-            </a:pPr>
-            <a:r>
-              <a:rPr lang="en-US" sz="3000" b="1" dirty="0">
-                <a:solidFill>
-                  <a:srgbClr val="A82B26"/>
-                </a:solidFill>
-                <a:latin typeface="Inter" pitchFamily="34" charset="0"/>
-                <a:ea typeface="Inter" pitchFamily="34" charset="-122"/>
-                <a:cs typeface="Inter" pitchFamily="34" charset="-120"/>
-              </a:rPr>
-              <a:t>4.2% to 63.5%</a:t>
-            </a:r>
-            <a:endParaRPr lang="en-US" sz="3000" dirty="0"/>
-          </a:p>
-        </p:txBody>
-      </p:sp>
-      <p:sp>
-        <p:nvSpPr>
-          <p:cNvPr id="15" name="Text 13"/>
-          <p:cNvSpPr txBox="1"/>
-          <p:nvPr/>
-        </p:nvSpPr>
-        <p:spPr>
-          <a:xfrm>
-            <a:off x="7452360" y="4453128"/>
-            <a:ext cx="4023360" cy="1280160"/>
-          </a:xfrm>
-          <a:prstGeom prst="rect">
-            <a:avLst/>
-          </a:prstGeom>
-          <a:noFill/>
-          <a:ln/>
-        </p:spPr>
-        <p:txBody>
-          <a:bodyPr wrap="square" lIns="0" tIns="0" rIns="0" bIns="0" rtlCol="0" anchor="t"/>
-          <a:lstStyle/>
-          <a:p>
-            <a:pPr indent="0" marL="0">
-              <a:buNone/>
-            </a:pPr>
-            <a:r>
-              <a:rPr lang="en-US" sz="1400" dirty="0">
-                <a:solidFill>
-                  <a:srgbClr val="1A1A1A"/>
-                </a:solidFill>
-                <a:latin typeface="Inter" pitchFamily="34" charset="0"/>
-                <a:ea typeface="Inter" pitchFamily="34" charset="-122"/>
-                <a:cs typeface="Inter" pitchFamily="34" charset="-120"/>
-              </a:rPr>
-              <a:t>The range across stores. Vague descriptions hide what the shop sells.</a:t>
-            </a:r>
-            <a:endParaRPr lang="en-US" sz="1400" dirty="0"/>
-          </a:p>
-        </p:txBody>
-      </p:sp>
-      <p:sp>
-        <p:nvSpPr>
-          <p:cNvPr id="16" name="Shape 14"/>
-          <p:cNvSpPr/>
-          <p:nvPr/>
-        </p:nvSpPr>
-        <p:spPr>
-          <a:xfrm>
             <a:off x="457200" y="6126480"/>
             <a:ext cx="11274552" cy="615696"/>
           </a:xfrm>
@@ -10655,7 +10655,7 @@
       </p:sp>
       <p:sp>
         <p:nvSpPr>
-          <p:cNvPr id="17" name="Text 15"/>
+          <p:cNvPr id="14" name="Text 12"/>
           <p:cNvSpPr txBox="1"/>
           <p:nvPr/>
         </p:nvSpPr>

--- a/day2-deck/decks/Talking Points - Day 2.pptx
+++ b/day2-deck/decks/Talking Points - Day 2.pptx
@@ -10588,7 +10588,7 @@
                 <a:ea typeface="Inter" pitchFamily="34" charset="-122"/>
                 <a:cs typeface="Inter" pitchFamily="34" charset="-120"/>
               </a:rPr>
-              <a:t>4.2% to 63.5%</a:t>
+              <a:t>81.3%</a:t>
             </a:r>
             <a:endParaRPr lang="en-US" sz="3000" dirty="0"/>
           </a:p>
@@ -10627,7 +10627,7 @@
                 <a:ea typeface="Inter" pitchFamily="34" charset="-122"/>
                 <a:cs typeface="Inter" pitchFamily="34" charset="-120"/>
               </a:rPr>
-              <a:t>Share of each store's customer-pay labor whose op code description doesn't say what was sold. Vague descriptions hide what the shop sells.</a:t>
+              <a:t>MPI completion, July to September (store-reported). 12 of 33 stores at the 90% benchmark.</a:t>
             </a:r>
             <a:endParaRPr lang="en-US" sz="1400" dirty="0"/>
           </a:p>

--- a/day2-deck/decks/Talking Points - Day 2.pptx
+++ b/day2-deck/decks/Talking Points - Day 2.pptx
@@ -1321,7 +1321,8 @@
             <a:r>
               <a:rPr lang="en-US" dirty="0"/>
               <a:t>Source: Talking points: Service Manager Roundtable (Nov 15, 2024) and GM meeting decks (Jan and May 2026). Data: Qlik (Profit &amp; Loss, Closed Repair Orders, Productivity), Jan-Sep 2026 vs 2025, same-store, 33 stores, INEOS excluded.PLACE: CP Engine section, before the CP ELR slides (ahead of the door-rate options).
-Said: Roundtable slide 15 (Pricing Strategy); Jan/May GM Road to the Sale slide (pricing lines); Jan GM slide 54 (Discounting Discipline); 70% benchmark from the Jan/May door rate slides.</a:t>
+Said: Roundtable slide 15 (Pricing Strategy); Jan/May GM Road to the Sale slide (pricing lines); Jan GM slide 54 (Discounting Discipline); 70% benchmark from the Jan/May door rate slides.
+Oct 23 (Noah): grid vs non-grid tile replaced. $126,831 a month = Jul-Sep, for each of the 8 stores under 70% (Chevy LV, Toyota Spokane, Cadillac, Kia LV, Subaru Prescott, Lincoln, GMC Prescott, Hyundai Prescott): (70% x door rate - CP ELR) x CP hours sold, summed ($380,494) / 3. Door rates from the store door rate sheet (door.json), ELR and hours from elr_q3.json.</a:t>
             </a:r>
             <a:endParaRPr lang="en-US" dirty="0"/>
           </a:p>
@@ -8845,7 +8846,7 @@
             <a:avLst/>
           </a:prstGeom>
           <a:solidFill>
-            <a:srgbClr val="C2352F"/>
+            <a:srgbClr val="2587C5"/>
           </a:solidFill>
           <a:ln/>
         </p:spPr>
@@ -8879,13 +8880,13 @@
             <a:r>
               <a:rPr lang="en-US" sz="3000" b="1" dirty="0">
                 <a:solidFill>
-                  <a:srgbClr val="A82B26"/>
-                </a:solidFill>
-                <a:latin typeface="Inter" pitchFamily="34" charset="0"/>
-                <a:ea typeface="Inter" pitchFamily="34" charset="-122"/>
-                <a:cs typeface="Inter" pitchFamily="34" charset="-120"/>
-              </a:rPr>
-              <a:t>73.9% vs 76.4%</a:t>
+                  <a:srgbClr val="0B2C4A"/>
+                </a:solidFill>
+                <a:latin typeface="Inter" pitchFamily="34" charset="0"/>
+                <a:ea typeface="Inter" pitchFamily="34" charset="-122"/>
+                <a:cs typeface="Inter" pitchFamily="34" charset="-120"/>
+              </a:rPr>
+              <a:t>$127K a month</a:t>
             </a:r>
             <a:endParaRPr lang="en-US" sz="3000" dirty="0"/>
           </a:p>
@@ -8924,7 +8925,7 @@
                 <a:ea typeface="Inter" pitchFamily="34" charset="-122"/>
                 <a:cs typeface="Inter" pitchFamily="34" charset="-120"/>
               </a:rPr>
-              <a:t>Grid stores realize less of their door rate than flat-rate stores, Jul-Sep.</a:t>
+              <a:t>Added labor if the 8 stores under 70% reached it on the hours they already sell, Jul-Sep: $126,831 a month.</a:t>
             </a:r>
             <a:endParaRPr lang="en-US" sz="1400" dirty="0"/>
           </a:p>

--- a/day2-deck/decks/Talking Points - Day 2.pptx
+++ b/day2-deck/decks/Talking Points - Day 2.pptx
@@ -1499,7 +1499,7 @@
           <a:p>
             <a:r>
               <a:rPr lang="en-US" dirty="0"/>
-              <a:t>Source: Talking points: Service Manager Roundtable (Nov 15, 2024) and GM meeting decks (Jan and May 2026). Data: Qlik (Profit &amp; Loss, Closed Repair Orders, Productivity), Jan-Sep 2026 vs 2025, same-store, 33 stores, INEOS excluded.PLACE: Labor Mix section, after the section break and before the pay type slides.
+              <a:t>Source: Talking points: Service Manager Roundtable (Nov 15, 2024) and GM meeting decks (Jan and May 2026). Data: Qlik (Profit &amp; Loss, Closed Repair Orders, Productivity), Jan-Sep 2026 vs 2025, same-store, 33 stores, INEOS excluded.PLACE: Customer Pay section, after Pricing Strategy and before the pay type slides (moved from Labor Mix, Oct 23).
 Said: Jan GM slide 8 / May GM slide 7 (Express Service).</a:t>
             </a:r>
             <a:endParaRPr lang="en-US" dirty="0"/>
@@ -9669,7 +9669,7 @@
                 <a:ea typeface="Inter" pitchFamily="34" charset="-122"/>
                 <a:cs typeface="Inter" pitchFamily="34" charset="-120"/>
               </a:rPr>
-              <a:t>LABOR MIX</a:t>
+              <a:t>CUSTOMER PAY</a:t>
             </a:r>
             <a:endParaRPr lang="en-US" sz="1400" dirty="0"/>
           </a:p>

--- a/day2-deck/decks/Talking Points - Day 2.pptx
+++ b/day2-deck/decks/Talking Points - Day 2.pptx
@@ -1588,7 +1588,7 @@
           <a:p>
             <a:r>
               <a:rPr lang="en-US" dirty="0"/>
-              <a:t>Source: Talking points: Service Manager Roundtable (Nov 15, 2024) and GM meeting decks (Jan and May 2026). Data: Qlik (Profit &amp; Loss, Closed Repair Orders, Productivity), Jan-Sep 2026 vs 2025, same-store, 33 stores, INEOS excluded.PLACE: Labor Mix section, before the work-type (maintenance / repair / unclassified) slides.
+              <a:t>Source: Talking points: Service Manager Roundtable (Nov 15, 2024) and GM meeting decks (Jan and May 2026). Data: Qlik (Profit &amp; Loss, Closed Repair Orders, Productivity), Jan-Sep 2026 vs 2025, same-store, 33 stores, INEOS excluded.PLACE: end of the Internal section (renamed from Labor Mix, Oct 23; Noah may move it).
 Said: Jan GM slide 19 / May GM slide 15 (Tracking &amp; Accountability); Roundtable slide 16 (Performance Tracking).</a:t>
             </a:r>
             <a:endParaRPr lang="en-US" dirty="0"/>
@@ -10284,7 +10284,7 @@
                 <a:ea typeface="Inter" pitchFamily="34" charset="-122"/>
                 <a:cs typeface="Inter" pitchFamily="34" charset="-120"/>
               </a:rPr>
-              <a:t>LABOR MIX</a:t>
+              <a:t>INTERNAL</a:t>
             </a:r>
             <a:endParaRPr lang="en-US" sz="1400" dirty="0"/>
           </a:p>

--- a/day2-deck/decks/Talking Points - Day 2.pptx
+++ b/day2-deck/decks/Talking Points - Day 2.pptx
@@ -1499,7 +1499,7 @@
           <a:p>
             <a:r>
               <a:rPr lang="en-US" dirty="0"/>
-              <a:t>Source: Talking points: Service Manager Roundtable (Nov 15, 2024) and GM meeting decks (Jan and May 2026). Data: Qlik (Profit &amp; Loss, Closed Repair Orders, Productivity), Jan-Sep 2026 vs 2025, same-store, 33 stores, INEOS excluded.PLACE: Customer Pay section, after Pricing Strategy and before the pay type slides (moved from Labor Mix, Oct 23).
+              <a:t>Source: Talking points: Service Manager Roundtable (Nov 15, 2024) and GM meeting decks (Jan and May 2026). Data: Qlik (Profit &amp; Loss, Closed Repair Orders, Productivity), Jan-Sep 2026 vs 2025, same-store, 33 stores, INEOS excluded.PLACE: Opcode Benchmarks, after Road to the Sale and ahead of MPI Completion % (Noah, Oct 23: express visits and a complete MPI go hand in hand).
 Said: Jan GM slide 8 / May GM slide 7 (Express Service).</a:t>
             </a:r>
             <a:endParaRPr lang="en-US" dirty="0"/>
@@ -1588,7 +1588,7 @@
           <a:p>
             <a:r>
               <a:rPr lang="en-US" dirty="0"/>
-              <a:t>Source: Talking points: Service Manager Roundtable (Nov 15, 2024) and GM meeting decks (Jan and May 2026). Data: Qlik (Profit &amp; Loss, Closed Repair Orders, Productivity), Jan-Sep 2026 vs 2025, same-store, 33 stores, INEOS excluded.PLACE: end of the Internal section (renamed from Labor Mix, Oct 23; Noah may move it).
+              <a:t>Source: Talking points: Service Manager Roundtable (Nov 15, 2024) and GM meeting decks (Jan and May 2026). Data: Qlik (Profit &amp; Loss, Closed Repair Orders, Productivity), Jan-Sep 2026 vs 2025, same-store, 33 stores, INEOS excluded.PLACE: Opcode Benchmarks, after MPI and Video Completion %, ahead of the op code closing % slides (moved out of Internal, Oct 23).
 Said: Jan GM slide 19 / May GM slide 15 (Tracking &amp; Accountability); Roundtable slide 16 (Performance Tracking).</a:t>
             </a:r>
             <a:endParaRPr lang="en-US" dirty="0"/>
@@ -9669,7 +9669,7 @@
                 <a:ea typeface="Inter" pitchFamily="34" charset="-122"/>
                 <a:cs typeface="Inter" pitchFamily="34" charset="-120"/>
               </a:rPr>
-              <a:t>CUSTOMER PAY</a:t>
+              <a:t>OPCODES</a:t>
             </a:r>
             <a:endParaRPr lang="en-US" sz="1400" dirty="0"/>
           </a:p>
@@ -10284,7 +10284,7 @@
                 <a:ea typeface="Inter" pitchFamily="34" charset="-122"/>
                 <a:cs typeface="Inter" pitchFamily="34" charset="-120"/>
               </a:rPr>
-              <a:t>INTERNAL</a:t>
+              <a:t>OPCODES</a:t>
             </a:r>
             <a:endParaRPr lang="en-US" sz="1400" dirty="0"/>
           </a:p>

--- a/day2-deck/decks/Talking Points - Day 2.pptx
+++ b/day2-deck/decks/Talking Points - Day 2.pptx
@@ -4677,7 +4677,7 @@
             <a:avLst/>
           </a:prstGeom>
           <a:solidFill>
-            <a:srgbClr val="C2352F"/>
+            <a:srgbClr val="12A566"/>
           </a:solidFill>
           <a:ln/>
         </p:spPr>
@@ -4711,13 +4711,13 @@
             <a:r>
               <a:rPr lang="en-US" sz="3000" b="1" dirty="0">
                 <a:solidFill>
-                  <a:srgbClr val="A82B26"/>
-                </a:solidFill>
-                <a:latin typeface="Inter" pitchFamily="34" charset="0"/>
-                <a:ea typeface="Inter" pitchFamily="34" charset="-122"/>
-                <a:cs typeface="Inter" pitchFamily="34" charset="-120"/>
-              </a:rPr>
-              <a:t>166</a:t>
+                  <a:srgbClr val="0B7A4A"/>
+                </a:solidFill>
+                <a:latin typeface="Inter" pitchFamily="34" charset="0"/>
+                <a:ea typeface="Inter" pitchFamily="34" charset="-122"/>
+                <a:cs typeface="Inter" pitchFamily="34" charset="-120"/>
+              </a:rPr>
+              <a:t>94.7%</a:t>
             </a:r>
             <a:endParaRPr lang="en-US" sz="3000" dirty="0"/>
           </a:p>
@@ -4756,7 +4756,7 @@
                 <a:ea typeface="Inter" pitchFamily="34" charset="-122"/>
                 <a:cs typeface="Inter" pitchFamily="34" charset="-120"/>
               </a:rPr>
-              <a:t>CP &amp; W ROs per advisor a month, down 7. Advisors grew 1.5%; ROs fell 2.3%.</a:t>
+              <a:t>Technician proficiency, Jan-Sep: 20 of 33 stores at or above 85%. Flat-rate pay rewards what techs produce.</a:t>
             </a:r>
             <a:endParaRPr lang="en-US" sz="1400" dirty="0"/>
           </a:p>

--- a/day2-deck/decks/Talking Points - Day 2.pptx
+++ b/day2-deck/decks/Talking Points - Day 2.pptx
@@ -6701,7 +6701,7 @@
             <a:avLst/>
           </a:prstGeom>
           <a:solidFill>
-            <a:srgbClr val="2587C5"/>
+            <a:srgbClr val="12A566"/>
           </a:solidFill>
           <a:ln/>
         </p:spPr>
@@ -6735,7 +6735,7 @@
             <a:r>
               <a:rPr lang="en-US" sz="3000" b="1" dirty="0">
                 <a:solidFill>
-                  <a:srgbClr val="0B2C4A"/>
+                  <a:srgbClr val="0B7A4A"/>
                 </a:solidFill>
                 <a:latin typeface="Inter" pitchFamily="34" charset="0"/>
                 <a:ea typeface="Inter" pitchFamily="34" charset="-122"/>
@@ -6780,7 +6780,7 @@
                 <a:ea typeface="Inter" pitchFamily="34" charset="-122"/>
                 <a:cs typeface="Inter" pitchFamily="34" charset="-120"/>
               </a:rPr>
-              <a:t>Parts gross, up 1.9%, but parts net to gross slipped 0.4 pts to 36.7%.</a:t>
+              <a:t>Parts gross, up 1.9%, ahead of 2025 in six of nine months.</a:t>
             </a:r>
             <a:endParaRPr lang="en-US" sz="1400" dirty="0"/>
           </a:p>
@@ -7926,7 +7926,7 @@
                 <a:ea typeface="Inter" pitchFamily="34" charset="-122"/>
                 <a:cs typeface="Inter" pitchFamily="34" charset="-120"/>
               </a:rPr>
-              <a:t>75% of visits are basic services. Saturdays are what you choose to make them.</a:t>
+              <a:t>Handle basic maintenance quickly and efficiently. Saturdays are what you choose to make them.</a:t>
             </a:r>
             <a:endParaRPr lang="en-US" sz="1800" dirty="0"/>
           </a:p>
@@ -8131,7 +8131,7 @@
             <a:avLst/>
           </a:prstGeom>
           <a:solidFill>
-            <a:srgbClr val="C2352F"/>
+            <a:srgbClr val="2587C5"/>
           </a:solidFill>
           <a:ln/>
         </p:spPr>
@@ -8165,13 +8165,13 @@
             <a:r>
               <a:rPr lang="en-US" sz="3000" b="1" dirty="0">
                 <a:solidFill>
-                  <a:srgbClr val="A82B26"/>
-                </a:solidFill>
-                <a:latin typeface="Inter" pitchFamily="34" charset="0"/>
-                <a:ea typeface="Inter" pitchFamily="34" charset="-122"/>
-                <a:cs typeface="Inter" pitchFamily="34" charset="-120"/>
-              </a:rPr>
-              <a:t>166 ROs per advisor</a:t>
+                  <a:srgbClr val="0B2C4A"/>
+                </a:solidFill>
+                <a:latin typeface="Inter" pitchFamily="34" charset="0"/>
+                <a:ea typeface="Inter" pitchFamily="34" charset="-122"/>
+                <a:cs typeface="Inter" pitchFamily="34" charset="-120"/>
+              </a:rPr>
+              <a:t>$4,473,284</a:t>
             </a:r>
             <a:endParaRPr lang="en-US" sz="3000" dirty="0"/>
           </a:p>
@@ -8210,7 +8210,7 @@
                 <a:ea typeface="Inter" pitchFamily="34" charset="-122"/>
                 <a:cs typeface="Inter" pitchFamily="34" charset="-120"/>
               </a:rPr>
-              <a:t>CP &amp; W ROs per service advisor a month, down 7. Advisors grew 1.5%; ROs fell 2.3%.</a:t>
+              <a:t>A year in labor and parts gross from one more customer-pay RO a day at every store.</a:t>
             </a:r>
             <a:endParaRPr lang="en-US" sz="1400" dirty="0"/>
           </a:p>

--- a/day2-deck/decks/Talking Points - Day 2.pptx
+++ b/day2-deck/decks/Talking Points - Day 2.pptx
@@ -515,9 +515,7 @@
           <a:p>
             <a:r>
               <a:rPr lang="en-US" dirty="0"/>
-              <a:t>Source: Talking points: Service Manager Roundtable (Nov 15, 2024) and GM meeting decks (Jan and May 2026). Data: Qlik (Profit &amp; Loss, Closed Repair Orders, Productivity), Jan-Sep 2026 vs 2025, same-store, 33 stores, INEOS excluded.PLACE: right after the cover, before the Gross section.
-Said: Roundtable slides 2, 5, 7, 6 (objective; philosophy &amp; culture; 'you get what you tolerate'; collaboration). Ask adapted from Roundtable slide 24 closing questions.
-Added Oct 22 (Noah): profit-generating activities and incremental dollars; working on the business versus in it.</a:t>
+              <a:t>Source: Qlik - Profit &amp; Loss, Jan-Sep 2026 vs 2025, all stores (INEOS included, to match the group P&amp;L). Fixed ops = service (Mechanical) + parts (P&amp;A) department profit: department gross less the department's own expenses. Group net = Net Profit Or Loss on the GM statement.PLACE: right after the agenda, before the Gross section. In the deck Oct 24 (Noah): group net profit view replaces the gross / absorption / net-to-gross tiles. Group-level view of fixed ops' weight in the dealership's profit, Jan-Sep. Fixed ops department profit $50,194,950 (2025 $45,336,135); group net profit $82,240,434 (2025 $95,664,709). On the P&amp;L, F&amp;I income, other income and store-level costs are not split by department, so 'the rest of the store' is the group net less fixed ops department profit. Group net = Net Profit Or Loss on the GM statement (P&amp;L summary), all stores; INEOS (opened 2026) is in both lines. Body shop (GMC Prescott) department profit is left out of fixed ops, as everywhere in the deck.</a:t>
             </a:r>
             <a:endParaRPr lang="en-US" dirty="0"/>
           </a:p>
@@ -2472,7 +2470,7 @@
                 <a:ea typeface="Inter" pitchFamily="34" charset="-122"/>
                 <a:cs typeface="Inter" pitchFamily="34" charset="-120"/>
               </a:rPr>
-              <a:t>+$7,468,567</a:t>
+              <a:t>61%</a:t>
             </a:r>
             <a:endParaRPr lang="en-US" sz="3000" dirty="0"/>
           </a:p>
@@ -2511,7 +2509,7 @@
                 <a:ea typeface="Inter" pitchFamily="34" charset="-122"/>
                 <a:cs typeface="Inter" pitchFamily="34" charset="-120"/>
               </a:rPr>
-              <a:t>Fixed ops gross, up 4.1% year to date. 25 of 33 stores grew.</a:t>
+              <a:t>of the group's net profit came from service and parts: $50.19M of $82.24M (47% in 2025).</a:t>
             </a:r>
             <a:endParaRPr lang="en-US" sz="1400" dirty="0"/>
           </a:p>
@@ -2532,7 +2530,7 @@
             <a:avLst/>
           </a:prstGeom>
           <a:solidFill>
-            <a:srgbClr val="12A566"/>
+            <a:srgbClr val="2587C5"/>
           </a:solidFill>
           <a:ln/>
         </p:spPr>
@@ -2566,13 +2564,13 @@
             <a:r>
               <a:rPr lang="en-US" sz="3000" b="1" dirty="0">
                 <a:solidFill>
-                  <a:srgbClr val="0B7A4A"/>
-                </a:solidFill>
-                <a:latin typeface="Inter" pitchFamily="34" charset="0"/>
-                <a:ea typeface="Inter" pitchFamily="34" charset="-122"/>
-                <a:cs typeface="Inter" pitchFamily="34" charset="-120"/>
-              </a:rPr>
-              <a:t>78.1%</a:t>
+                  <a:srgbClr val="0B2C4A"/>
+                </a:solidFill>
+                <a:latin typeface="Inter" pitchFamily="34" charset="0"/>
+                <a:ea typeface="Inter" pitchFamily="34" charset="-122"/>
+                <a:cs typeface="Inter" pitchFamily="34" charset="-120"/>
+              </a:rPr>
+              <a:t>$50.19M</a:t>
             </a:r>
             <a:endParaRPr lang="en-US" sz="3000" dirty="0"/>
           </a:p>
@@ -2611,7 +2609,7 @@
                 <a:ea typeface="Inter" pitchFamily="34" charset="-122"/>
                 <a:cs typeface="Inter" pitchFamily="34" charset="-120"/>
               </a:rPr>
-              <a:t>Fixed ops absorption, up 2.1 pts. Fixed gross grew 4.1%, fixed expenses 1.3%.</a:t>
+              <a:t>Fixed ops department profit. New, used, F&amp;I and the rest of the store together: $32.05M.</a:t>
             </a:r>
             <a:endParaRPr lang="en-US" sz="1400" dirty="0"/>
           </a:p>
@@ -2672,7 +2670,7 @@
                 <a:ea typeface="Inter" pitchFamily="34" charset="-122"/>
                 <a:cs typeface="Inter" pitchFamily="34" charset="-120"/>
               </a:rPr>
-              <a:t>21.8%</a:t>
+              <a:t>+$4,858,815</a:t>
             </a:r>
             <a:endParaRPr lang="en-US" sz="3000" dirty="0"/>
           </a:p>
@@ -2711,7 +2709,7 @@
                 <a:ea typeface="Inter" pitchFamily="34" charset="-122"/>
                 <a:cs typeface="Inter" pitchFamily="34" charset="-120"/>
               </a:rPr>
-              <a:t>Service net to gross, up 2.9 pts and ahead of 2025 in all nine months.</a:t>
+              <a:t>More fixed ops profit than 2025, while group net profit fell $13.42M.</a:t>
             </a:r>
             <a:endParaRPr lang="en-US" sz="1400" dirty="0"/>
           </a:p>
@@ -2732,7 +2730,7 @@
             <a:avLst/>
           </a:prstGeom>
           <a:solidFill>
-            <a:srgbClr val="E6F6EE"/>
+            <a:srgbClr val="EDF4FA"/>
           </a:solidFill>
           <a:ln/>
         </p:spPr>
@@ -2764,7 +2762,7 @@
             <a:r>
               <a:rPr lang="en-US" sz="1600" b="1" dirty="0">
                 <a:solidFill>
-                  <a:srgbClr val="0B7A4A"/>
+                  <a:srgbClr val="0B2C4A"/>
                 </a:solidFill>
                 <a:latin typeface="Inter" pitchFamily="34" charset="0"/>
                 <a:ea typeface="Inter" pitchFamily="34" charset="-122"/>

--- a/day2-deck/decks/Talking Points - Day 2.pptx
+++ b/day2-deck/decks/Talking Points - Day 2.pptx
@@ -19,9 +19,10 @@
     <p:sldId id="267" r:id="rId13"/>
     <p:sldId id="268" r:id="rId14"/>
     <p:sldId id="269" r:id="rId15"/>
+    <p:sldId id="270" r:id="rId16"/>
   </p:sldIdLst>
   <p:notesMasterIdLst>
-    <p:notesMasterId r:id="rId16"/>
+    <p:notesMasterId r:id="rId17"/>
   </p:notesMasterIdLst>
   <p:sldSz cx="12192000" cy="6858000"/>
   <p:notesSz cx="6858000" cy="12192000"/>
@@ -1004,6 +1005,96 @@
 </p:notes>
 </file>
 
+<file path=ppt/notesSlides/notesSlide15.xml><?xml version="1.0" encoding="utf-8"?>
+<p:notes xmlns:a="http://schemas.openxmlformats.org/drawingml/2006/main" xmlns:r="http://schemas.openxmlformats.org/officeDocument/2006/relationships" xmlns:p="http://schemas.openxmlformats.org/presentationml/2006/main">
+  <p:cSld>
+    <p:spTree>
+      <p:nvGrpSpPr>
+        <p:cNvPr id="1" name=""/>
+        <p:cNvGrpSpPr/>
+        <p:nvPr/>
+      </p:nvGrpSpPr>
+      <p:grpSpPr>
+        <a:xfrm>
+          <a:off x="0" y="0"/>
+          <a:ext cx="0" cy="0"/>
+          <a:chOff x="0" y="0"/>
+          <a:chExt cx="0" cy="0"/>
+        </a:xfrm>
+      </p:grpSpPr>
+      <p:sp>
+        <p:nvSpPr>
+          <p:cNvPr id="2" name="Slide Image Placeholder 1"/>
+          <p:cNvSpPr>
+            <a:spLocks noGrp="1" noRot="1" noChangeAspect="1"/>
+          </p:cNvSpPr>
+          <p:nvPr>
+            <p:ph type="sldImg"/>
+          </p:nvPr>
+        </p:nvSpPr>
+        <p:spPr/>
+      </p:sp>
+      <p:sp>
+        <p:nvSpPr>
+          <p:cNvPr id="3" name="Notes Placeholder 2"/>
+          <p:cNvSpPr>
+            <a:spLocks noGrp="1"/>
+          </p:cNvSpPr>
+          <p:nvPr>
+            <p:ph type="body" idx="1"/>
+          </p:nvPr>
+        </p:nvSpPr>
+        <p:spPr/>
+        <p:txBody>
+          <a:bodyPr/>
+          <a:lstStyle/>
+          <a:p>
+            <a:r>
+              <a:rPr lang="en-US" dirty="0"/>
+              <a:t>Source: Qlik - Profit &amp; Loss, Detail statement, Jan-Sep 2026, same-store. Kept = department gross less the department's own expenses. Vehicle sales = new + used departments plus F&amp;I income and F&amp;I compensation. Other income not assigned to a department (doc fees, packs, factory money, holdback: $87.2M net) and management fees are left out of both.PLACE: Internal section, after the section break and before Internal ELR (Noah, Oct 25).
+Talk track: a lot of stores see internal as service making money off sales. It isn't: sales prices a car off its cost, within reason, so a fair internal charge is part of the deal, and the gross lands in the department that keeps the most of it. Example: if sales makes $500 of gross on a car, the commissions, pay and expense that come out of it leave far less than the same $500 of internal gross keeps in service and parts.
+Numbers (P&amp;L Detail, Jan-Sep 2026, same-store): fixed ops gross $188.8M, department profit $50.4M (27¢); people $85.7M (45¢). Vehicle sales gross (new $58.7M, used $43.8M, F&amp;I $76.6M) $179.1M; new and used department results $-23.0M and $-25.4M, less F&amp;I compensation $15.3M: $12.9M kept (7¢); people and commissions $110.4M (62¢). Caveat: $87.2M of net other income (doc fees, packs, factory money, holdback, interest) is booked outside the departments and most of it comes with vehicle sales; with it, vehicle sales keeps much more. The comparison is department against department, as the P&amp;L reports them.</a:t>
+            </a:r>
+            <a:endParaRPr lang="en-US" dirty="0"/>
+          </a:p>
+        </p:txBody>
+      </p:sp>
+      <p:sp>
+        <p:nvSpPr>
+          <p:cNvPr id="4" name="Slide Number Placeholder 3"/>
+          <p:cNvSpPr>
+            <a:spLocks noGrp="1"/>
+          </p:cNvSpPr>
+          <p:nvPr>
+            <p:ph type="sldNum" sz="quarter" idx="10"/>
+          </p:nvPr>
+        </p:nvSpPr>
+        <p:spPr/>
+        <p:txBody>
+          <a:bodyPr/>
+          <a:lstStyle/>
+          <a:p>
+            <a:fld id="{F7021451-1387-4CA6-816F-3879F97B5CBC}" type="slidenum">
+              <a:rPr lang="en-US"/>
+              <a:t>15</a:t>
+            </a:fld>
+            <a:endParaRPr lang="en-US"/>
+          </a:p>
+        </p:txBody>
+      </p:sp>
+    </p:spTree>
+    <p:extLst>
+      <p:ext uri="{BB962C8B-B14F-4D97-AF65-F5344CB8AC3E}">
+        <p14:creationId xmlns:p14="http://schemas.microsoft.com/office/powerpoint/2010/main" val="1024086991"/>
+      </p:ext>
+    </p:extLst>
+  </p:cSld>
+  <p:clrMapOvr>
+    <a:masterClrMapping/>
+  </p:clrMapOvr>
+</p:notes>
+</file>
+
 <file path=ppt/notesSlides/notesSlide2.xml><?xml version="1.0" encoding="utf-8"?>
 <p:notes xmlns:a="http://schemas.openxmlformats.org/drawingml/2006/main" xmlns:r="http://schemas.openxmlformats.org/officeDocument/2006/relationships" xmlns:p="http://schemas.openxmlformats.org/presentationml/2006/main">
   <p:cSld>
@@ -1051,7 +1142,8 @@
             <a:r>
               <a:rPr lang="en-US" dirty="0"/>
               <a:t>Source: Talking points: Service Manager Roundtable (Nov 15, 2024) and GM meeting decks (Jan and May 2026). Data: Qlik (Profit &amp; Loss, Closed Repair Orders, Productivity), Jan-Sep 2026 vs 2025, same-store, 33 stores, INEOS excluded.PLACE: Gross section, after the section break and before Total Gross Profit - Fixed Ops.
-Said: Roundtable slide 9 ('Service Department?'); Jan GM slide 58 (Sales and Service Relationship).</a:t>
+Said: Roundtable slide 9 ('Service Department?'); Jan GM slide 58 (Sales and Service Relationship).
+For the GMs who come from sales (Noah, Oct 25): service and parts keep far more of every gross dollar than vehicle sales does. Jan-Sep 2026, after each department's own expenses, fixed ops kept 27 cents of every gross dollar; new, used and F&amp;I together kept 7 cents (before doc fees, packs and factory money, which the P&amp;L books outside the departments). People cost 45 cents of every fixed ops gross dollar and 62 cents of every vehicle sales gross dollar. That is why paying yourself first, on internal work, matters: see Pay Yourself First at the start of the Internal section.</a:t>
             </a:r>
             <a:endParaRPr lang="en-US" dirty="0"/>
           </a:p>
@@ -1498,7 +1590,9 @@
             <a:r>
               <a:rPr lang="en-US" dirty="0"/>
               <a:t>Source: Talking points: Service Manager Roundtable (Nov 15, 2024) and GM meeting decks (Jan and May 2026). Data: Qlik (Profit &amp; Loss, Closed Repair Orders, Productivity), Jan-Sep 2026 vs 2025, same-store, 33 stores, INEOS excluded.PLACE: Opcode Benchmarks, after Road to the Sale and ahead of MPI Completion % (Noah, Oct 23: express visits and a complete MPI go hand in hand).
-Said: Jan GM slide 8 / May GM slide 7 (Express Service).</a:t>
+Talk track (Noah, Oct 25): go to the dentist for a quick cleaning and they don't tell you something is starting to look like a cavity: that is a disservice. Get cars in quickly, perform a complete, comprehensive MPI, and make the proper recommendations at that time. This is critical, and it can't be left to entry-level employees alone: someone with experience who knows what to look for has to be looking at these cars. Depending on work mix, maintenance can be 25% to 75% of a store's service. Many stores focus on getting more cars in the door, which is great, and we want both, but they miss the opportunities they already have. Processes and policies make sure we capitalize on them: every car, every time.
+The 52.5% customer-pay share of labor sale tile was dropped with the rewrite.
+Said: Jan GM slide 8 / May GM slide 7 (Express Service), reworded.</a:t>
             </a:r>
             <a:endParaRPr lang="en-US" dirty="0"/>
           </a:p>
@@ -5169,7 +5263,28 @@
                 <a:ea typeface="Inter" pitchFamily="34" charset="-122"/>
                 <a:cs typeface="Inter" pitchFamily="34" charset="-120"/>
               </a:rPr>
-              <a:t>Use scoreboarding and Teams to show techs where they stand</a:t>
+              <a:t>Use scoreboarding and teams to show techs where they stand</a:t>
+            </a:r>
+            <a:endParaRPr lang="en-US" sz="1800" dirty="0"/>
+          </a:p>
+          <a:p>
+            <a:pPr marL="228600" indent="-228600">
+              <a:spcAft>
+                <a:spcPts val="800"/>
+              </a:spcAft>
+              <a:buSzPct val="100000"/>
+              <a:buChar char="•"/>
+            </a:pPr>
+            <a:r>
+              <a:rPr lang="en-US" sz="1800" dirty="0">
+                <a:solidFill>
+                  <a:srgbClr val="1A1A1A"/>
+                </a:solidFill>
+                <a:latin typeface="Inter" pitchFamily="34" charset="0"/>
+                <a:ea typeface="Inter" pitchFamily="34" charset="-122"/>
+                <a:cs typeface="Inter" pitchFamily="34" charset="-120"/>
+              </a:rPr>
+              <a:t>Set clear objectives and give feedback: no one can be held to a goal they don't know. We're responsible for the knowing</a:t>
             </a:r>
             <a:endParaRPr lang="en-US" sz="1800" dirty="0"/>
           </a:p>
@@ -5528,7 +5643,7 @@
                 <a:ea typeface="Inter" pitchFamily="34" charset="-122"/>
                 <a:cs typeface="Inter" pitchFamily="34" charset="-120"/>
               </a:rPr>
-              <a:t>The ask: show every tech their own proficiency every week. The best techs in each store already prove 85% is possible.</a:t>
+              <a:t>The ask: set clear goals, show every tech where they stand every week, and give feedback. The best techs in each store already prove 85% is possible.</a:t>
             </a:r>
             <a:endParaRPr lang="en-US" sz="1600" dirty="0"/>
           </a:p>
@@ -6236,6 +6351,721 @@
 </p:sld>
 </file>
 
+<file path=ppt/slides/slide15.xml><?xml version="1.0" encoding="utf-8"?>
+<p:sld xmlns:a="http://schemas.openxmlformats.org/drawingml/2006/main" xmlns:r="http://schemas.openxmlformats.org/officeDocument/2006/relationships" xmlns:p="http://schemas.openxmlformats.org/presentationml/2006/main">
+  <p:cSld name="Slide 15">
+    <p:bg>
+      <p:bgPr>
+        <a:solidFill>
+          <a:srgbClr val="EDEDED"/>
+        </a:solidFill>
+      </p:bgPr>
+    </p:bg>
+    <p:spTree>
+      <p:nvGrpSpPr>
+        <p:cNvPr id="1" name=""/>
+        <p:cNvGrpSpPr/>
+        <p:nvPr/>
+      </p:nvGrpSpPr>
+      <p:grpSpPr>
+        <a:xfrm>
+          <a:off x="0" y="0"/>
+          <a:ext cx="0" cy="0"/>
+          <a:chOff x="0" y="0"/>
+          <a:chExt cx="0" cy="0"/>
+        </a:xfrm>
+      </p:grpSpPr>
+      <p:sp>
+        <p:nvSpPr>
+          <p:cNvPr id="2" name="Shape 0"/>
+          <p:cNvSpPr/>
+          <p:nvPr/>
+        </p:nvSpPr>
+        <p:spPr>
+          <a:xfrm>
+            <a:off x="457200" y="402336"/>
+            <a:ext cx="50292" cy="192024"/>
+          </a:xfrm>
+          <a:prstGeom prst="rect">
+            <a:avLst/>
+          </a:prstGeom>
+          <a:solidFill>
+            <a:srgbClr val="2587C5"/>
+          </a:solidFill>
+          <a:ln/>
+        </p:spPr>
+      </p:sp>
+      <p:sp>
+        <p:nvSpPr>
+          <p:cNvPr id="3" name="Text 1"/>
+          <p:cNvSpPr txBox="1"/>
+          <p:nvPr/>
+        </p:nvSpPr>
+        <p:spPr>
+          <a:xfrm>
+            <a:off x="621792" y="338328"/>
+            <a:ext cx="8229600" cy="274320"/>
+          </a:xfrm>
+          <a:prstGeom prst="rect">
+            <a:avLst/>
+          </a:prstGeom>
+          <a:noFill/>
+          <a:ln/>
+        </p:spPr>
+        <p:txBody>
+          <a:bodyPr wrap="square" lIns="0" tIns="0" rIns="0" bIns="0" rtlCol="0" anchor="ctr"/>
+          <a:lstStyle/>
+          <a:p>
+            <a:pPr indent="0" marL="0">
+              <a:buNone/>
+            </a:pPr>
+            <a:r>
+              <a:rPr lang="en-US" sz="1400" b="1" spc="110" kern="0" dirty="0">
+                <a:solidFill>
+                  <a:srgbClr val="595959"/>
+                </a:solidFill>
+                <a:latin typeface="Inter" pitchFamily="34" charset="0"/>
+                <a:ea typeface="Inter" pitchFamily="34" charset="-122"/>
+                <a:cs typeface="Inter" pitchFamily="34" charset="-120"/>
+              </a:rPr>
+              <a:t>INTERNAL</a:t>
+            </a:r>
+            <a:endParaRPr lang="en-US" sz="1400" dirty="0"/>
+          </a:p>
+        </p:txBody>
+      </p:sp>
+      <p:sp>
+        <p:nvSpPr>
+          <p:cNvPr id="4" name="Text 2"/>
+          <p:cNvSpPr txBox="1"/>
+          <p:nvPr/>
+        </p:nvSpPr>
+        <p:spPr>
+          <a:xfrm>
+            <a:off x="457200" y="640080"/>
+            <a:ext cx="11338560" cy="502920"/>
+          </a:xfrm>
+          <a:prstGeom prst="rect">
+            <a:avLst/>
+          </a:prstGeom>
+          <a:noFill/>
+          <a:ln/>
+        </p:spPr>
+        <p:txBody>
+          <a:bodyPr wrap="square" lIns="0" tIns="0" rIns="0" bIns="0" rtlCol="0" anchor="ctr"/>
+          <a:lstStyle/>
+          <a:p>
+            <a:pPr indent="0" marL="0">
+              <a:buNone/>
+            </a:pPr>
+            <a:r>
+              <a:rPr lang="en-US" sz="2800" dirty="0">
+                <a:solidFill>
+                  <a:srgbClr val="1A1A1A"/>
+                </a:solidFill>
+                <a:latin typeface="Inter" pitchFamily="34" charset="0"/>
+                <a:ea typeface="Inter" pitchFamily="34" charset="-122"/>
+                <a:cs typeface="Inter" pitchFamily="34" charset="-120"/>
+              </a:rPr>
+              <a:t>Pay Yourself First</a:t>
+            </a:r>
+            <a:endParaRPr lang="en-US" sz="2800" dirty="0"/>
+          </a:p>
+        </p:txBody>
+      </p:sp>
+      <p:sp>
+        <p:nvSpPr>
+          <p:cNvPr id="5" name="Shape 3"/>
+          <p:cNvSpPr/>
+          <p:nvPr/>
+        </p:nvSpPr>
+        <p:spPr>
+          <a:xfrm>
+            <a:off x="457200" y="1207008"/>
+            <a:ext cx="6400800" cy="4782312"/>
+          </a:xfrm>
+          <a:prstGeom prst="rect">
+            <a:avLst/>
+          </a:prstGeom>
+          <a:solidFill>
+            <a:srgbClr val="FFFFFF"/>
+          </a:solidFill>
+          <a:ln/>
+        </p:spPr>
+      </p:sp>
+      <p:sp>
+        <p:nvSpPr>
+          <p:cNvPr id="6" name="Shape 4"/>
+          <p:cNvSpPr/>
+          <p:nvPr/>
+        </p:nvSpPr>
+        <p:spPr>
+          <a:xfrm>
+            <a:off x="7022592" y="1207008"/>
+            <a:ext cx="4709160" cy="4782312"/>
+          </a:xfrm>
+          <a:prstGeom prst="rect">
+            <a:avLst/>
+          </a:prstGeom>
+          <a:solidFill>
+            <a:srgbClr val="FFFFFF"/>
+          </a:solidFill>
+          <a:ln/>
+        </p:spPr>
+      </p:sp>
+      <p:sp>
+        <p:nvSpPr>
+          <p:cNvPr id="7" name="Text 5"/>
+          <p:cNvSpPr txBox="1"/>
+          <p:nvPr/>
+        </p:nvSpPr>
+        <p:spPr>
+          <a:xfrm>
+            <a:off x="7269480" y="1371600"/>
+            <a:ext cx="4297680" cy="310896"/>
+          </a:xfrm>
+          <a:prstGeom prst="rect">
+            <a:avLst/>
+          </a:prstGeom>
+          <a:noFill/>
+          <a:ln/>
+        </p:spPr>
+        <p:txBody>
+          <a:bodyPr wrap="square" lIns="0" tIns="0" rIns="0" bIns="0" rtlCol="0" anchor="ctr"/>
+          <a:lstStyle/>
+          <a:p>
+            <a:pPr indent="0" marL="0">
+              <a:buNone/>
+            </a:pPr>
+            <a:r>
+              <a:rPr lang="en-US" sz="1400" b="1" spc="100" kern="0" dirty="0">
+                <a:solidFill>
+                  <a:srgbClr val="0B2C4A"/>
+                </a:solidFill>
+                <a:latin typeface="Inter" pitchFamily="34" charset="0"/>
+                <a:ea typeface="Inter" pitchFamily="34" charset="-122"/>
+                <a:cs typeface="Inter" pitchFamily="34" charset="-120"/>
+              </a:rPr>
+              <a:t>WHERE WE ARE · JAN–SEP 2026</a:t>
+            </a:r>
+            <a:endParaRPr lang="en-US" sz="1400" dirty="0"/>
+          </a:p>
+        </p:txBody>
+      </p:sp>
+      <p:sp>
+        <p:nvSpPr>
+          <p:cNvPr id="8" name="Shape 6"/>
+          <p:cNvSpPr/>
+          <p:nvPr/>
+        </p:nvSpPr>
+        <p:spPr>
+          <a:xfrm>
+            <a:off x="7269480" y="1737360"/>
+            <a:ext cx="4224528" cy="10973"/>
+          </a:xfrm>
+          <a:prstGeom prst="rect">
+            <a:avLst/>
+          </a:prstGeom>
+          <a:solidFill>
+            <a:srgbClr val="D9D9D9"/>
+          </a:solidFill>
+          <a:ln/>
+        </p:spPr>
+      </p:sp>
+      <p:sp>
+        <p:nvSpPr>
+          <p:cNvPr id="9" name="Text 7"/>
+          <p:cNvSpPr txBox="1"/>
+          <p:nvPr/>
+        </p:nvSpPr>
+        <p:spPr>
+          <a:xfrm>
+            <a:off x="713232" y="1417320"/>
+            <a:ext cx="5897880" cy="4434840"/>
+          </a:xfrm>
+          <a:prstGeom prst="rect">
+            <a:avLst/>
+          </a:prstGeom>
+          <a:noFill/>
+          <a:ln/>
+        </p:spPr>
+        <p:txBody>
+          <a:bodyPr wrap="square" lIns="0" tIns="0" rIns="0" bIns="0" rtlCol="0" anchor="t"/>
+          <a:lstStyle/>
+          <a:p>
+            <a:pPr marL="228600" indent="-228600">
+              <a:spcAft>
+                <a:spcPts val="800"/>
+              </a:spcAft>
+              <a:buSzPct val="100000"/>
+              <a:buChar char="•"/>
+            </a:pPr>
+            <a:r>
+              <a:rPr lang="en-US" sz="1800" dirty="0">
+                <a:solidFill>
+                  <a:srgbClr val="1A1A1A"/>
+                </a:solidFill>
+                <a:latin typeface="Inter" pitchFamily="34" charset="0"/>
+                <a:ea typeface="Inter" pitchFamily="34" charset="-122"/>
+                <a:cs typeface="Inter" pitchFamily="34" charset="-120"/>
+              </a:rPr>
+              <a:t>Internal work isn't service making money off sales: it is gross the store earns on its own cars</a:t>
+            </a:r>
+            <a:endParaRPr lang="en-US" sz="1800" dirty="0"/>
+          </a:p>
+          <a:p>
+            <a:pPr marL="228600" indent="-228600">
+              <a:spcAft>
+                <a:spcPts val="800"/>
+              </a:spcAft>
+              <a:buSzPct val="100000"/>
+              <a:buChar char="•"/>
+            </a:pPr>
+            <a:r>
+              <a:rPr lang="en-US" sz="1800" dirty="0">
+                <a:solidFill>
+                  <a:srgbClr val="1A1A1A"/>
+                </a:solidFill>
+                <a:latin typeface="Inter" pitchFamily="34" charset="0"/>
+                <a:ea typeface="Inter" pitchFamily="34" charset="-122"/>
+                <a:cs typeface="Inter" pitchFamily="34" charset="-120"/>
+              </a:rPr>
+              <a:t>Sales prices a car off what it costs, within reason. A fair internal charge is part of that cost</a:t>
+            </a:r>
+            <a:endParaRPr lang="en-US" sz="1800" dirty="0"/>
+          </a:p>
+          <a:p>
+            <a:pPr marL="228600" indent="-228600">
+              <a:spcAft>
+                <a:spcPts val="800"/>
+              </a:spcAft>
+              <a:buSzPct val="100000"/>
+              <a:buChar char="•"/>
+            </a:pPr>
+            <a:r>
+              <a:rPr lang="en-US" sz="1800" dirty="0">
+                <a:solidFill>
+                  <a:srgbClr val="1A1A1A"/>
+                </a:solidFill>
+                <a:latin typeface="Inter" pitchFamily="34" charset="0"/>
+                <a:ea typeface="Inter" pitchFamily="34" charset="-122"/>
+                <a:cs typeface="Inter" pitchFamily="34" charset="-120"/>
+              </a:rPr>
+              <a:t>Service and parts keep far more of every gross dollar than vehicle sales does</a:t>
+            </a:r>
+            <a:endParaRPr lang="en-US" sz="1800" dirty="0"/>
+          </a:p>
+          <a:p>
+            <a:pPr marL="228600" indent="-228600">
+              <a:spcAft>
+                <a:spcPts val="800"/>
+              </a:spcAft>
+              <a:buSzPct val="100000"/>
+              <a:buChar char="•"/>
+            </a:pPr>
+            <a:r>
+              <a:rPr lang="en-US" sz="1800" dirty="0">
+                <a:solidFill>
+                  <a:srgbClr val="1A1A1A"/>
+                </a:solidFill>
+                <a:latin typeface="Inter" pitchFamily="34" charset="0"/>
+                <a:ea typeface="Inter" pitchFamily="34" charset="-122"/>
+                <a:cs typeface="Inter" pitchFamily="34" charset="-120"/>
+              </a:rPr>
+              <a:t>Every gross dollar in sales carries commissions, pay and expense that fixed ops doesn't</a:t>
+            </a:r>
+            <a:endParaRPr lang="en-US" sz="1800" dirty="0"/>
+          </a:p>
+          <a:p>
+            <a:pPr marL="228600" indent="-228600">
+              <a:spcAft>
+                <a:spcPts val="800"/>
+              </a:spcAft>
+              <a:buSzPct val="100000"/>
+              <a:buChar char="•"/>
+            </a:pPr>
+            <a:r>
+              <a:rPr lang="en-US" sz="1800" dirty="0">
+                <a:solidFill>
+                  <a:srgbClr val="1A1A1A"/>
+                </a:solidFill>
+                <a:latin typeface="Inter" pitchFamily="34" charset="0"/>
+                <a:ea typeface="Inter" pitchFamily="34" charset="-122"/>
+                <a:cs typeface="Inter" pitchFamily="34" charset="-120"/>
+              </a:rPr>
+              <a:t>Price internal labor and parts like customer pay: pay yourself first</a:t>
+            </a:r>
+            <a:endParaRPr lang="en-US" sz="1800" dirty="0"/>
+          </a:p>
+        </p:txBody>
+      </p:sp>
+      <p:sp>
+        <p:nvSpPr>
+          <p:cNvPr id="10" name="Shape 8"/>
+          <p:cNvSpPr/>
+          <p:nvPr/>
+        </p:nvSpPr>
+        <p:spPr>
+          <a:xfrm>
+            <a:off x="7269480" y="1920240"/>
+            <a:ext cx="54864" cy="1112520"/>
+          </a:xfrm>
+          <a:prstGeom prst="rect">
+            <a:avLst/>
+          </a:prstGeom>
+          <a:solidFill>
+            <a:srgbClr val="12A566"/>
+          </a:solidFill>
+          <a:ln/>
+        </p:spPr>
+      </p:sp>
+      <p:sp>
+        <p:nvSpPr>
+          <p:cNvPr id="11" name="Text 9"/>
+          <p:cNvSpPr txBox="1"/>
+          <p:nvPr/>
+        </p:nvSpPr>
+        <p:spPr>
+          <a:xfrm>
+            <a:off x="7452360" y="1874520"/>
+            <a:ext cx="4023360" cy="566928"/>
+          </a:xfrm>
+          <a:prstGeom prst="rect">
+            <a:avLst/>
+          </a:prstGeom>
+          <a:noFill/>
+          <a:ln/>
+        </p:spPr>
+        <p:txBody>
+          <a:bodyPr wrap="square" lIns="0" tIns="0" rIns="0" bIns="0" rtlCol="0" anchor="ctr">
+            <a:normAutofit/>
+          </a:bodyPr>
+          <a:lstStyle/>
+          <a:p>
+            <a:pPr indent="0" marL="0">
+              <a:buNone/>
+            </a:pPr>
+            <a:r>
+              <a:rPr lang="en-US" sz="3000" b="1" dirty="0">
+                <a:solidFill>
+                  <a:srgbClr val="0B7A4A"/>
+                </a:solidFill>
+                <a:latin typeface="Inter" pitchFamily="34" charset="0"/>
+                <a:ea typeface="Inter" pitchFamily="34" charset="-122"/>
+                <a:cs typeface="Inter" pitchFamily="34" charset="-120"/>
+              </a:rPr>
+              <a:t>27¢</a:t>
+            </a:r>
+            <a:endParaRPr lang="en-US" sz="3000" dirty="0"/>
+          </a:p>
+        </p:txBody>
+      </p:sp>
+      <p:sp>
+        <p:nvSpPr>
+          <p:cNvPr id="12" name="Text 10"/>
+          <p:cNvSpPr txBox="1"/>
+          <p:nvPr/>
+        </p:nvSpPr>
+        <p:spPr>
+          <a:xfrm>
+            <a:off x="7452360" y="2441448"/>
+            <a:ext cx="4023360" cy="609600"/>
+          </a:xfrm>
+          <a:prstGeom prst="rect">
+            <a:avLst/>
+          </a:prstGeom>
+          <a:noFill/>
+          <a:ln/>
+        </p:spPr>
+        <p:txBody>
+          <a:bodyPr wrap="square" lIns="0" tIns="0" rIns="0" bIns="0" rtlCol="0" anchor="t"/>
+          <a:lstStyle/>
+          <a:p>
+            <a:pPr indent="0" marL="0">
+              <a:buNone/>
+            </a:pPr>
+            <a:r>
+              <a:rPr lang="en-US" sz="1400" dirty="0">
+                <a:solidFill>
+                  <a:srgbClr val="1A1A1A"/>
+                </a:solidFill>
+                <a:latin typeface="Inter" pitchFamily="34" charset="0"/>
+                <a:ea typeface="Inter" pitchFamily="34" charset="-122"/>
+                <a:cs typeface="Inter" pitchFamily="34" charset="-120"/>
+              </a:rPr>
+              <a:t>Fixed ops keeps of every gross dollar after its own expenses: $50.4M of $188.8M.</a:t>
+            </a:r>
+            <a:endParaRPr lang="en-US" sz="1400" dirty="0"/>
+          </a:p>
+        </p:txBody>
+      </p:sp>
+      <p:sp>
+        <p:nvSpPr>
+          <p:cNvPr id="13" name="Shape 11"/>
+          <p:cNvSpPr/>
+          <p:nvPr/>
+        </p:nvSpPr>
+        <p:spPr>
+          <a:xfrm>
+            <a:off x="7269480" y="3261360"/>
+            <a:ext cx="54864" cy="1112520"/>
+          </a:xfrm>
+          <a:prstGeom prst="rect">
+            <a:avLst/>
+          </a:prstGeom>
+          <a:solidFill>
+            <a:srgbClr val="2587C5"/>
+          </a:solidFill>
+          <a:ln/>
+        </p:spPr>
+      </p:sp>
+      <p:sp>
+        <p:nvSpPr>
+          <p:cNvPr id="14" name="Text 12"/>
+          <p:cNvSpPr txBox="1"/>
+          <p:nvPr/>
+        </p:nvSpPr>
+        <p:spPr>
+          <a:xfrm>
+            <a:off x="7452360" y="3215640"/>
+            <a:ext cx="4023360" cy="566928"/>
+          </a:xfrm>
+          <a:prstGeom prst="rect">
+            <a:avLst/>
+          </a:prstGeom>
+          <a:noFill/>
+          <a:ln/>
+        </p:spPr>
+        <p:txBody>
+          <a:bodyPr wrap="square" lIns="0" tIns="0" rIns="0" bIns="0" rtlCol="0" anchor="ctr">
+            <a:normAutofit/>
+          </a:bodyPr>
+          <a:lstStyle/>
+          <a:p>
+            <a:pPr indent="0" marL="0">
+              <a:buNone/>
+            </a:pPr>
+            <a:r>
+              <a:rPr lang="en-US" sz="3000" b="1" dirty="0">
+                <a:solidFill>
+                  <a:srgbClr val="0B2C4A"/>
+                </a:solidFill>
+                <a:latin typeface="Inter" pitchFamily="34" charset="0"/>
+                <a:ea typeface="Inter" pitchFamily="34" charset="-122"/>
+                <a:cs typeface="Inter" pitchFamily="34" charset="-120"/>
+              </a:rPr>
+              <a:t>7¢</a:t>
+            </a:r>
+            <a:endParaRPr lang="en-US" sz="3000" dirty="0"/>
+          </a:p>
+        </p:txBody>
+      </p:sp>
+      <p:sp>
+        <p:nvSpPr>
+          <p:cNvPr id="15" name="Text 13"/>
+          <p:cNvSpPr txBox="1"/>
+          <p:nvPr/>
+        </p:nvSpPr>
+        <p:spPr>
+          <a:xfrm>
+            <a:off x="7452360" y="3782568"/>
+            <a:ext cx="4023360" cy="609600"/>
+          </a:xfrm>
+          <a:prstGeom prst="rect">
+            <a:avLst/>
+          </a:prstGeom>
+          <a:noFill/>
+          <a:ln/>
+        </p:spPr>
+        <p:txBody>
+          <a:bodyPr wrap="square" lIns="0" tIns="0" rIns="0" bIns="0" rtlCol="0" anchor="t"/>
+          <a:lstStyle/>
+          <a:p>
+            <a:pPr indent="0" marL="0">
+              <a:buNone/>
+            </a:pPr>
+            <a:r>
+              <a:rPr lang="en-US" sz="1400" dirty="0">
+                <a:solidFill>
+                  <a:srgbClr val="1A1A1A"/>
+                </a:solidFill>
+                <a:latin typeface="Inter" pitchFamily="34" charset="0"/>
+                <a:ea typeface="Inter" pitchFamily="34" charset="-122"/>
+                <a:cs typeface="Inter" pitchFamily="34" charset="-120"/>
+              </a:rPr>
+              <a:t>New, used and F&amp;I keep of every gross dollar: $12.9M of $179.1M, before other income such as doc fees, packs and factory money.</a:t>
+            </a:r>
+            <a:endParaRPr lang="en-US" sz="1400" dirty="0"/>
+          </a:p>
+        </p:txBody>
+      </p:sp>
+      <p:sp>
+        <p:nvSpPr>
+          <p:cNvPr id="16" name="Shape 14"/>
+          <p:cNvSpPr/>
+          <p:nvPr/>
+        </p:nvSpPr>
+        <p:spPr>
+          <a:xfrm>
+            <a:off x="7269480" y="4602480"/>
+            <a:ext cx="54864" cy="1112520"/>
+          </a:xfrm>
+          <a:prstGeom prst="rect">
+            <a:avLst/>
+          </a:prstGeom>
+          <a:solidFill>
+            <a:srgbClr val="2587C5"/>
+          </a:solidFill>
+          <a:ln/>
+        </p:spPr>
+      </p:sp>
+      <p:sp>
+        <p:nvSpPr>
+          <p:cNvPr id="17" name="Text 15"/>
+          <p:cNvSpPr txBox="1"/>
+          <p:nvPr/>
+        </p:nvSpPr>
+        <p:spPr>
+          <a:xfrm>
+            <a:off x="7452360" y="4556760"/>
+            <a:ext cx="4023360" cy="566928"/>
+          </a:xfrm>
+          <a:prstGeom prst="rect">
+            <a:avLst/>
+          </a:prstGeom>
+          <a:noFill/>
+          <a:ln/>
+        </p:spPr>
+        <p:txBody>
+          <a:bodyPr wrap="square" lIns="0" tIns="0" rIns="0" bIns="0" rtlCol="0" anchor="ctr">
+            <a:normAutofit/>
+          </a:bodyPr>
+          <a:lstStyle/>
+          <a:p>
+            <a:pPr indent="0" marL="0">
+              <a:buNone/>
+            </a:pPr>
+            <a:r>
+              <a:rPr lang="en-US" sz="3000" b="1" dirty="0">
+                <a:solidFill>
+                  <a:srgbClr val="0B2C4A"/>
+                </a:solidFill>
+                <a:latin typeface="Inter" pitchFamily="34" charset="0"/>
+                <a:ea typeface="Inter" pitchFamily="34" charset="-122"/>
+                <a:cs typeface="Inter" pitchFamily="34" charset="-120"/>
+              </a:rPr>
+              <a:t>45¢ vs 62¢</a:t>
+            </a:r>
+            <a:endParaRPr lang="en-US" sz="3000" dirty="0"/>
+          </a:p>
+        </p:txBody>
+      </p:sp>
+      <p:sp>
+        <p:nvSpPr>
+          <p:cNvPr id="18" name="Text 16"/>
+          <p:cNvSpPr txBox="1"/>
+          <p:nvPr/>
+        </p:nvSpPr>
+        <p:spPr>
+          <a:xfrm>
+            <a:off x="7452360" y="5123688"/>
+            <a:ext cx="4023360" cy="609600"/>
+          </a:xfrm>
+          <a:prstGeom prst="rect">
+            <a:avLst/>
+          </a:prstGeom>
+          <a:noFill/>
+          <a:ln/>
+        </p:spPr>
+        <p:txBody>
+          <a:bodyPr wrap="square" lIns="0" tIns="0" rIns="0" bIns="0" rtlCol="0" anchor="t"/>
+          <a:lstStyle/>
+          <a:p>
+            <a:pPr indent="0" marL="0">
+              <a:buNone/>
+            </a:pPr>
+            <a:r>
+              <a:rPr lang="en-US" sz="1400" dirty="0">
+                <a:solidFill>
+                  <a:srgbClr val="1A1A1A"/>
+                </a:solidFill>
+                <a:latin typeface="Inter" pitchFamily="34" charset="0"/>
+                <a:ea typeface="Inter" pitchFamily="34" charset="-122"/>
+                <a:cs typeface="Inter" pitchFamily="34" charset="-120"/>
+              </a:rPr>
+              <a:t>Of every gross dollar spent on people and commissions: fixed ops vs vehicle sales.</a:t>
+            </a:r>
+            <a:endParaRPr lang="en-US" sz="1400" dirty="0"/>
+          </a:p>
+        </p:txBody>
+      </p:sp>
+      <p:sp>
+        <p:nvSpPr>
+          <p:cNvPr id="19" name="Shape 17"/>
+          <p:cNvSpPr/>
+          <p:nvPr/>
+        </p:nvSpPr>
+        <p:spPr>
+          <a:xfrm>
+            <a:off x="457200" y="6126480"/>
+            <a:ext cx="11274552" cy="615696"/>
+          </a:xfrm>
+          <a:prstGeom prst="rect">
+            <a:avLst/>
+          </a:prstGeom>
+          <a:solidFill>
+            <a:srgbClr val="EDF4FA"/>
+          </a:solidFill>
+          <a:ln/>
+        </p:spPr>
+      </p:sp>
+      <p:sp>
+        <p:nvSpPr>
+          <p:cNvPr id="20" name="Text 18"/>
+          <p:cNvSpPr txBox="1"/>
+          <p:nvPr/>
+        </p:nvSpPr>
+        <p:spPr>
+          <a:xfrm>
+            <a:off x="658368" y="6144768"/>
+            <a:ext cx="10927080" cy="579120"/>
+          </a:xfrm>
+          <a:prstGeom prst="rect">
+            <a:avLst/>
+          </a:prstGeom>
+          <a:noFill/>
+          <a:ln/>
+        </p:spPr>
+        <p:txBody>
+          <a:bodyPr wrap="square" lIns="0" tIns="0" rIns="0" bIns="0" rtlCol="0" anchor="ctr"/>
+          <a:lstStyle/>
+          <a:p>
+            <a:pPr indent="0" marL="0">
+              <a:buNone/>
+            </a:pPr>
+            <a:r>
+              <a:rPr lang="en-US" sz="1600" b="1" dirty="0">
+                <a:solidFill>
+                  <a:srgbClr val="0B2C4A"/>
+                </a:solidFill>
+                <a:latin typeface="Inter" pitchFamily="34" charset="0"/>
+                <a:ea typeface="Inter" pitchFamily="34" charset="-122"/>
+                <a:cs typeface="Inter" pitchFamily="34" charset="-120"/>
+              </a:rPr>
+              <a:t>The ask: hold internal labor and parts margins to customer pay. Every internal dollar is gross in the department that keeps the most of it.</a:t>
+            </a:r>
+            <a:endParaRPr lang="en-US" sz="1600" dirty="0"/>
+          </a:p>
+        </p:txBody>
+      </p:sp>
+    </p:spTree>
+  </p:cSld>
+  <p:clrMapOvr>
+    <a:masterClrMapping/>
+  </p:clrMapOvr>
+</p:sld>
+</file>
+
 <file path=ppt/slides/slide2.xml><?xml version="1.0" encoding="utf-8"?>
 <p:sld xmlns:a="http://schemas.openxmlformats.org/drawingml/2006/main" xmlns:r="http://schemas.openxmlformats.org/officeDocument/2006/relationships" xmlns:p="http://schemas.openxmlformats.org/presentationml/2006/main">
   <p:cSld name="Slide 2">
@@ -9706,7 +10536,7 @@
                 <a:ea typeface="Inter" pitchFamily="34" charset="-122"/>
                 <a:cs typeface="Inter" pitchFamily="34" charset="-120"/>
               </a:rPr>
-              <a:t>Express Service</a:t>
+              <a:t>Basic Maintenance Service</a:t>
             </a:r>
             <a:endParaRPr lang="en-US" sz="2800" dirty="0"/>
           </a:p>
@@ -9848,7 +10678,7 @@
                 <a:ea typeface="Inter" pitchFamily="34" charset="-122"/>
                 <a:cs typeface="Inter" pitchFamily="34" charset="-120"/>
               </a:rPr>
-              <a:t>Express service is the #1 retention driver and business builder</a:t>
+              <a:t>On-demand maintenance appointments: get cars in quickly</a:t>
             </a:r>
             <a:endParaRPr lang="en-US" sz="1800" dirty="0"/>
           </a:p>
@@ -9869,7 +10699,7 @@
                 <a:ea typeface="Inter" pitchFamily="34" charset="-122"/>
                 <a:cs typeface="Inter" pitchFamily="34" charset="-120"/>
               </a:rPr>
-              <a:t>75% of your business includes some type of maintenance work</a:t>
+              <a:t>A complete, comprehensive multi-point inspection on every visit, with the right recommendations at that time</a:t>
             </a:r>
             <a:endParaRPr lang="en-US" sz="1800" dirty="0"/>
           </a:p>
@@ -9890,7 +10720,7 @@
                 <a:ea typeface="Inter" pitchFamily="34" charset="-122"/>
                 <a:cs typeface="Inter" pitchFamily="34" charset="-120"/>
               </a:rPr>
-              <a:t>Express bays are simply MPI bays. Unknown dollars are worth 2.5 times the known.</a:t>
+              <a:t>Experienced eyes on every car: entry-level staff alone won't know what to look for</a:t>
             </a:r>
             <a:endParaRPr lang="en-US" sz="1800" dirty="0"/>
           </a:p>
@@ -9911,7 +10741,7 @@
                 <a:ea typeface="Inter" pitchFamily="34" charset="-122"/>
                 <a:cs typeface="Inter" pitchFamily="34" charset="-120"/>
               </a:rPr>
-              <a:t>Minimize labor costs for lower-skilled work</a:t>
+              <a:t>A quick cleaning that misses the cavity starting to form is a disservice to the customer</a:t>
             </a:r>
             <a:endParaRPr lang="en-US" sz="1800" dirty="0"/>
           </a:p>
@@ -9932,7 +10762,28 @@
                 <a:ea typeface="Inter" pitchFamily="34" charset="-122"/>
                 <a:cs typeface="Inter" pitchFamily="34" charset="-120"/>
               </a:rPr>
-              <a:t>If you don't help them, someone else will</a:t>
+              <a:t>More cars in the door is great, and we want both. Capitalize on the opportunities we already have</a:t>
+            </a:r>
+            <a:endParaRPr lang="en-US" sz="1800" dirty="0"/>
+          </a:p>
+          <a:p>
+            <a:pPr marL="228600" indent="-228600">
+              <a:spcAft>
+                <a:spcPts val="800"/>
+              </a:spcAft>
+              <a:buSzPct val="100000"/>
+              <a:buChar char="•"/>
+            </a:pPr>
+            <a:r>
+              <a:rPr lang="en-US" sz="1800" dirty="0">
+                <a:solidFill>
+                  <a:srgbClr val="1A1A1A"/>
+                </a:solidFill>
+                <a:latin typeface="Inter" pitchFamily="34" charset="0"/>
+                <a:ea typeface="Inter" pitchFamily="34" charset="-122"/>
+                <a:cs typeface="Inter" pitchFamily="34" charset="-120"/>
+              </a:rPr>
+              <a:t>Processes and policies that make it happen: every car, every time</a:t>
             </a:r>
             <a:endParaRPr lang="en-US" sz="1800" dirty="0"/>
           </a:p>
@@ -9947,7 +10798,7 @@
         <p:spPr>
           <a:xfrm>
             <a:off x="7269480" y="1920240"/>
-            <a:ext cx="54864" cy="1783080"/>
+            <a:ext cx="54864" cy="3794760"/>
           </a:xfrm>
           <a:prstGeom prst="rect">
             <a:avLst/>
@@ -10008,7 +10859,7 @@
         <p:spPr>
           <a:xfrm>
             <a:off x="7452360" y="2441448"/>
-            <a:ext cx="4023360" cy="1280160"/>
+            <a:ext cx="4023360" cy="3291840"/>
           </a:xfrm>
           <a:prstGeom prst="rect">
             <a:avLst/>
@@ -10032,7 +10883,7 @@
                 <a:ea typeface="Inter" pitchFamily="34" charset="-122"/>
                 <a:cs typeface="Inter" pitchFamily="34" charset="-120"/>
               </a:rPr>
-              <a:t>Maintenance share of customer-pay labor; repair 30.5%.</a:t>
+              <a:t>Maintenance share of customer-pay labor across the group; repair 30.5%. Depending on work mix, maintenance runs 25% to 75% of a store's service.</a:t>
             </a:r>
             <a:endParaRPr lang="en-US" sz="1400" dirty="0"/>
           </a:p>
@@ -10046,14 +10897,14 @@
         </p:nvSpPr>
         <p:spPr>
           <a:xfrm>
-            <a:off x="7269480" y="3931920"/>
-            <a:ext cx="54864" cy="1783080"/>
-          </a:xfrm>
-          <a:prstGeom prst="rect">
-            <a:avLst/>
-          </a:prstGeom>
-          <a:solidFill>
-            <a:srgbClr val="2587C5"/>
+            <a:off x="457200" y="6126480"/>
+            <a:ext cx="11274552" cy="615696"/>
+          </a:xfrm>
+          <a:prstGeom prst="rect">
+            <a:avLst/>
+          </a:prstGeom>
+          <a:solidFill>
+            <a:srgbClr val="EDF4FA"/>
           </a:solidFill>
           <a:ln/>
         </p:spPr>
@@ -10066,26 +10917,24 @@
         </p:nvSpPr>
         <p:spPr>
           <a:xfrm>
-            <a:off x="7452360" y="3886200"/>
-            <a:ext cx="4023360" cy="566928"/>
-          </a:xfrm>
-          <a:prstGeom prst="rect">
-            <a:avLst/>
-          </a:prstGeom>
-          <a:noFill/>
-          <a:ln/>
-        </p:spPr>
-        <p:txBody>
-          <a:bodyPr wrap="square" lIns="0" tIns="0" rIns="0" bIns="0" rtlCol="0" anchor="ctr">
-            <a:normAutofit/>
-          </a:bodyPr>
-          <a:lstStyle/>
-          <a:p>
-            <a:pPr indent="0" marL="0">
-              <a:buNone/>
-            </a:pPr>
-            <a:r>
-              <a:rPr lang="en-US" sz="3000" b="1" dirty="0">
+            <a:off x="658368" y="6144768"/>
+            <a:ext cx="10927080" cy="579120"/>
+          </a:xfrm>
+          <a:prstGeom prst="rect">
+            <a:avLst/>
+          </a:prstGeom>
+          <a:noFill/>
+          <a:ln/>
+        </p:spPr>
+        <p:txBody>
+          <a:bodyPr wrap="square" lIns="0" tIns="0" rIns="0" bIns="0" rtlCol="0" anchor="ctr"/>
+          <a:lstStyle/>
+          <a:p>
+            <a:pPr indent="0" marL="0">
+              <a:buNone/>
+            </a:pPr>
+            <a:r>
+              <a:rPr lang="en-US" sz="1600" b="1" dirty="0">
                 <a:solidFill>
                   <a:srgbClr val="0B2C4A"/>
                 </a:solidFill>
@@ -10093,105 +10942,7 @@
                 <a:ea typeface="Inter" pitchFamily="34" charset="-122"/>
                 <a:cs typeface="Inter" pitchFamily="34" charset="-120"/>
               </a:rPr>
-              <a:t>52.5%</a:t>
-            </a:r>
-            <a:endParaRPr lang="en-US" sz="3000" dirty="0"/>
-          </a:p>
-        </p:txBody>
-      </p:sp>
-      <p:sp>
-        <p:nvSpPr>
-          <p:cNvPr id="15" name="Text 13"/>
-          <p:cNvSpPr txBox="1"/>
-          <p:nvPr/>
-        </p:nvSpPr>
-        <p:spPr>
-          <a:xfrm>
-            <a:off x="7452360" y="4453128"/>
-            <a:ext cx="4023360" cy="1280160"/>
-          </a:xfrm>
-          <a:prstGeom prst="rect">
-            <a:avLst/>
-          </a:prstGeom>
-          <a:noFill/>
-          <a:ln/>
-        </p:spPr>
-        <p:txBody>
-          <a:bodyPr wrap="square" lIns="0" tIns="0" rIns="0" bIns="0" rtlCol="0" anchor="t"/>
-          <a:lstStyle/>
-          <a:p>
-            <a:pPr indent="0" marL="0">
-              <a:buNone/>
-            </a:pPr>
-            <a:r>
-              <a:rPr lang="en-US" sz="1400" dirty="0">
-                <a:solidFill>
-                  <a:srgbClr val="1A1A1A"/>
-                </a:solidFill>
-                <a:latin typeface="Inter" pitchFamily="34" charset="0"/>
-                <a:ea typeface="Inter" pitchFamily="34" charset="-122"/>
-                <a:cs typeface="Inter" pitchFamily="34" charset="-120"/>
-              </a:rPr>
-              <a:t>Customer pay as a share of labor sale, down 0.3 pts. Warranty labor rose 8.8%, internal 5.8%.</a:t>
-            </a:r>
-            <a:endParaRPr lang="en-US" sz="1400" dirty="0"/>
-          </a:p>
-        </p:txBody>
-      </p:sp>
-      <p:sp>
-        <p:nvSpPr>
-          <p:cNvPr id="16" name="Shape 14"/>
-          <p:cNvSpPr/>
-          <p:nvPr/>
-        </p:nvSpPr>
-        <p:spPr>
-          <a:xfrm>
-            <a:off x="457200" y="6126480"/>
-            <a:ext cx="11274552" cy="371856"/>
-          </a:xfrm>
-          <a:prstGeom prst="rect">
-            <a:avLst/>
-          </a:prstGeom>
-          <a:solidFill>
-            <a:srgbClr val="EDF4FA"/>
-          </a:solidFill>
-          <a:ln/>
-        </p:spPr>
-      </p:sp>
-      <p:sp>
-        <p:nvSpPr>
-          <p:cNvPr id="17" name="Text 15"/>
-          <p:cNvSpPr txBox="1"/>
-          <p:nvPr/>
-        </p:nvSpPr>
-        <p:spPr>
-          <a:xfrm>
-            <a:off x="658368" y="6144768"/>
-            <a:ext cx="10927080" cy="335280"/>
-          </a:xfrm>
-          <a:prstGeom prst="rect">
-            <a:avLst/>
-          </a:prstGeom>
-          <a:noFill/>
-          <a:ln/>
-        </p:spPr>
-        <p:txBody>
-          <a:bodyPr wrap="square" lIns="0" tIns="0" rIns="0" bIns="0" rtlCol="0" anchor="ctr"/>
-          <a:lstStyle/>
-          <a:p>
-            <a:pPr indent="0" marL="0">
-              <a:buNone/>
-            </a:pPr>
-            <a:r>
-              <a:rPr lang="en-US" sz="1600" b="1" dirty="0">
-                <a:solidFill>
-                  <a:srgbClr val="0B2C4A"/>
-                </a:solidFill>
-                <a:latin typeface="Inter" pitchFamily="34" charset="0"/>
-                <a:ea typeface="Inter" pitchFamily="34" charset="-122"/>
-                <a:cs typeface="Inter" pitchFamily="34" charset="-120"/>
-              </a:rPr>
-              <a:t>The ask: treat every express visit as an inspection: fast in, inspected, and sold the next service.</a:t>
+              <a:t>The ask: capitalize on every maintenance visit: in quickly, inspected completely by someone who knows what to look for, and every finding recommended.</a:t>
             </a:r>
             <a:endParaRPr lang="en-US" sz="1600" dirty="0"/>
           </a:p>
@@ -10949,7 +11700,7 @@
               <a:buChar char="•"/>
             </a:pPr>
             <a:r>
-              <a:rPr lang="en-US" sz="1800" dirty="0">
+              <a:rPr lang="en-US" sz="1600" dirty="0">
                 <a:solidFill>
                   <a:srgbClr val="1A1A1A"/>
                 </a:solidFill>
@@ -10959,7 +11710,7 @@
               </a:rPr>
               <a:t>Every advisor, every customer: timely meet and greet at the vehicle</a:t>
             </a:r>
-            <a:endParaRPr lang="en-US" sz="1800" dirty="0"/>
+            <a:endParaRPr lang="en-US" sz="1600" dirty="0"/>
           </a:p>
           <a:p>
             <a:pPr marL="228600" indent="-228600">
@@ -10970,7 +11721,7 @@
               <a:buChar char="•"/>
             </a:pPr>
             <a:r>
-              <a:rPr lang="en-US" sz="1800" dirty="0">
+              <a:rPr lang="en-US" sz="1600" dirty="0">
                 <a:solidFill>
                   <a:srgbClr val="1A1A1A"/>
                 </a:solidFill>
@@ -10980,7 +11731,7 @@
               </a:rPr>
               <a:t>Walk-around with the customer: hood, tires and wipers</a:t>
             </a:r>
-            <a:endParaRPr lang="en-US" sz="1800" dirty="0"/>
+            <a:endParaRPr lang="en-US" sz="1600" dirty="0"/>
           </a:p>
           <a:p>
             <a:pPr marL="228600" indent="-228600">
@@ -10991,7 +11742,7 @@
               <a:buChar char="•"/>
             </a:pPr>
             <a:r>
-              <a:rPr lang="en-US" sz="1800" dirty="0">
+              <a:rPr lang="en-US" sz="1600" dirty="0">
                 <a:solidFill>
                   <a:srgbClr val="1A1A1A"/>
                 </a:solidFill>
@@ -11001,7 +11752,7 @@
               </a:rPr>
               <a:t>Review history and previously declined items</a:t>
             </a:r>
-            <a:endParaRPr lang="en-US" sz="1800" dirty="0"/>
+            <a:endParaRPr lang="en-US" sz="1600" dirty="0"/>
           </a:p>
           <a:p>
             <a:pPr marL="228600" indent="-228600">
@@ -11012,7 +11763,7 @@
               <a:buChar char="•"/>
             </a:pPr>
             <a:r>
-              <a:rPr lang="en-US" sz="1800" dirty="0">
+              <a:rPr lang="en-US" sz="1600" dirty="0">
                 <a:solidFill>
                   <a:srgbClr val="1A1A1A"/>
                 </a:solidFill>
@@ -11022,7 +11773,7 @@
               </a:rPr>
               <a:t>Time and mileage recommendations from an accurate, available menu</a:t>
             </a:r>
-            <a:endParaRPr lang="en-US" sz="1800" dirty="0"/>
+            <a:endParaRPr lang="en-US" sz="1600" dirty="0"/>
           </a:p>
           <a:p>
             <a:pPr marL="228600" indent="-228600">
@@ -11033,7 +11784,7 @@
               <a:buChar char="•"/>
             </a:pPr>
             <a:r>
-              <a:rPr lang="en-US" sz="1800" dirty="0">
+              <a:rPr lang="en-US" sz="1600" dirty="0">
                 <a:solidFill>
                   <a:srgbClr val="1A1A1A"/>
                 </a:solidFill>
@@ -11043,7 +11794,7 @@
               </a:rPr>
               <a:t>MPI mandate: every car, every time</a:t>
             </a:r>
-            <a:endParaRPr lang="en-US" sz="1800" dirty="0"/>
+            <a:endParaRPr lang="en-US" sz="1600" dirty="0"/>
           </a:p>
           <a:p>
             <a:pPr marL="228600" indent="-228600">
@@ -11054,7 +11805,7 @@
               <a:buChar char="•"/>
             </a:pPr>
             <a:r>
-              <a:rPr lang="en-US" sz="1800" dirty="0">
+              <a:rPr lang="en-US" sz="1600" dirty="0">
                 <a:solidFill>
                   <a:srgbClr val="1A1A1A"/>
                 </a:solidFill>
@@ -11064,7 +11815,28 @@
               </a:rPr>
               <a:t>Consistency is key: trained, documented and actively managed</a:t>
             </a:r>
-            <a:endParaRPr lang="en-US" sz="1800" dirty="0"/>
+            <a:endParaRPr lang="en-US" sz="1600" dirty="0"/>
+          </a:p>
+          <a:p>
+            <a:pPr marL="228600" indent="-228600">
+              <a:spcAft>
+                <a:spcPts val="800"/>
+              </a:spcAft>
+              <a:buSzPct val="100000"/>
+              <a:buChar char="•"/>
+            </a:pPr>
+            <a:r>
+              <a:rPr lang="en-US" sz="1600" dirty="0">
+                <a:solidFill>
+                  <a:srgbClr val="1A1A1A"/>
+                </a:solidFill>
+                <a:latin typeface="Inter" pitchFamily="34" charset="0"/>
+                <a:ea typeface="Inter" pitchFamily="34" charset="-122"/>
+                <a:cs typeface="Inter" pitchFamily="34" charset="-120"/>
+              </a:rPr>
+              <a:t>We produce hours. A service not recommended is an hour a technician never gets the chance to turn</a:t>
+            </a:r>
+            <a:endParaRPr lang="en-US" sz="1600" dirty="0"/>
           </a:p>
         </p:txBody>
       </p:sp>

--- a/day2-deck/decks/Talking Points - Day 2.pptx
+++ b/day2-deck/decks/Talking Points - Day 2.pptx
@@ -1589,7 +1589,7 @@
           <a:p>
             <a:r>
               <a:rPr lang="en-US" dirty="0"/>
-              <a:t>Source: Talking points: Service Manager Roundtable (Nov 15, 2024) and GM meeting decks (Jan and May 2026). Data: Qlik (Profit &amp; Loss, Closed Repair Orders, Productivity), Jan-Sep 2026 vs 2025, same-store, 33 stores, INEOS excluded.PLACE: Opcode Benchmarks, after Road to the Sale and ahead of MPI Completion % (Noah, Oct 23: express visits and a complete MPI go hand in hand).
+              <a:t>Source: Talking points: Service Manager Roundtable (Nov 15, 2024) and GM meeting decks (Jan and May 2026). Data: Qlik (Profit &amp; Loss, Closed Repair Orders, Productivity), Jan-Sep 2026 vs 2025, same-store, 33 stores, INEOS excluded.PLACE: Opcode Benchmarks, after Road to the Sale and ahead of MPI Completion % (Noah, Oct 23: maintenance visits and a complete MPI go hand in hand).
 Talk track (Noah, Oct 25): go to the dentist for a quick cleaning and they don't tell you something is starting to look like a cavity: that is a disservice. Get cars in quickly, perform a complete, comprehensive MPI, and make the proper recommendations at that time. This is critical, and it can't be left to entry-level employees alone: someone with experience who knows what to look for has to be looking at these cars. Depending on work mix, maintenance can be 25% to 75% of a store's service. Many stores focus on getting more cars in the door, which is great, and we want both, but they miss the opportunities they already have. Processes and policies make sure we capitalize on them: every car, every time.
 The 52.5% customer-pay share of labor sale tile was dropped with the rewrite.
 Said: Jan GM slide 8 / May GM slide 7 (Express Service), reworded.</a:t>
@@ -2419,7 +2419,7 @@
                 <a:ea typeface="Inter" pitchFamily="34" charset="-122"/>
                 <a:cs typeface="Inter" pitchFamily="34" charset="-120"/>
               </a:rPr>
-              <a:t>Work on the business, not just in it: step out of the daily fires long enough to fix the process behind them</a:t>
+              <a:t>Work on the business, not just in it: step out of the day-to-day long enough to fix the process behind the problems</a:t>
             </a:r>
             <a:endParaRPr lang="en-US" sz="1600" dirty="0"/>
           </a:p>
@@ -2624,7 +2624,7 @@
             <a:avLst/>
           </a:prstGeom>
           <a:solidFill>
-            <a:srgbClr val="2587C5"/>
+            <a:srgbClr val="12A566"/>
           </a:solidFill>
           <a:ln/>
         </p:spPr>
@@ -2658,13 +2658,13 @@
             <a:r>
               <a:rPr lang="en-US" sz="3000" b="1" dirty="0">
                 <a:solidFill>
-                  <a:srgbClr val="0B2C4A"/>
-                </a:solidFill>
-                <a:latin typeface="Inter" pitchFamily="34" charset="0"/>
-                <a:ea typeface="Inter" pitchFamily="34" charset="-122"/>
-                <a:cs typeface="Inter" pitchFamily="34" charset="-120"/>
-              </a:rPr>
-              <a:t>$50.19M</a:t>
+                  <a:srgbClr val="0B7A4A"/>
+                </a:solidFill>
+                <a:latin typeface="Inter" pitchFamily="34" charset="0"/>
+                <a:ea typeface="Inter" pitchFamily="34" charset="-122"/>
+                <a:cs typeface="Inter" pitchFamily="34" charset="-120"/>
+              </a:rPr>
+              <a:t>27¢ vs 7¢</a:t>
             </a:r>
             <a:endParaRPr lang="en-US" sz="3000" dirty="0"/>
           </a:p>
@@ -2703,7 +2703,7 @@
                 <a:ea typeface="Inter" pitchFamily="34" charset="-122"/>
                 <a:cs typeface="Inter" pitchFamily="34" charset="-120"/>
               </a:rPr>
-              <a:t>Fixed ops department profit. New, used, F&amp;I and the rest of the store together: $32.05M.</a:t>
+              <a:t>Of every gross dollar, what service and parts keep after their own expenses vs new, used and F&amp;I.</a:t>
             </a:r>
             <a:endParaRPr lang="en-US" sz="1400" dirty="0"/>
           </a:p>
@@ -7316,7 +7316,7 @@
               <a:buChar char="•"/>
             </a:pPr>
             <a:r>
-              <a:rPr lang="en-US" sz="1800" dirty="0">
+              <a:rPr lang="en-US" sz="1600" dirty="0">
                 <a:solidFill>
                   <a:srgbClr val="1A1A1A"/>
                 </a:solidFill>
@@ -7326,7 +7326,7 @@
               </a:rPr>
               <a:t>Sell hours, build value, sell peace of mind</a:t>
             </a:r>
-            <a:endParaRPr lang="en-US" sz="1800" dirty="0"/>
+            <a:endParaRPr lang="en-US" sz="1600" dirty="0"/>
           </a:p>
           <a:p>
             <a:pPr marL="228600" indent="-228600">
@@ -7337,7 +7337,7 @@
               <a:buChar char="•"/>
             </a:pPr>
             <a:r>
-              <a:rPr lang="en-US" sz="1800" dirty="0">
+              <a:rPr lang="en-US" sz="1600" dirty="0">
                 <a:solidFill>
                   <a:srgbClr val="1A1A1A"/>
                 </a:solidFill>
@@ -7347,7 +7347,7 @@
               </a:rPr>
               <a:t>Drive visits: don't say no to dollars</a:t>
             </a:r>
-            <a:endParaRPr lang="en-US" sz="1800" dirty="0"/>
+            <a:endParaRPr lang="en-US" sz="1600" dirty="0"/>
           </a:p>
           <a:p>
             <a:pPr marL="228600" indent="-228600">
@@ -7358,7 +7358,7 @@
               <a:buChar char="•"/>
             </a:pPr>
             <a:r>
-              <a:rPr lang="en-US" sz="1800" dirty="0">
+              <a:rPr lang="en-US" sz="1600" dirty="0">
                 <a:solidFill>
                   <a:srgbClr val="1A1A1A"/>
                 </a:solidFill>
@@ -7368,7 +7368,7 @@
               </a:rPr>
               <a:t>Generate throughput: max out hours</a:t>
             </a:r>
-            <a:endParaRPr lang="en-US" sz="1800" dirty="0"/>
+            <a:endParaRPr lang="en-US" sz="1600" dirty="0"/>
           </a:p>
           <a:p>
             <a:pPr marL="228600" indent="-228600">
@@ -7379,7 +7379,7 @@
               <a:buChar char="•"/>
             </a:pPr>
             <a:r>
-              <a:rPr lang="en-US" sz="1800" dirty="0">
+              <a:rPr lang="en-US" sz="1600" dirty="0">
                 <a:solidFill>
                   <a:srgbClr val="1A1A1A"/>
                 </a:solidFill>
@@ -7389,7 +7389,7 @@
               </a:rPr>
               <a:t>Drive retention and sell cars</a:t>
             </a:r>
-            <a:endParaRPr lang="en-US" sz="1800" dirty="0"/>
+            <a:endParaRPr lang="en-US" sz="1600" dirty="0"/>
           </a:p>
           <a:p>
             <a:pPr marL="228600" indent="-228600">
@@ -7400,7 +7400,7 @@
               <a:buChar char="•"/>
             </a:pPr>
             <a:r>
-              <a:rPr lang="en-US" sz="1800" dirty="0">
+              <a:rPr lang="en-US" sz="1600" dirty="0">
                 <a:solidFill>
                   <a:srgbClr val="1A1A1A"/>
                 </a:solidFill>
@@ -7410,7 +7410,49 @@
               </a:rPr>
               <a:t>Sales sells the first car. Service sells the next six.</a:t>
             </a:r>
-            <a:endParaRPr lang="en-US" sz="1800" dirty="0"/>
+            <a:endParaRPr lang="en-US" sz="1600" dirty="0"/>
+          </a:p>
+          <a:p>
+            <a:pPr marL="228600" indent="-228600">
+              <a:spcAft>
+                <a:spcPts val="800"/>
+              </a:spcAft>
+              <a:buSzPct val="100000"/>
+              <a:buChar char="•"/>
+            </a:pPr>
+            <a:r>
+              <a:rPr lang="en-US" sz="1600" dirty="0">
+                <a:solidFill>
+                  <a:srgbClr val="1A1A1A"/>
+                </a:solidFill>
+                <a:latin typeface="Inter" pitchFamily="34" charset="0"/>
+                <a:ea typeface="Inter" pitchFamily="34" charset="-122"/>
+                <a:cs typeface="Inter" pitchFamily="34" charset="-120"/>
+              </a:rPr>
+              <a:t>Every car, every time: follow the processes you have in place, consistently</a:t>
+            </a:r>
+            <a:endParaRPr lang="en-US" sz="1600" dirty="0"/>
+          </a:p>
+          <a:p>
+            <a:pPr marL="228600" indent="-228600">
+              <a:spcAft>
+                <a:spcPts val="800"/>
+              </a:spcAft>
+              <a:buSzPct val="100000"/>
+              <a:buChar char="•"/>
+            </a:pPr>
+            <a:r>
+              <a:rPr lang="en-US" sz="1600" dirty="0">
+                <a:solidFill>
+                  <a:srgbClr val="1A1A1A"/>
+                </a:solidFill>
+                <a:latin typeface="Inter" pitchFamily="34" charset="0"/>
+                <a:ea typeface="Inter" pitchFamily="34" charset="-122"/>
+                <a:cs typeface="Inter" pitchFamily="34" charset="-120"/>
+              </a:rPr>
+              <a:t>Processes only work when they are actively managed</a:t>
+            </a:r>
+            <a:endParaRPr lang="en-US" sz="1600" dirty="0"/>
           </a:p>
         </p:txBody>
       </p:sp>
@@ -8039,7 +8081,7 @@
                 <a:ea typeface="Inter" pitchFamily="34" charset="-122"/>
                 <a:cs typeface="Inter" pitchFamily="34" charset="-120"/>
               </a:rPr>
-              <a:t>Work it in order: ROs first, then hours per RO, the rate (ELR), the mix and the margin (GP%)</a:t>
+              <a:t>Take care of the customers we already have: how we treat them decides whether they come back</a:t>
             </a:r>
             <a:endParaRPr lang="en-US" sz="1800" dirty="0"/>
           </a:p>
@@ -8060,7 +8102,7 @@
                 <a:ea typeface="Inter" pitchFamily="34" charset="-122"/>
                 <a:cs typeface="Inter" pitchFamily="34" charset="-120"/>
               </a:rPr>
-              <a:t>CP labor $ per RO represents how well you execute, store and individual</a:t>
+              <a:t>Repair order count: how many customers we serve</a:t>
             </a:r>
             <a:endParaRPr lang="en-US" sz="1800" dirty="0"/>
           </a:p>
@@ -8081,7 +8123,7 @@
                 <a:ea typeface="Inter" pitchFamily="34" charset="-122"/>
                 <a:cs typeface="Inter" pitchFamily="34" charset="-120"/>
               </a:rPr>
-              <a:t>ELR plus hours per RO cannot be manipulated: true performance</a:t>
+              <a:t>Dollars per repair order: how much we sell each one</a:t>
             </a:r>
             <a:endParaRPr lang="en-US" sz="1800" dirty="0"/>
           </a:p>
@@ -8102,7 +8144,49 @@
                 <a:ea typeface="Inter" pitchFamily="34" charset="-122"/>
                 <a:cs typeface="Inter" pitchFamily="34" charset="-120"/>
               </a:rPr>
-              <a:t>Total dollars per RO matters more than any single measure. It's what we sell.</a:t>
+              <a:t>The rates we charge, and how we decide what to charge</a:t>
+            </a:r>
+            <a:endParaRPr lang="en-US" sz="1800" dirty="0"/>
+          </a:p>
+          <a:p>
+            <a:pPr marL="228600" indent="-228600">
+              <a:spcAft>
+                <a:spcPts val="800"/>
+              </a:spcAft>
+              <a:buSzPct val="100000"/>
+              <a:buChar char="•"/>
+            </a:pPr>
+            <a:r>
+              <a:rPr lang="en-US" sz="1800" dirty="0">
+                <a:solidFill>
+                  <a:srgbClr val="1A1A1A"/>
+                </a:solidFill>
+                <a:latin typeface="Inter" pitchFamily="34" charset="0"/>
+                <a:ea typeface="Inter" pitchFamily="34" charset="-122"/>
+                <a:cs typeface="Inter" pitchFamily="34" charset="-120"/>
+              </a:rPr>
+              <a:t>CP labor $ per RO is the best way to judge performance, store and individual</a:t>
+            </a:r>
+            <a:endParaRPr lang="en-US" sz="1800" dirty="0"/>
+          </a:p>
+          <a:p>
+            <a:pPr marL="228600" indent="-228600">
+              <a:spcAft>
+                <a:spcPts val="800"/>
+              </a:spcAft>
+              <a:buSzPct val="100000"/>
+              <a:buChar char="•"/>
+            </a:pPr>
+            <a:r>
+              <a:rPr lang="en-US" sz="1800" dirty="0">
+                <a:solidFill>
+                  <a:srgbClr val="1A1A1A"/>
+                </a:solidFill>
+                <a:latin typeface="Inter" pitchFamily="34" charset="0"/>
+                <a:ea typeface="Inter" pitchFamily="34" charset="-122"/>
+                <a:cs typeface="Inter" pitchFamily="34" charset="-120"/>
+              </a:rPr>
+              <a:t>Track the metrics that matter most every day, talk about them, and train on them</a:t>
             </a:r>
             <a:endParaRPr lang="en-US" sz="1800" dirty="0"/>
           </a:p>
@@ -8775,28 +8859,7 @@
                 <a:ea typeface="Inter" pitchFamily="34" charset="-122"/>
                 <a:cs typeface="Inter" pitchFamily="34" charset="-120"/>
               </a:rPr>
-              <a:t>Every call is a sales opportunity. Mishandled calls cost millions.</a:t>
-            </a:r>
-            <a:endParaRPr lang="en-US" sz="1800" dirty="0"/>
-          </a:p>
-          <a:p>
-            <a:pPr marL="228600" indent="-228600">
-              <a:spcAft>
-                <a:spcPts val="800"/>
-              </a:spcAft>
-              <a:buSzPct val="100000"/>
-              <a:buChar char="•"/>
-            </a:pPr>
-            <a:r>
-              <a:rPr lang="en-US" sz="1800" dirty="0">
-                <a:solidFill>
-                  <a:srgbClr val="1A1A1A"/>
-                </a:solidFill>
-                <a:latin typeface="Inter" pitchFamily="34" charset="0"/>
-                <a:ea typeface="Inter" pitchFamily="34" charset="-122"/>
-                <a:cs typeface="Inter" pitchFamily="34" charset="-120"/>
-              </a:rPr>
-              <a:t>Where do calls go after hours and Sundays?</a:t>
+              <a:t>Every call is a sales opportunity: a mishandled call costs us the customer</a:t>
             </a:r>
             <a:endParaRPr lang="en-US" sz="1800" dirty="0"/>
           </a:p>
@@ -9188,7 +9251,7 @@
                 <a:ea typeface="Inter" pitchFamily="34" charset="-122"/>
                 <a:cs typeface="Inter" pitchFamily="34" charset="-120"/>
               </a:rPr>
-              <a:t>CUSTOMER PAY</a:t>
+              <a:t>CUSTOMER PAY · EFFECTIVE LABOR RATE</a:t>
             </a:r>
             <a:endParaRPr lang="en-US" sz="1400" dirty="0"/>
           </a:p>

--- a/day2-deck/decks/Talking Points - Day 2.pptx
+++ b/day2-deck/decks/Talking Points - Day 2.pptx
@@ -695,6 +695,7 @@
               <a:rPr lang="en-US" dirty="0"/>
               <a:t>Source: Talking points: Service Manager Roundtable (Nov 15, 2024) and GM meeting decks (Jan and May 2026). Data: Qlik (Profit &amp; Loss, Closed Repair Orders, Productivity), Jan-Sep 2026 vs 2025, same-store, 33 stores, INEOS excluded.PLACE: Productivity section, after the section break and before Fixed Gross per Fixed Employee.
 Said: Roundtable slide 6 (People); Jan GM slide 57 (Technician Pipeline).
+Bay tile (Oct 26): counted technicians (proficiency basis, Dec 25 2025 - Oct 9 2026, 9.49 months) flagged 841,721 sold hours, 583 techs = 152 sold hours per tech a month; labor gross $132.13 + parts gross $55.85 = $187.98 per sold hour, all pay types (Qlik Closed ROs) = $28,584 a month per tech. One tech per bay assumed (1:1 tech to stall). The -2.3% CP &amp; W RO tile was dropped for it.
 Numbers rebuilt 2026-10-20 on ADP headcount (Employee Master extract 10/19/2026); the Qlik headcount history undercounted 2025.</a:t>
             </a:r>
             <a:endParaRPr lang="en-US" dirty="0"/>
@@ -3891,7 +3892,7 @@
                 <a:ea typeface="Inter" pitchFamily="34" charset="-122"/>
                 <a:cs typeface="Inter" pitchFamily="34" charset="-120"/>
               </a:rPr>
-              <a:t>Grow your own: apprentice programs</a:t>
+              <a:t>Grow your own techs, advisors and managers: apprentice programs, develop your bench, train your replacement</a:t>
             </a:r>
             <a:endParaRPr lang="en-US" sz="1800" dirty="0"/>
           </a:p>
@@ -3912,7 +3913,7 @@
                 <a:ea typeface="Inter" pitchFamily="34" charset="-122"/>
                 <a:cs typeface="Inter" pitchFamily="34" charset="-120"/>
               </a:rPr>
-              <a:t>What does being short-handed cost? Limited scheduling, lost opportunities, missed MPIs</a:t>
+              <a:t>Always be teaching, training and educating</a:t>
             </a:r>
             <a:endParaRPr lang="en-US" sz="1800" dirty="0"/>
           </a:p>
@@ -3933,6 +3934,27 @@
                 <a:ea typeface="Inter" pitchFamily="34" charset="-122"/>
                 <a:cs typeface="Inter" pitchFamily="34" charset="-120"/>
               </a:rPr>
+              <a:t>What does being short-handed cost? Limited scheduling, lost opportunities, missed MPIs</a:t>
+            </a:r>
+            <a:endParaRPr lang="en-US" sz="1800" dirty="0"/>
+          </a:p>
+          <a:p>
+            <a:pPr marL="228600" indent="-228600">
+              <a:spcAft>
+                <a:spcPts val="800"/>
+              </a:spcAft>
+              <a:buSzPct val="100000"/>
+              <a:buChar char="•"/>
+            </a:pPr>
+            <a:r>
+              <a:rPr lang="en-US" sz="1800" dirty="0">
+                <a:solidFill>
+                  <a:srgbClr val="1A1A1A"/>
+                </a:solidFill>
+                <a:latin typeface="Inter" pitchFamily="34" charset="0"/>
+                <a:ea typeface="Inter" pitchFamily="34" charset="-122"/>
+                <a:cs typeface="Inter" pitchFamily="34" charset="-120"/>
+              </a:rPr>
               <a:t>Clear pay plans, job descriptions and expectations</a:t>
             </a:r>
             <a:endParaRPr lang="en-US" sz="1800" dirty="0"/>
@@ -4194,7 +4216,7 @@
                 <a:ea typeface="Inter" pitchFamily="34" charset="-122"/>
                 <a:cs typeface="Inter" pitchFamily="34" charset="-120"/>
               </a:rPr>
-              <a:t>−2.3%</a:t>
+              <a:t>$28,600</a:t>
             </a:r>
             <a:endParaRPr lang="en-US" sz="3000" dirty="0"/>
           </a:p>
@@ -4233,7 +4255,7 @@
                 <a:ea typeface="Inter" pitchFamily="34" charset="-122"/>
                 <a:cs typeface="Inter" pitchFamily="34" charset="-120"/>
               </a:rPr>
-              <a:t>CP &amp; W ROs year to date. Fewer people and fewer cars: the next gain has to come from car count.</a:t>
+              <a:t>Gross an average tech's bay produces a month: 152 sold hours at $188 each. An empty or idle bay misses all of it.</a:t>
             </a:r>
             <a:endParaRPr lang="en-US" sz="1400" dirty="0"/>
           </a:p>
@@ -4585,7 +4607,7 @@
                 <a:ea typeface="Inter" pitchFamily="34" charset="-122"/>
                 <a:cs typeface="Inter" pitchFamily="34" charset="-120"/>
               </a:rPr>
-              <a:t>Based on customer-pay performance: CP labor or gross per RO, maintenance penetration, total sales or gross</a:t>
+              <a:t>Based on customer-pay performance: CP labor or gross per RO, hours per RO, maintenance penetration, total sales or gross</a:t>
             </a:r>
             <a:endParaRPr lang="en-US" sz="1800" dirty="0"/>
           </a:p>
@@ -4606,7 +4628,28 @@
                 <a:ea typeface="Inter" pitchFamily="34" charset="-122"/>
                 <a:cs typeface="Inter" pitchFamily="34" charset="-120"/>
               </a:rPr>
-              <a:t>Drive the results you are looking for</a:t>
+              <a:t>Incentivize improvement in the metrics that make the biggest difference</a:t>
+            </a:r>
+            <a:endParaRPr lang="en-US" sz="1800" dirty="0"/>
+          </a:p>
+          <a:p>
+            <a:pPr marL="228600" indent="-228600">
+              <a:spcAft>
+                <a:spcPts val="800"/>
+              </a:spcAft>
+              <a:buSzPct val="100000"/>
+              <a:buChar char="•"/>
+            </a:pPr>
+            <a:r>
+              <a:rPr lang="en-US" sz="1800" dirty="0">
+                <a:solidFill>
+                  <a:srgbClr val="1A1A1A"/>
+                </a:solidFill>
+                <a:latin typeface="Inter" pitchFamily="34" charset="0"/>
+                <a:ea typeface="Inter" pitchFamily="34" charset="-122"/>
+                <a:cs typeface="Inter" pitchFamily="34" charset="-120"/>
+              </a:rPr>
+              <a:t>Move every technician to flat rate and away from hourly: it rewards productivity and makes proficiency easy to track</a:t>
             </a:r>
             <a:endParaRPr lang="en-US" sz="1800" dirty="0"/>
           </a:p>
@@ -5263,7 +5306,7 @@
                 <a:ea typeface="Inter" pitchFamily="34" charset="-122"/>
                 <a:cs typeface="Inter" pitchFamily="34" charset="-120"/>
               </a:rPr>
-              <a:t>Use scoreboarding and teams to show techs where they stand</a:t>
+              <a:t>Use scoreboarding and communicate to techs where they stand</a:t>
             </a:r>
             <a:endParaRPr lang="en-US" sz="1800" dirty="0"/>
           </a:p>
@@ -10804,7 +10847,7 @@
                 <a:ea typeface="Inter" pitchFamily="34" charset="-122"/>
                 <a:cs typeface="Inter" pitchFamily="34" charset="-120"/>
               </a:rPr>
-              <a:t>A quick cleaning that misses the cavity starting to form is a disservice to the customer</a:t>
+              <a:t>An oil change that misses worn brakes or a leaking water pump is a disservice to the customer</a:t>
             </a:r>
             <a:endParaRPr lang="en-US" sz="1800" dirty="0"/>
           </a:p>
@@ -10825,7 +10868,7 @@
                 <a:ea typeface="Inter" pitchFamily="34" charset="-122"/>
                 <a:cs typeface="Inter" pitchFamily="34" charset="-120"/>
               </a:rPr>
-              <a:t>More cars in the door is great, and we want both. Capitalize on the opportunities we already have</a:t>
+              <a:t>More cars in the door is great, but first make the most of every car already in the shop</a:t>
             </a:r>
             <a:endParaRPr lang="en-US" sz="1800" dirty="0"/>
           </a:p>
@@ -10861,7 +10904,7 @@
         <p:spPr>
           <a:xfrm>
             <a:off x="7269480" y="1920240"/>
-            <a:ext cx="54864" cy="3794760"/>
+            <a:ext cx="54864" cy="1783080"/>
           </a:xfrm>
           <a:prstGeom prst="rect">
             <a:avLst/>
@@ -10922,7 +10965,7 @@
         <p:spPr>
           <a:xfrm>
             <a:off x="7452360" y="2441448"/>
-            <a:ext cx="4023360" cy="3291840"/>
+            <a:ext cx="4023360" cy="1280160"/>
           </a:xfrm>
           <a:prstGeom prst="rect">
             <a:avLst/>
@@ -10960,6 +11003,106 @@
         </p:nvSpPr>
         <p:spPr>
           <a:xfrm>
+            <a:off x="7269480" y="3931920"/>
+            <a:ext cx="54864" cy="1783080"/>
+          </a:xfrm>
+          <a:prstGeom prst="rect">
+            <a:avLst/>
+          </a:prstGeom>
+          <a:solidFill>
+            <a:srgbClr val="C2352F"/>
+          </a:solidFill>
+          <a:ln/>
+        </p:spPr>
+      </p:sp>
+      <p:sp>
+        <p:nvSpPr>
+          <p:cNvPr id="14" name="Text 12"/>
+          <p:cNvSpPr txBox="1"/>
+          <p:nvPr/>
+        </p:nvSpPr>
+        <p:spPr>
+          <a:xfrm>
+            <a:off x="7452360" y="3886200"/>
+            <a:ext cx="4023360" cy="566928"/>
+          </a:xfrm>
+          <a:prstGeom prst="rect">
+            <a:avLst/>
+          </a:prstGeom>
+          <a:noFill/>
+          <a:ln/>
+        </p:spPr>
+        <p:txBody>
+          <a:bodyPr wrap="square" lIns="0" tIns="0" rIns="0" bIns="0" rtlCol="0" anchor="ctr">
+            <a:normAutofit/>
+          </a:bodyPr>
+          <a:lstStyle/>
+          <a:p>
+            <a:pPr indent="0" marL="0">
+              <a:buNone/>
+            </a:pPr>
+            <a:r>
+              <a:rPr lang="en-US" sz="3000" b="1" dirty="0">
+                <a:solidFill>
+                  <a:srgbClr val="A82B26"/>
+                </a:solidFill>
+                <a:latin typeface="Inter" pitchFamily="34" charset="0"/>
+                <a:ea typeface="Inter" pitchFamily="34" charset="-122"/>
+                <a:cs typeface="Inter" pitchFamily="34" charset="-120"/>
+              </a:rPr>
+              <a:t>Unknown hours</a:t>
+            </a:r>
+            <a:endParaRPr lang="en-US" sz="3000" dirty="0"/>
+          </a:p>
+        </p:txBody>
+      </p:sp>
+      <p:sp>
+        <p:nvSpPr>
+          <p:cNvPr id="15" name="Text 13"/>
+          <p:cNvSpPr txBox="1"/>
+          <p:nvPr/>
+        </p:nvSpPr>
+        <p:spPr>
+          <a:xfrm>
+            <a:off x="7452360" y="4453128"/>
+            <a:ext cx="4023360" cy="1280160"/>
+          </a:xfrm>
+          <a:prstGeom prst="rect">
+            <a:avLst/>
+          </a:prstGeom>
+          <a:noFill/>
+          <a:ln/>
+        </p:spPr>
+        <p:txBody>
+          <a:bodyPr wrap="square" lIns="0" tIns="0" rIns="0" bIns="0" rtlCol="0" anchor="t"/>
+          <a:lstStyle/>
+          <a:p>
+            <a:pPr indent="0" marL="0">
+              <a:buNone/>
+            </a:pPr>
+            <a:r>
+              <a:rPr lang="en-US" sz="1400" dirty="0">
+                <a:solidFill>
+                  <a:srgbClr val="1A1A1A"/>
+                </a:solidFill>
+                <a:latin typeface="Inter" pitchFamily="34" charset="0"/>
+                <a:ea typeface="Inter" pitchFamily="34" charset="-122"/>
+                <a:cs typeface="Inter" pitchFamily="34" charset="-120"/>
+              </a:rPr>
+              <a:t>Buying every maintenance service we offer might come to $2,500. The work the inspection finds is worth far more, and we lose all of it when we turn a car away or can't book the time the customer wants.</a:t>
+            </a:r>
+            <a:endParaRPr lang="en-US" sz="1400" dirty="0"/>
+          </a:p>
+        </p:txBody>
+      </p:sp>
+      <p:sp>
+        <p:nvSpPr>
+          <p:cNvPr id="16" name="Shape 14"/>
+          <p:cNvSpPr/>
+          <p:nvPr/>
+        </p:nvSpPr>
+        <p:spPr>
+          <a:xfrm>
             <a:off x="457200" y="6126480"/>
             <a:ext cx="11274552" cy="615696"/>
           </a:xfrm>
@@ -10974,7 +11117,7 @@
       </p:sp>
       <p:sp>
         <p:nvSpPr>
-          <p:cNvPr id="14" name="Text 12"/>
+          <p:cNvPr id="17" name="Text 15"/>
           <p:cNvSpPr txBox="1"/>
           <p:nvPr/>
         </p:nvSpPr>
@@ -11897,7 +12040,7 @@
                 <a:ea typeface="Inter" pitchFamily="34" charset="-122"/>
                 <a:cs typeface="Inter" pitchFamily="34" charset="-120"/>
               </a:rPr>
-              <a:t>We produce hours. A service not recommended is an hour a technician never gets the chance to turn</a:t>
+              <a:t>We produce hours. Every service or repair not recommended is hours a technician never gets the chance to earn</a:t>
             </a:r>
             <a:endParaRPr lang="en-US" sz="1600" dirty="0"/>
           </a:p>

--- a/day2-deck/decks/Talking Points - Day 2.pptx
+++ b/day2-deck/decks/Talking Points - Day 2.pptx
@@ -3934,7 +3934,7 @@
                 <a:ea typeface="Inter" pitchFamily="34" charset="-122"/>
                 <a:cs typeface="Inter" pitchFamily="34" charset="-120"/>
               </a:rPr>
-              <a:t>What does being short-handed cost? Limited scheduling, lost opportunities, missed MPIs</a:t>
+              <a:t>Being short-handed limits scheduling, loses opportunities and leads to missed MPIs</a:t>
             </a:r>
             <a:endParaRPr lang="en-US" sz="1800" dirty="0"/>
           </a:p>
@@ -4649,7 +4649,7 @@
                 <a:ea typeface="Inter" pitchFamily="34" charset="-122"/>
                 <a:cs typeface="Inter" pitchFamily="34" charset="-120"/>
               </a:rPr>
-              <a:t>Move every technician to flat rate and away from hourly: it rewards productivity and makes proficiency easy to track</a:t>
+              <a:t>Move technicians to flat rate and away from hourly: it rewards productivity and makes proficiency easy to track</a:t>
             </a:r>
             <a:endParaRPr lang="en-US" sz="1800" dirty="0"/>
           </a:p>
@@ -11050,7 +11050,7 @@
                 <a:ea typeface="Inter" pitchFamily="34" charset="-122"/>
                 <a:cs typeface="Inter" pitchFamily="34" charset="-120"/>
               </a:rPr>
-              <a:t>Unknown hours</a:t>
+              <a:t>The value of the unknown</a:t>
             </a:r>
             <a:endParaRPr lang="en-US" sz="3000" dirty="0"/>
           </a:p>
@@ -11089,7 +11089,7 @@
                 <a:ea typeface="Inter" pitchFamily="34" charset="-122"/>
                 <a:cs typeface="Inter" pitchFamily="34" charset="-120"/>
               </a:rPr>
-              <a:t>Buying every maintenance service we offer might come to $2,500. The work the inspection finds is worth far more, and we lose all of it when we turn a car away or can't book the time the customer wants.</a:t>
+              <a:t>The work a complete multi-point inspection finds is worth far more than the maintenance the car is due for. Turn a car away, or miss the time the customer wants, and we lose all of it.</a:t>
             </a:r>
             <a:endParaRPr lang="en-US" sz="1400" dirty="0"/>
           </a:p>

--- a/day2-deck/decks/Talking Points - Day 2.pptx
+++ b/day2-deck/decks/Talking Points - Day 2.pptx
@@ -4670,7 +4670,7 @@
                 <a:ea typeface="Inter" pitchFamily="34" charset="-122"/>
                 <a:cs typeface="Inter" pitchFamily="34" charset="-120"/>
               </a:rPr>
-              <a:t>Base versus bonus: a 50/50 ratio</a:t>
+              <a:t>Service advisors: base versus bonus, a 50/50 ratio</a:t>
             </a:r>
             <a:endParaRPr lang="en-US" sz="1800" dirty="0"/>
           </a:p>
@@ -10784,7 +10784,7 @@
                 <a:ea typeface="Inter" pitchFamily="34" charset="-122"/>
                 <a:cs typeface="Inter" pitchFamily="34" charset="-120"/>
               </a:rPr>
-              <a:t>On-demand maintenance appointments: get cars in quickly</a:t>
+              <a:t>On-demand maintenance appointments: get cars in quickly. A car we can't book is work we never see</a:t>
             </a:r>
             <a:endParaRPr lang="en-US" sz="1800" dirty="0"/>
           </a:p>
@@ -10805,7 +10805,7 @@
                 <a:ea typeface="Inter" pitchFamily="34" charset="-122"/>
                 <a:cs typeface="Inter" pitchFamily="34" charset="-120"/>
               </a:rPr>
-              <a:t>A complete, comprehensive multi-point inspection on every visit, with the right recommendations at that time</a:t>
+              <a:t>A complete, comprehensive multi-point inspection on every visit: what it finds is worth far more than the maintenance the car is due for</a:t>
             </a:r>
             <a:endParaRPr lang="en-US" sz="1800" dirty="0"/>
           </a:p>
@@ -11050,7 +11050,7 @@
                 <a:ea typeface="Inter" pitchFamily="34" charset="-122"/>
                 <a:cs typeface="Inter" pitchFamily="34" charset="-120"/>
               </a:rPr>
-              <a:t>The value of the unknown</a:t>
+              <a:t>81.3%</a:t>
             </a:r>
             <a:endParaRPr lang="en-US" sz="3000" dirty="0"/>
           </a:p>
@@ -11089,7 +11089,7 @@
                 <a:ea typeface="Inter" pitchFamily="34" charset="-122"/>
                 <a:cs typeface="Inter" pitchFamily="34" charset="-120"/>
               </a:rPr>
-              <a:t>The work a complete multi-point inspection finds is worth far more than the maintenance the car is due for. Turn a car away, or miss the time the customer wants, and we lose all of it.</a:t>
+              <a:t>MPI completion, July to September (store-reported). 12 of 33 stores at the 90% benchmark: every car skipped is unknown work left in the car.</a:t>
             </a:r>
             <a:endParaRPr lang="en-US" sz="1400" dirty="0"/>
           </a:p>

--- a/day2-deck/decks/Talking Points - Day 2.pptx
+++ b/day2-deck/decks/Talking Points - Day 2.pptx
@@ -4670,7 +4670,7 @@
                 <a:ea typeface="Inter" pitchFamily="34" charset="-122"/>
                 <a:cs typeface="Inter" pitchFamily="34" charset="-120"/>
               </a:rPr>
-              <a:t>Service advisors: base versus bonus, a 50/50 ratio</a:t>
+              <a:t>Service advisors: about half of pay earned on performance. If the base is 6% of gross, another 6% is there to earn by hitting the metrics</a:t>
             </a:r>
             <a:endParaRPr lang="en-US" sz="1800" dirty="0"/>
           </a:p>

--- a/day2-deck/decks/Talking Points - Day 2.pptx
+++ b/day2-deck/decks/Talking Points - Day 2.pptx
@@ -4670,7 +4670,7 @@
                 <a:ea typeface="Inter" pitchFamily="34" charset="-122"/>
                 <a:cs typeface="Inter" pitchFamily="34" charset="-120"/>
               </a:rPr>
-              <a:t>Service advisors: about half of pay earned on performance. If the base is 6% of gross, another 6% is there to earn by hitting the metrics</a:t>
+              <a:t>Advisor pay: target a 50/50 split of base commission and performance bonus, with about half of earning potential tied to measurable metrics</a:t>
             </a:r>
             <a:endParaRPr lang="en-US" sz="1800" dirty="0"/>
           </a:p>

--- a/day2-deck/decks/Talking Points - Day 2.pptx
+++ b/day2-deck/decks/Talking Points - Day 2.pptx
@@ -6000,7 +6000,28 @@
                 <a:ea typeface="Inter" pitchFamily="34" charset="-122"/>
                 <a:cs typeface="Inter" pitchFamily="34" charset="-120"/>
               </a:rPr>
-              <a:t>Do you want to do this again?</a:t>
+              <a:t>Pick the one number you will check every day, and name who owns it</a:t>
+            </a:r>
+            <a:endParaRPr lang="en-US" sz="1800" dirty="0"/>
+          </a:p>
+          <a:p>
+            <a:pPr marL="228600" indent="-228600">
+              <a:spcAft>
+                <a:spcPts val="800"/>
+              </a:spcAft>
+              <a:buSzPct val="100000"/>
+              <a:buChar char="•"/>
+            </a:pPr>
+            <a:r>
+              <a:rPr lang="en-US" sz="1800" dirty="0">
+                <a:solidFill>
+                  <a:srgbClr val="1A1A1A"/>
+                </a:solidFill>
+                <a:latin typeface="Inter" pitchFamily="34" charset="0"/>
+                <a:ea typeface="Inter" pitchFamily="34" charset="-122"/>
+                <a:cs typeface="Inter" pitchFamily="34" charset="-120"/>
+              </a:rPr>
+              <a:t>Call a store that leads where you trail: ask what they do differently</a:t>
             </a:r>
             <a:endParaRPr lang="en-US" sz="1800" dirty="0"/>
           </a:p>
@@ -11420,7 +11441,7 @@
                 <a:ea typeface="Inter" pitchFamily="34" charset="-122"/>
                 <a:cs typeface="Inter" pitchFamily="34" charset="-120"/>
               </a:rPr>
-              <a:t>Daily review of the Viz 'Op Code' and 'Performance Report'</a:t>
+              <a:t>Daily review of the Viz 'Op Code' and 'Performance Report' and the Fixed Ops DOC</a:t>
             </a:r>
             <a:endParaRPr lang="en-US" sz="1800" dirty="0"/>
           </a:p>

--- a/day2-deck/decks/Talking Points - Day 2.pptx
+++ b/day2-deck/decks/Talking Points - Day 2.pptx
@@ -964,7 +964,7 @@
             <a:r>
               <a:rPr lang="en-US" dirty="0"/>
               <a:t>Source: Talking points: Service Manager Roundtable (Nov 15, 2024) and GM meeting decks (Jan and May 2026). Data: Qlik (Profit &amp; Loss, Closed Repair Orders, Productivity), Jan-Sep 2026 vs 2025, same-store, 33 stores, INEOS excluded.PLACE: the close, after the last Productivity / Proficiency slide.
-Said: Roundtable slide 24 (Misc &amp; Closing). Commitments tracking was dropped for this meeting, so this asks for commitments without a scorecard.</a:t>
+Said: Roundtable slide 24 (Misc &amp; Closing). Commitments are reviewed at the next meeting (Noah, Oct 27): keep a list of what each store names.</a:t>
             </a:r>
             <a:endParaRPr lang="en-US" dirty="0"/>
           </a:p>
@@ -6046,6 +6046,27 @@
             </a:r>
             <a:endParaRPr lang="en-US" sz="1800" dirty="0"/>
           </a:p>
+          <a:p>
+            <a:pPr marL="228600" indent="-228600">
+              <a:spcAft>
+                <a:spcPts val="800"/>
+              </a:spcAft>
+              <a:buSzPct val="100000"/>
+              <a:buChar char="•"/>
+            </a:pPr>
+            <a:r>
+              <a:rPr lang="en-US" sz="1800" dirty="0">
+                <a:solidFill>
+                  <a:srgbClr val="1A1A1A"/>
+                </a:solidFill>
+                <a:latin typeface="Inter" pitchFamily="34" charset="0"/>
+                <a:ea typeface="Inter" pitchFamily="34" charset="-122"/>
+                <a:cs typeface="Inter" pitchFamily="34" charset="-120"/>
+              </a:rPr>
+              <a:t>We will review your commitments at the next meeting</a:t>
+            </a:r>
+            <a:endParaRPr lang="en-US" sz="1800" dirty="0"/>
+          </a:p>
         </p:txBody>
       </p:sp>
       <p:sp>
@@ -6203,7 +6224,7 @@
                 <a:ea typeface="Inter" pitchFamily="34" charset="-122"/>
                 <a:cs typeface="Inter" pitchFamily="34" charset="-120"/>
               </a:rPr>
-              <a:t>18,493 balances</a:t>
+              <a:t>$4.9M a year</a:t>
             </a:r>
             <a:endParaRPr lang="en-US" sz="3000" dirty="0"/>
           </a:p>
@@ -6242,7 +6263,7 @@
                 <a:ea typeface="Inter" pitchFamily="34" charset="-122"/>
                 <a:cs typeface="Inter" pitchFamily="34" charset="-120"/>
               </a:rPr>
-              <a:t>The largest benchmark gap, at 8.3% against 15%.</a:t>
+              <a:t>Every store at all four opcode benchmarks: $4,895,199 in labor and parts gross.</a:t>
             </a:r>
             <a:endParaRPr lang="en-US" sz="1400" dirty="0"/>
           </a:p>

--- a/day2-deck/decks/Talking Points - Day 2.pptx
+++ b/day2-deck/decks/Talking Points - Day 2.pptx
@@ -5427,7 +5427,7 @@
                 <a:ea typeface="Inter" pitchFamily="34" charset="-122"/>
                 <a:cs typeface="Inter" pitchFamily="34" charset="-120"/>
               </a:rPr>
-              <a:t>Group technician proficiency (sold hours / worked hours). 20 of 33 stores at or above 85%.</a:t>
+              <a:t>Group technician proficiency (hours flagged / clocked hours). 20 of 33 stores at or above 85%.</a:t>
             </a:r>
             <a:endParaRPr lang="en-US" sz="1400" dirty="0"/>
           </a:p>

--- a/day2-deck/decks/Talking Points - Day 2.pptx
+++ b/day2-deck/decks/Talking Points - Day 2.pptx
@@ -1681,7 +1681,7 @@
           <a:p>
             <a:r>
               <a:rPr lang="en-US" dirty="0"/>
-              <a:t>Source: Talking points: Service Manager Roundtable (Nov 15, 2024) and GM meeting decks (Jan and May 2026). Data: Qlik (Profit &amp; Loss, Closed Repair Orders, Productivity), Jan-Sep 2026 vs 2025, same-store, 33 stores, INEOS excluded.PLACE: Opcode Benchmarks, after MPI and Video Completion %, ahead of the op code closing % slides (moved out of Internal, Oct 23).
+              <a:t>Source: Talking points: Service Manager Roundtable (Nov 15, 2024) and GM meeting decks (Jan and May 2026). Data: Qlik (Profit &amp; Loss, Closed Repair Orders, Productivity), Jan-Sep 2026 vs 2025, same-store, 33 stores, INEOS excluded.PLACE: Opcode Benchmarks, after Basic Maintenance Service and ahead of MPI, Video and Photo Completion % (Noah, Oct 27: sets up the three inspection slides).
 Said: Jan GM slide 19 / May GM slide 15 (Tracking &amp; Accountability); Roundtable slide 16 (Performance Tracking).</a:t>
             </a:r>
             <a:endParaRPr lang="en-US" dirty="0"/>
@@ -11540,7 +11540,7 @@
         <p:spPr>
           <a:xfrm>
             <a:off x="7269480" y="1920240"/>
-            <a:ext cx="54864" cy="3794760"/>
+            <a:ext cx="54864" cy="1112520"/>
           </a:xfrm>
           <a:prstGeom prst="rect">
             <a:avLst/>
@@ -11601,7 +11601,7 @@
         <p:spPr>
           <a:xfrm>
             <a:off x="7452360" y="2441448"/>
-            <a:ext cx="4023360" cy="3291840"/>
+            <a:ext cx="4023360" cy="609600"/>
           </a:xfrm>
           <a:prstGeom prst="rect">
             <a:avLst/>
@@ -11639,6 +11639,206 @@
         </p:nvSpPr>
         <p:spPr>
           <a:xfrm>
+            <a:off x="7269480" y="3261360"/>
+            <a:ext cx="54864" cy="1112520"/>
+          </a:xfrm>
+          <a:prstGeom prst="rect">
+            <a:avLst/>
+          </a:prstGeom>
+          <a:solidFill>
+            <a:srgbClr val="2587C5"/>
+          </a:solidFill>
+          <a:ln/>
+        </p:spPr>
+      </p:sp>
+      <p:sp>
+        <p:nvSpPr>
+          <p:cNvPr id="14" name="Text 12"/>
+          <p:cNvSpPr txBox="1"/>
+          <p:nvPr/>
+        </p:nvSpPr>
+        <p:spPr>
+          <a:xfrm>
+            <a:off x="7452360" y="3215640"/>
+            <a:ext cx="4023360" cy="566928"/>
+          </a:xfrm>
+          <a:prstGeom prst="rect">
+            <a:avLst/>
+          </a:prstGeom>
+          <a:noFill/>
+          <a:ln/>
+        </p:spPr>
+        <p:txBody>
+          <a:bodyPr wrap="square" lIns="0" tIns="0" rIns="0" bIns="0" rtlCol="0" anchor="ctr">
+            <a:normAutofit/>
+          </a:bodyPr>
+          <a:lstStyle/>
+          <a:p>
+            <a:pPr indent="0" marL="0">
+              <a:buNone/>
+            </a:pPr>
+            <a:r>
+              <a:rPr lang="en-US" sz="3000" b="1" dirty="0">
+                <a:solidFill>
+                  <a:srgbClr val="0B2C4A"/>
+                </a:solidFill>
+                <a:latin typeface="Inter" pitchFamily="34" charset="0"/>
+                <a:ea typeface="Inter" pitchFamily="34" charset="-122"/>
+                <a:cs typeface="Inter" pitchFamily="34" charset="-120"/>
+              </a:rPr>
+              <a:t>57.8%</a:t>
+            </a:r>
+            <a:endParaRPr lang="en-US" sz="3000" dirty="0"/>
+          </a:p>
+        </p:txBody>
+      </p:sp>
+      <p:sp>
+        <p:nvSpPr>
+          <p:cNvPr id="15" name="Text 13"/>
+          <p:cNvSpPr txBox="1"/>
+          <p:nvPr/>
+        </p:nvSpPr>
+        <p:spPr>
+          <a:xfrm>
+            <a:off x="7452360" y="3782568"/>
+            <a:ext cx="4023360" cy="609600"/>
+          </a:xfrm>
+          <a:prstGeom prst="rect">
+            <a:avLst/>
+          </a:prstGeom>
+          <a:noFill/>
+          <a:ln/>
+        </p:spPr>
+        <p:txBody>
+          <a:bodyPr wrap="square" lIns="0" tIns="0" rIns="0" bIns="0" rtlCol="0" anchor="t"/>
+          <a:lstStyle/>
+          <a:p>
+            <a:pPr indent="0" marL="0">
+              <a:buNone/>
+            </a:pPr>
+            <a:r>
+              <a:rPr lang="en-US" sz="1400" dirty="0">
+                <a:solidFill>
+                  <a:srgbClr val="1A1A1A"/>
+                </a:solidFill>
+                <a:latin typeface="Inter" pitchFamily="34" charset="0"/>
+                <a:ea typeface="Inter" pitchFamily="34" charset="-122"/>
+                <a:cs typeface="Inter" pitchFamily="34" charset="-120"/>
+              </a:rPr>
+              <a:t>Video completion, July to September (store-reported). 17 of 33 stores at or above the group.</a:t>
+            </a:r>
+            <a:endParaRPr lang="en-US" sz="1400" dirty="0"/>
+          </a:p>
+        </p:txBody>
+      </p:sp>
+      <p:sp>
+        <p:nvSpPr>
+          <p:cNvPr id="16" name="Shape 14"/>
+          <p:cNvSpPr/>
+          <p:nvPr/>
+        </p:nvSpPr>
+        <p:spPr>
+          <a:xfrm>
+            <a:off x="7269480" y="4602480"/>
+            <a:ext cx="54864" cy="1112520"/>
+          </a:xfrm>
+          <a:prstGeom prst="rect">
+            <a:avLst/>
+          </a:prstGeom>
+          <a:solidFill>
+            <a:srgbClr val="2587C5"/>
+          </a:solidFill>
+          <a:ln/>
+        </p:spPr>
+      </p:sp>
+      <p:sp>
+        <p:nvSpPr>
+          <p:cNvPr id="17" name="Text 15"/>
+          <p:cNvSpPr txBox="1"/>
+          <p:nvPr/>
+        </p:nvSpPr>
+        <p:spPr>
+          <a:xfrm>
+            <a:off x="7452360" y="4556760"/>
+            <a:ext cx="4023360" cy="566928"/>
+          </a:xfrm>
+          <a:prstGeom prst="rect">
+            <a:avLst/>
+          </a:prstGeom>
+          <a:noFill/>
+          <a:ln/>
+        </p:spPr>
+        <p:txBody>
+          <a:bodyPr wrap="square" lIns="0" tIns="0" rIns="0" bIns="0" rtlCol="0" anchor="ctr">
+            <a:normAutofit/>
+          </a:bodyPr>
+          <a:lstStyle/>
+          <a:p>
+            <a:pPr indent="0" marL="0">
+              <a:buNone/>
+            </a:pPr>
+            <a:r>
+              <a:rPr lang="en-US" sz="3000" b="1" dirty="0">
+                <a:solidFill>
+                  <a:srgbClr val="0B2C4A"/>
+                </a:solidFill>
+                <a:latin typeface="Inter" pitchFamily="34" charset="0"/>
+                <a:ea typeface="Inter" pitchFamily="34" charset="-122"/>
+                <a:cs typeface="Inter" pitchFamily="34" charset="-120"/>
+              </a:rPr>
+              <a:t>45.3%</a:t>
+            </a:r>
+            <a:endParaRPr lang="en-US" sz="3000" dirty="0"/>
+          </a:p>
+        </p:txBody>
+      </p:sp>
+      <p:sp>
+        <p:nvSpPr>
+          <p:cNvPr id="18" name="Text 16"/>
+          <p:cNvSpPr txBox="1"/>
+          <p:nvPr/>
+        </p:nvSpPr>
+        <p:spPr>
+          <a:xfrm>
+            <a:off x="7452360" y="5123688"/>
+            <a:ext cx="4023360" cy="609600"/>
+          </a:xfrm>
+          <a:prstGeom prst="rect">
+            <a:avLst/>
+          </a:prstGeom>
+          <a:noFill/>
+          <a:ln/>
+        </p:spPr>
+        <p:txBody>
+          <a:bodyPr wrap="square" lIns="0" tIns="0" rIns="0" bIns="0" rtlCol="0" anchor="t"/>
+          <a:lstStyle/>
+          <a:p>
+            <a:pPr indent="0" marL="0">
+              <a:buNone/>
+            </a:pPr>
+            <a:r>
+              <a:rPr lang="en-US" sz="1400" dirty="0">
+                <a:solidFill>
+                  <a:srgbClr val="1A1A1A"/>
+                </a:solidFill>
+                <a:latin typeface="Inter" pitchFamily="34" charset="0"/>
+                <a:ea typeface="Inter" pitchFamily="34" charset="-122"/>
+                <a:cs typeface="Inter" pitchFamily="34" charset="-120"/>
+              </a:rPr>
+              <a:t>Photo completion, July to September. 11 of the 28 stores that report it at or above the group.</a:t>
+            </a:r>
+            <a:endParaRPr lang="en-US" sz="1400" dirty="0"/>
+          </a:p>
+        </p:txBody>
+      </p:sp>
+      <p:sp>
+        <p:nvSpPr>
+          <p:cNvPr id="19" name="Shape 17"/>
+          <p:cNvSpPr/>
+          <p:nvPr/>
+        </p:nvSpPr>
+        <p:spPr>
+          <a:xfrm>
             <a:off x="457200" y="6126480"/>
             <a:ext cx="11274552" cy="615696"/>
           </a:xfrm>
@@ -11653,7 +11853,7 @@
       </p:sp>
       <p:sp>
         <p:nvSpPr>
-          <p:cNvPr id="14" name="Text 12"/>
+          <p:cNvPr id="20" name="Text 18"/>
           <p:cNvSpPr txBox="1"/>
           <p:nvPr/>
         </p:nvSpPr>

--- a/day2-deck/decks/Talking Points - Day 2.pptx
+++ b/day2-deck/decks/Talking Points - Day 2.pptx
@@ -6000,7 +6000,7 @@
                 <a:ea typeface="Inter" pitchFamily="34" charset="-122"/>
                 <a:cs typeface="Inter" pitchFamily="34" charset="-120"/>
               </a:rPr>
-              <a:t>Pick the one number you will check every day, and name who owns it</a:t>
+              <a:t>Pick the one number you will check every day</a:t>
             </a:r>
             <a:endParaRPr lang="en-US" sz="1800" dirty="0"/>
           </a:p>

--- a/day2-deck/decks/Talking Points - Day 2.pptx
+++ b/day2-deck/decks/Talking Points - Day 2.pptx
@@ -6163,7 +6163,7 @@
                 <a:ea typeface="Inter" pitchFamily="34" charset="-122"/>
                 <a:cs typeface="Inter" pitchFamily="34" charset="-120"/>
               </a:rPr>
-              <a:t>Worth $4,543,691 of labor at today's ELR.</a:t>
+              <a:t>Worth $6,602,564 a year in labor and parts gross.</a:t>
             </a:r>
             <a:endParaRPr lang="en-US" sz="1400" dirty="0"/>
           </a:p>
@@ -8471,7 +8471,7 @@
                 <a:ea typeface="Inter" pitchFamily="34" charset="-122"/>
                 <a:cs typeface="Inter" pitchFamily="34" charset="-120"/>
               </a:rPr>
-              <a:t>Up 0.07, ahead in all nine months. Every 0.1 hour per RO is worth $4,543,691 of labor.</a:t>
+              <a:t>Up 0.07, ahead in all nine months. Every 0.1 hour per RO is worth $6.6M a year in gross.</a:t>
             </a:r>
             <a:endParaRPr lang="en-US" sz="1400" dirty="0"/>
           </a:p>
@@ -12382,7 +12382,7 @@
                 <a:ea typeface="Inter" pitchFamily="34" charset="-122"/>
                 <a:cs typeface="Inter" pitchFamily="34" charset="-120"/>
               </a:rPr>
-              <a:t>Alignment, balance, brake fluid and fuel service each rose 1.2-1.4 pts and beat 2025 every month.</a:t>
+              <a:t>Alignment, balance, brake fluid and fuel service each rose 1.3-1.4 pts and beat 2025 every month.</a:t>
             </a:r>
             <a:endParaRPr lang="en-US" sz="1400" dirty="0"/>
           </a:p>
@@ -12582,7 +12582,7 @@
                 <a:ea typeface="Inter" pitchFamily="34" charset="-122"/>
                 <a:cs typeface="Inter" pitchFamily="34" charset="-120"/>
               </a:rPr>
-              <a:t>Alignments short of 15%; the group is at 13.2%. Brake fluid is 0.7 pts from its 10%.</a:t>
+              <a:t>Alignments short of 15%; the group is at 13.2%. Brake fluid is 0.8 pts from its 10%.</a:t>
             </a:r>
             <a:endParaRPr lang="en-US" sz="1400" dirty="0"/>
           </a:p>

--- a/day2-deck/decks/Talking Points - Day 2.pptx
+++ b/day2-deck/decks/Talking Points - Day 2.pptx
@@ -516,7 +516,7 @@
           <a:p>
             <a:r>
               <a:rPr lang="en-US" dirty="0"/>
-              <a:t>Source: Qlik - Profit &amp; Loss, Jan-Sep 2026 vs 2025, all stores (INEOS included, to match the group P&amp;L). Fixed ops = service (Mechanical) + parts (P&amp;A) department profit: department gross less the department's own expenses. Group net = Net Profit Or Loss on the GM statement.PLACE: right after the agenda, before the Gross section. In the deck Oct 24 (Noah): group net profit view replaces the gross / absorption / net-to-gross tiles. Group-level view of fixed ops' weight in the dealership's profit, Jan-Sep. Fixed ops department profit $50,194,950 (2025 $45,336,135); group net profit $82,240,434 (2025 $95,664,709). On the P&amp;L, F&amp;I income, other income and store-level costs are not split by department, so 'the rest of the store' is the group net less fixed ops department profit. Group net = Net Profit Or Loss on the GM statement (P&amp;L summary), all stores; INEOS (opened 2026) is in both lines. Body shop (GMC Prescott) department profit is left out of fixed ops, as everywhere in the deck.</a:t>
+              <a:t>Source: Qlik - Profit &amp; Loss, Jan-Sep 2026 vs 2025, all stores (INEOS included, to match the group P&amp;L), except the 27 cents vs 7 cents tile, which is same-store (INEOS excluded; 27 cents either way). Fixed ops = service (Mechanical) + parts (P&amp;A) department profit: department gross less the department's own expenses. Group net = Net Profit Or Loss on the GM statement.PLACE: right after the agenda, before the Gross section. In the deck Oct 24 (Noah): group net profit view replaces the gross / absorption / net-to-gross tiles. Group-level view of fixed ops' weight in the dealership's profit, Jan-Sep. Fixed ops department profit $50,194,950 (2025 $45,336,135); group net profit $82,240,434 (2025 $95,664,709). On the P&amp;L, F&amp;I income, other income and store-level costs are not split by department, so 'the rest of the store' is the group net less fixed ops department profit. Group net = Net Profit Or Loss on the GM statement (P&amp;L summary), all stores; INEOS (opened 2026) is in both lines. Body shop (GMC Prescott) department profit is left out of fixed ops, as everywhere in the deck.</a:t>
             </a:r>
             <a:endParaRPr lang="en-US" dirty="0"/>
           </a:p>
@@ -604,7 +604,7 @@
           <a:p>
             <a:r>
               <a:rPr lang="en-US" dirty="0"/>
-              <a:t>Source: Talking points: Service Manager Roundtable (Nov 15, 2024) and GM meeting decks (Jan and May 2026). Data: Qlik (Profit &amp; Loss, Closed Repair Orders, Productivity), Jan-Sep 2026 vs 2025, same-store, 33 stores, INEOS excluded.PLACE: Warranty section, after the section break, ahead of Warranty Rate Increases (Oct 22: $3,788,200 added gross profit from the YTD RWR Financials vendor report replaced the warranty RO count here).
+              <a:t>Source: Talking points: Service Manager Roundtable (Nov 15, 2024) and GM meeting decks (Jan and May 2026). Data: Qlik (Profit &amp; Loss, Closed Repair Orders, Productivity), Jan-Sep 2026 vs 2025, same-store, 33 stores, INEOS excluded.PLACE: Warranty section, after the section break, ahead of Warranty Rates Are Rising (Oct 22: $3,788,200 added gross profit from the YTD RWR Financials vendor report replaced the warranty RO count here).
 Said: Jan GM slides 13-14 (audit chargebacks; Warranty Compliance). The Jan slide named six stores' chargebacks; kept to the $400,000 total here, in line with no store call-outs from the podium.</a:t>
             </a:r>
             <a:endParaRPr lang="en-US" dirty="0"/>
@@ -1323,7 +1323,7 @@
               <a:rPr lang="en-US" dirty="0"/>
               <a:t>Source: Talking points: Service Manager Roundtable (Nov 15, 2024) and GM meeting decks (Jan and May 2026). Data: Qlik (Profit &amp; Loss, Closed Repair Orders, Productivity), Jan-Sep 2026 vs 2025, same-store, 33 stores, INEOS excluded.PLACE: CP Engine section, after the CP RO Count slides and before Hours per RO.
 Said: Jan/May GM slides on Appointment Scheduling, Appointment Discipline, Phone Call Handling and Retention Management (Jan 2, 7, 9, 11; May 2, 4, 8, 9).
-Optional: the Flai voice AI service view (Jul 16-Aug 15 pull: 4,368 of 8,351 transfers rang out) fits here, but it is a different source and period; refresh it before use and keep it off any slide with a P&amp;L number.</a:t>
+The two Flai voice AI slides (Jul 26 - Oct 26, 2026) follow this one; keep Flai figures off any slide with a P&amp;L number.</a:t>
             </a:r>
             <a:endParaRPr lang="en-US" dirty="0"/>
           </a:p>
@@ -4055,7 +4055,7 @@
                 <a:ea typeface="Inter" pitchFamily="34" charset="-122"/>
                 <a:cs typeface="Inter" pitchFamily="34" charset="-120"/>
               </a:rPr>
-              <a:t>Fixed ops staff, Sep to Sep, to 1,540 (−4.7%): technicians −17, advisors −7, managers −3.</a:t>
+              <a:t>Fixed ops staff, September to September, to 1,540 (−4.7%): technicians −17, advisors −7, managers −3.</a:t>
             </a:r>
             <a:endParaRPr lang="en-US" sz="1400" dirty="0"/>
           </a:p>
@@ -4155,7 +4155,7 @@
                 <a:ea typeface="Inter" pitchFamily="34" charset="-122"/>
                 <a:cs typeface="Inter" pitchFamily="34" charset="-120"/>
               </a:rPr>
-              <a:t>Fixed gross per fixed employee a month, up $1,207. Gross grew 4.1% with 5.1% fewer people.</a:t>
+              <a:t>Fixed gross per fixed employee a month, up $1,207. Gross grew 4.1% with 5.1% fewer people on average.</a:t>
             </a:r>
             <a:endParaRPr lang="en-US" sz="1400" dirty="0"/>
           </a:p>
@@ -7796,7 +7796,7 @@
                 <a:ea typeface="Inter" pitchFamily="34" charset="-122"/>
                 <a:cs typeface="Inter" pitchFamily="34" charset="-120"/>
               </a:rPr>
-              <a:t>$20.59M</a:t>
+              <a:t>$20.98M</a:t>
             </a:r>
             <a:endParaRPr lang="en-US" sz="3000" dirty="0"/>
           </a:p>
@@ -7835,7 +7835,7 @@
                 <a:ea typeface="Inter" pitchFamily="34" charset="-122"/>
                 <a:cs typeface="Inter" pitchFamily="34" charset="-120"/>
               </a:rPr>
-              <a:t>Fixed ops gross a month over the last twelve months.</a:t>
+              <a:t>Fixed ops gross a month, January through September 2026.</a:t>
             </a:r>
             <a:endParaRPr lang="en-US" sz="1400" dirty="0"/>
           </a:p>

--- a/day2-deck/decks/Talking Points - Day 2.pptx
+++ b/day2-deck/decks/Talking Points - Day 2.pptx
@@ -3842,7 +3842,7 @@
               <a:buChar char="•"/>
             </a:pPr>
             <a:r>
-              <a:rPr lang="en-US" sz="1800" dirty="0">
+              <a:rPr lang="en-US" sz="1600" dirty="0">
                 <a:solidFill>
                   <a:srgbClr val="1A1A1A"/>
                 </a:solidFill>
@@ -3852,7 +3852,7 @@
               </a:rPr>
               <a:t>Our most valuable asset: this is what separates us</a:t>
             </a:r>
-            <a:endParaRPr lang="en-US" sz="1800" dirty="0"/>
+            <a:endParaRPr lang="en-US" sz="1600" dirty="0"/>
           </a:p>
           <a:p>
             <a:pPr marL="228600" indent="-228600">
@@ -3863,7 +3863,7 @@
               <a:buChar char="•"/>
             </a:pPr>
             <a:r>
-              <a:rPr lang="en-US" sz="1800" dirty="0">
+              <a:rPr lang="en-US" sz="1600" dirty="0">
                 <a:solidFill>
                   <a:srgbClr val="1A1A1A"/>
                 </a:solidFill>
@@ -3873,7 +3873,7 @@
               </a:rPr>
               <a:t>Invest in training and a defined career path. Be the best place to work.</a:t>
             </a:r>
-            <a:endParaRPr lang="en-US" sz="1800" dirty="0"/>
+            <a:endParaRPr lang="en-US" sz="1600" dirty="0"/>
           </a:p>
           <a:p>
             <a:pPr marL="228600" indent="-228600">
@@ -3884,7 +3884,7 @@
               <a:buChar char="•"/>
             </a:pPr>
             <a:r>
-              <a:rPr lang="en-US" sz="1800" dirty="0">
+              <a:rPr lang="en-US" sz="1600" dirty="0">
                 <a:solidFill>
                   <a:srgbClr val="1A1A1A"/>
                 </a:solidFill>
@@ -3894,7 +3894,7 @@
               </a:rPr>
               <a:t>Grow your own techs, advisors and managers: apprentice programs, develop your bench, train your replacement</a:t>
             </a:r>
-            <a:endParaRPr lang="en-US" sz="1800" dirty="0"/>
+            <a:endParaRPr lang="en-US" sz="1600" dirty="0"/>
           </a:p>
           <a:p>
             <a:pPr marL="228600" indent="-228600">
@@ -3905,7 +3905,7 @@
               <a:buChar char="•"/>
             </a:pPr>
             <a:r>
-              <a:rPr lang="en-US" sz="1800" dirty="0">
+              <a:rPr lang="en-US" sz="1600" dirty="0">
                 <a:solidFill>
                   <a:srgbClr val="1A1A1A"/>
                 </a:solidFill>
@@ -3915,7 +3915,7 @@
               </a:rPr>
               <a:t>Always be teaching, training and educating</a:t>
             </a:r>
-            <a:endParaRPr lang="en-US" sz="1800" dirty="0"/>
+            <a:endParaRPr lang="en-US" sz="1600" dirty="0"/>
           </a:p>
           <a:p>
             <a:pPr marL="228600" indent="-228600">
@@ -3926,17 +3926,17 @@
               <a:buChar char="•"/>
             </a:pPr>
             <a:r>
-              <a:rPr lang="en-US" sz="1800" dirty="0">
-                <a:solidFill>
-                  <a:srgbClr val="1A1A1A"/>
-                </a:solidFill>
-                <a:latin typeface="Inter" pitchFamily="34" charset="0"/>
-                <a:ea typeface="Inter" pitchFamily="34" charset="-122"/>
-                <a:cs typeface="Inter" pitchFamily="34" charset="-120"/>
-              </a:rPr>
-              <a:t>Being short-handed limits scheduling, loses opportunities and leads to missed MPIs</a:t>
-            </a:r>
-            <a:endParaRPr lang="en-US" sz="1800" dirty="0"/>
+              <a:rPr lang="en-US" sz="1600" dirty="0">
+                <a:solidFill>
+                  <a:srgbClr val="1A1A1A"/>
+                </a:solidFill>
+                <a:latin typeface="Inter" pitchFamily="34" charset="0"/>
+                <a:ea typeface="Inter" pitchFamily="34" charset="-122"/>
+                <a:cs typeface="Inter" pitchFamily="34" charset="-120"/>
+              </a:rPr>
+              <a:t>Don't overlook opportunities to teach, train and educate</a:t>
+            </a:r>
+            <a:endParaRPr lang="en-US" sz="1600" dirty="0"/>
           </a:p>
           <a:p>
             <a:pPr marL="228600" indent="-228600">
@@ -3947,17 +3947,38 @@
               <a:buChar char="•"/>
             </a:pPr>
             <a:r>
-              <a:rPr lang="en-US" sz="1800" dirty="0">
-                <a:solidFill>
-                  <a:srgbClr val="1A1A1A"/>
-                </a:solidFill>
-                <a:latin typeface="Inter" pitchFamily="34" charset="0"/>
-                <a:ea typeface="Inter" pitchFamily="34" charset="-122"/>
-                <a:cs typeface="Inter" pitchFamily="34" charset="-120"/>
-              </a:rPr>
-              <a:t>Clear pay plans, job descriptions and expectations</a:t>
-            </a:r>
-            <a:endParaRPr lang="en-US" sz="1800" dirty="0"/>
+              <a:rPr lang="en-US" sz="1600" dirty="0">
+                <a:solidFill>
+                  <a:srgbClr val="1A1A1A"/>
+                </a:solidFill>
+                <a:latin typeface="Inter" pitchFamily="34" charset="0"/>
+                <a:ea typeface="Inter" pitchFamily="34" charset="-122"/>
+                <a:cs typeface="Inter" pitchFamily="34" charset="-120"/>
+              </a:rPr>
+              <a:t>Being short-handed limits scheduling, loses opportunities and leads to missed MPIs</a:t>
+            </a:r>
+            <a:endParaRPr lang="en-US" sz="1600" dirty="0"/>
+          </a:p>
+          <a:p>
+            <a:pPr marL="228600" indent="-228600">
+              <a:spcAft>
+                <a:spcPts val="800"/>
+              </a:spcAft>
+              <a:buSzPct val="100000"/>
+              <a:buChar char="•"/>
+            </a:pPr>
+            <a:r>
+              <a:rPr lang="en-US" sz="1600" dirty="0">
+                <a:solidFill>
+                  <a:srgbClr val="1A1A1A"/>
+                </a:solidFill>
+                <a:latin typeface="Inter" pitchFamily="34" charset="0"/>
+                <a:ea typeface="Inter" pitchFamily="34" charset="-122"/>
+                <a:cs typeface="Inter" pitchFamily="34" charset="-120"/>
+              </a:rPr>
+              <a:t>Clear pay plans, job descriptions and expectations, and hold people accountable to them</a:t>
+            </a:r>
+            <a:endParaRPr lang="en-US" sz="1600" dirty="0"/>
           </a:p>
         </p:txBody>
       </p:sp>
@@ -7796,7 +7817,7 @@
                 <a:ea typeface="Inter" pitchFamily="34" charset="-122"/>
                 <a:cs typeface="Inter" pitchFamily="34" charset="-120"/>
               </a:rPr>
-              <a:t>$20.98M</a:t>
+              <a:t>+$829,841</a:t>
             </a:r>
             <a:endParaRPr lang="en-US" sz="3000" dirty="0"/>
           </a:p>
@@ -7835,7 +7856,7 @@
                 <a:ea typeface="Inter" pitchFamily="34" charset="-122"/>
                 <a:cs typeface="Inter" pitchFamily="34" charset="-120"/>
               </a:rPr>
-              <a:t>Fixed ops gross a month, January through September 2026.</a:t>
+              <a:t>More fixed ops gross than 2025, on average, every month January through September.</a:t>
             </a:r>
             <a:endParaRPr lang="en-US" sz="1400" dirty="0"/>
           </a:p>

--- a/day2-deck/decks/Talking Points - Day 2.pptx
+++ b/day2-deck/decks/Talking Points - Day 2.pptx
@@ -1053,7 +1053,7 @@
             <a:r>
               <a:rPr lang="en-US" dirty="0"/>
               <a:t>Source: Qlik - Profit &amp; Loss, Detail statement, Jan-Sep 2026, same-store. Kept = department gross less the department's own expenses. Vehicle sales = new + used departments plus F&amp;I income and F&amp;I compensation. Other income not assigned to a department (doc fees, packs, factory money, holdback: $87.2M net) and management fees are left out of both.PLACE: Internal section, after the section break and before Internal ELR (Noah, Oct 25).
-Talk track: a lot of stores see internal as service making money off sales. It isn't: sales prices a car off its cost, within reason, so a fair internal charge is part of the deal, and the gross lands in the department that keeps the most of it. Example: if sales makes $500 of gross on a car, the commissions, pay and expense that come out of it leave far less than the same $500 of internal gross keeps in service and parts.
+Talk track: internal work is protected gross generated on our own vehicles. Sales prices a car off its cost, within reason, so a fair internal charge is part of the deal, and the gross lands in the department that keeps the most of it. Example: if sales makes $500 of gross on a car, the commissions, pay and expense that come out of it leave far less than the same $500 of internal gross keeps in service and parts.
 Numbers (P&amp;L Detail, Jan-Sep 2026, same-store): fixed ops gross $188.8M, department profit $50.4M (27¢); people $85.7M (45¢). Vehicle sales gross (new $58.7M, used $43.8M, F&amp;I $76.6M) $179.1M; new and used department results $-23.0M and $-25.4M, less F&amp;I compensation $15.3M: $12.9M kept (7¢); people and commissions $110.4M (62¢). Caveat: $87.2M of net other income (doc fees, packs, factory money, holdback, interest) is booked outside the departments and most of it comes with vehicle sales; with it, vehicle sales keeps much more. The comparison is department against department, as the P&amp;L reports them.</a:t>
             </a:r>
             <a:endParaRPr lang="en-US" dirty="0"/>
@@ -6715,7 +6715,7 @@
                 <a:ea typeface="Inter" pitchFamily="34" charset="-122"/>
                 <a:cs typeface="Inter" pitchFamily="34" charset="-120"/>
               </a:rPr>
-              <a:t>Internal work isn't service making money off sales: it is gross the store earns on its own cars</a:t>
+              <a:t>Internal work is protected gross generated on our own vehicles</a:t>
             </a:r>
             <a:endParaRPr lang="en-US" sz="1800" dirty="0"/>
           </a:p>

--- a/day2-deck/decks/Talking Points - Day 2.pptx
+++ b/day2-deck/decks/Talking Points - Day 2.pptx
@@ -516,7 +516,7 @@
           <a:p>
             <a:r>
               <a:rPr lang="en-US" dirty="0"/>
-              <a:t>Source: Qlik - Profit &amp; Loss, Jan-Sep 2026 vs 2025, all stores (INEOS included, to match the group P&amp;L), except the 27 cents vs 7 cents tile, which is same-store (INEOS excluded; 27 cents either way). Fixed ops = service (Mechanical) + parts (P&amp;A) department profit: department gross less the department's own expenses. Group net = Net Profit Or Loss on the GM statement.PLACE: right after the agenda, before the Gross section. In the deck Oct 24 (Noah): group net profit view replaces the gross / absorption / net-to-gross tiles. Group-level view of fixed ops' weight in the dealership's profit, Jan-Sep. Fixed ops department profit $50,194,950 (2025 $45,336,135); group net profit $82,240,434 (2025 $95,664,709). On the P&amp;L, F&amp;I income, other income and store-level costs are not split by department, so 'the rest of the store' is the group net less fixed ops department profit. Group net = Net Profit Or Loss on the GM statement (P&amp;L summary), all stores; INEOS (opened 2026) is in both lines. Body shop (GMC Prescott) department profit is left out of fixed ops, as everywhere in the deck.</a:t>
+              <a:t>Source: Qlik - Profit &amp; Loss, Jan-Sep 2026 vs 2025, same-store (INEOS excluded, opened 2026), as on the Fixed Ops Net Profit slides. Fixed ops = service (Mechanical) + parts (P&amp;A) department profit: department gross less the department's own expenses. Group net = Net Profit Or Loss on the GM statement.PLACE: right after the agenda, before the Gross section. In the deck Oct 24 (Noah): group net profit view replaces the gross / absorption / net-to-gross tiles. Group-level view of fixed ops' weight in the dealership's profit, Jan-Sep. Fixed ops department profit $50,449,894 (2025 $45,336,135); group net profit $82,743,115 (2025 $95,664,709). On the P&amp;L, F&amp;I income, other income and store-level costs are not split by department, so 'the rest of the store' is the group net less fixed ops department profit. Group net = Net Profit Or Loss on the GM statement (P&amp;L summary), same-store: INEOS (opened 2026) is out of both lines, as on the Fixed Ops Net Profit slides (Noah, Oct 29; all stores in, it was $50.19M of $82.24M). Body shop (GMC Prescott) department profit is left out of fixed ops, as everywhere in the deck.</a:t>
             </a:r>
             <a:endParaRPr lang="en-US" dirty="0"/>
           </a:p>
@@ -2565,7 +2565,7 @@
                 <a:ea typeface="Inter" pitchFamily="34" charset="-122"/>
                 <a:cs typeface="Inter" pitchFamily="34" charset="-120"/>
               </a:rPr>
-              <a:t>61%</a:t>
+              <a:t>61.0%</a:t>
             </a:r>
             <a:endParaRPr lang="en-US" sz="3000" dirty="0"/>
           </a:p>
@@ -2604,7 +2604,7 @@
                 <a:ea typeface="Inter" pitchFamily="34" charset="-122"/>
                 <a:cs typeface="Inter" pitchFamily="34" charset="-120"/>
               </a:rPr>
-              <a:t>of the group's net profit came from service and parts: $50.19M of $82.24M (47% in 2025).</a:t>
+              <a:t>of the group's net profit came from service and parts: $50.45M of $82.74M (47.4% in 2025).</a:t>
             </a:r>
             <a:endParaRPr lang="en-US" sz="1400" dirty="0"/>
           </a:p>
@@ -2765,7 +2765,7 @@
                 <a:ea typeface="Inter" pitchFamily="34" charset="-122"/>
                 <a:cs typeface="Inter" pitchFamily="34" charset="-120"/>
               </a:rPr>
-              <a:t>+$4,858,815</a:t>
+              <a:t>+$5,113,759</a:t>
             </a:r>
             <a:endParaRPr lang="en-US" sz="3000" dirty="0"/>
           </a:p>
@@ -2804,7 +2804,7 @@
                 <a:ea typeface="Inter" pitchFamily="34" charset="-122"/>
                 <a:cs typeface="Inter" pitchFamily="34" charset="-120"/>
               </a:rPr>
-              <a:t>More fixed ops profit than 2025, while group net profit fell $13.42M.</a:t>
+              <a:t>More fixed ops profit than 2025, while group net profit fell $12.92M.</a:t>
             </a:r>
             <a:endParaRPr lang="en-US" sz="1400" dirty="0"/>
           </a:p>

--- a/day2-deck/decks/Talking Points - Day 2.pptx
+++ b/day2-deck/decks/Talking Points - Day 2.pptx
@@ -2565,7 +2565,7 @@
                 <a:ea typeface="Inter" pitchFamily="34" charset="-122"/>
                 <a:cs typeface="Inter" pitchFamily="34" charset="-120"/>
               </a:rPr>
-              <a:t>61.0%</a:t>
+              <a:t>61%</a:t>
             </a:r>
             <a:endParaRPr lang="en-US" sz="3000" dirty="0"/>
           </a:p>
@@ -2604,7 +2604,7 @@
                 <a:ea typeface="Inter" pitchFamily="34" charset="-122"/>
                 <a:cs typeface="Inter" pitchFamily="34" charset="-120"/>
               </a:rPr>
-              <a:t>of the group's net profit came from service and parts: $50.45M of $82.74M (47.4% in 2025).</a:t>
+              <a:t>of the group's net profit came from service and parts: $50.45M of $82.74M (47% in 2025).</a:t>
             </a:r>
             <a:endParaRPr lang="en-US" sz="1400" dirty="0"/>
           </a:p>

--- a/day2-deck/decks/Talking Points - Day 2.pptx
+++ b/day2-deck/decks/Talking Points - Day 2.pptx
@@ -2863,7 +2863,7 @@
                 <a:ea typeface="Inter" pitchFamily="34" charset="-122"/>
                 <a:cs typeface="Inter" pitchFamily="34" charset="-120"/>
               </a:rPr>
-              <a:t>The ask: leave today with one or two things you will put in place before year end, and tell the room what they are.</a:t>
+              <a:t>The ask: leave today with one or two actionable items you will put in place at your store before year end, and hold your team to them.</a:t>
             </a:r>
             <a:endParaRPr lang="en-US" sz="1600" dirty="0"/>
           </a:p>
